--- a/presentation/Pulso_Pitch_Deck.pptx
+++ b/presentation/Pulso_Pitch_Deck.pptx
@@ -14,9 +14,11 @@
     <p:sldId id="262" r:id="rId8"/>
     <p:sldId id="263" r:id="rId9"/>
     <p:sldId id="264" r:id="rId10"/>
+    <p:sldId id="265" r:id="rId11"/>
+    <p:sldId id="266" r:id="rId12"/>
   </p:sldIdLst>
   <p:notesMasterIdLst>
-    <p:notesMasterId r:id="rId11"/>
+    <p:notesMasterId r:id="rId13"/>
   </p:notesMasterIdLst>
   <p:sldSz cx="12192000" cy="6858000"/>
   <p:notesSz cx="6858000" cy="12192000"/>
@@ -552,6 +554,182 @@
 </p:notes>
 </file>
 
+<file path=ppt/notesSlides/notesSlide10.xml><?xml version="1.0" encoding="utf-8"?>
+<p:notes xmlns:a="http://schemas.openxmlformats.org/drawingml/2006/main" xmlns:r="http://schemas.openxmlformats.org/officeDocument/2006/relationships" xmlns:p="http://schemas.openxmlformats.org/presentationml/2006/main">
+  <p:cSld>
+    <p:spTree>
+      <p:nvGrpSpPr>
+        <p:cNvPr id="1" name=""/>
+        <p:cNvGrpSpPr/>
+        <p:nvPr/>
+      </p:nvGrpSpPr>
+      <p:grpSpPr>
+        <a:xfrm>
+          <a:off x="0" y="0"/>
+          <a:ext cx="0" cy="0"/>
+          <a:chOff x="0" y="0"/>
+          <a:chExt cx="0" cy="0"/>
+        </a:xfrm>
+      </p:grpSpPr>
+      <p:sp>
+        <p:nvSpPr>
+          <p:cNvPr id="2" name="Slide Image Placeholder 1"/>
+          <p:cNvSpPr>
+            <a:spLocks noGrp="1" noRot="1" noChangeAspect="1"/>
+          </p:cNvSpPr>
+          <p:nvPr>
+            <p:ph type="sldImg"/>
+          </p:nvPr>
+        </p:nvSpPr>
+        <p:spPr/>
+      </p:sp>
+      <p:sp>
+        <p:nvSpPr>
+          <p:cNvPr id="3" name="Notes Placeholder 2"/>
+          <p:cNvSpPr>
+            <a:spLocks noGrp="1"/>
+          </p:cNvSpPr>
+          <p:nvPr>
+            <p:ph type="body" idx="1"/>
+          </p:nvPr>
+        </p:nvSpPr>
+        <p:spPr/>
+        <p:txBody>
+          <a:bodyPr/>
+          <a:lstStyle/>
+          <a:p>
+            <a:r>
+              <a:rPr lang="en-US" dirty="0"/>
+              <a:t>Keep this to ten seconds -- roadmap slides lose a room fast if you linger.</a:t>
+            </a:r>
+            <a:endParaRPr lang="en-US" dirty="0"/>
+          </a:p>
+        </p:txBody>
+      </p:sp>
+      <p:sp>
+        <p:nvSpPr>
+          <p:cNvPr id="4" name="Slide Number Placeholder 3"/>
+          <p:cNvSpPr>
+            <a:spLocks noGrp="1"/>
+          </p:cNvSpPr>
+          <p:nvPr>
+            <p:ph type="sldNum" sz="quarter" idx="10"/>
+          </p:nvPr>
+        </p:nvSpPr>
+        <p:spPr/>
+        <p:txBody>
+          <a:bodyPr/>
+          <a:lstStyle/>
+          <a:p>
+            <a:fld id="{F7021451-1387-4CA6-816F-3879F97B5CBC}" type="slidenum">
+              <a:rPr lang="en-US"/>
+              <a:t>10</a:t>
+            </a:fld>
+            <a:endParaRPr lang="en-US"/>
+          </a:p>
+        </p:txBody>
+      </p:sp>
+    </p:spTree>
+    <p:extLst>
+      <p:ext uri="{BB962C8B-B14F-4D97-AF65-F5344CB8AC3E}">
+        <p14:creationId xmlns:p14="http://schemas.microsoft.com/office/powerpoint/2010/main" val="1024086991"/>
+      </p:ext>
+    </p:extLst>
+  </p:cSld>
+  <p:clrMapOvr>
+    <a:masterClrMapping/>
+  </p:clrMapOvr>
+</p:notes>
+</file>
+
+<file path=ppt/notesSlides/notesSlide11.xml><?xml version="1.0" encoding="utf-8"?>
+<p:notes xmlns:a="http://schemas.openxmlformats.org/drawingml/2006/main" xmlns:r="http://schemas.openxmlformats.org/officeDocument/2006/relationships" xmlns:p="http://schemas.openxmlformats.org/presentationml/2006/main">
+  <p:cSld>
+    <p:spTree>
+      <p:nvGrpSpPr>
+        <p:cNvPr id="1" name=""/>
+        <p:cNvGrpSpPr/>
+        <p:nvPr/>
+      </p:nvGrpSpPr>
+      <p:grpSpPr>
+        <a:xfrm>
+          <a:off x="0" y="0"/>
+          <a:ext cx="0" cy="0"/>
+          <a:chOff x="0" y="0"/>
+          <a:chExt cx="0" cy="0"/>
+        </a:xfrm>
+      </p:grpSpPr>
+      <p:sp>
+        <p:nvSpPr>
+          <p:cNvPr id="2" name="Slide Image Placeholder 1"/>
+          <p:cNvSpPr>
+            <a:spLocks noGrp="1" noRot="1" noChangeAspect="1"/>
+          </p:cNvSpPr>
+          <p:nvPr>
+            <p:ph type="sldImg"/>
+          </p:nvPr>
+        </p:nvSpPr>
+        <p:spPr/>
+      </p:sp>
+      <p:sp>
+        <p:nvSpPr>
+          <p:cNvPr id="3" name="Notes Placeholder 2"/>
+          <p:cNvSpPr>
+            <a:spLocks noGrp="1"/>
+          </p:cNvSpPr>
+          <p:nvPr>
+            <p:ph type="body" idx="1"/>
+          </p:nvPr>
+        </p:nvSpPr>
+        <p:spPr/>
+        <p:txBody>
+          <a:bodyPr/>
+          <a:lstStyle/>
+          <a:p>
+            <a:r>
+              <a:rPr lang="en-US" dirty="0"/>
+              <a:t>End on silence for a beat before taking questions -- don't rush off this slide.</a:t>
+            </a:r>
+            <a:endParaRPr lang="en-US" dirty="0"/>
+          </a:p>
+        </p:txBody>
+      </p:sp>
+      <p:sp>
+        <p:nvSpPr>
+          <p:cNvPr id="4" name="Slide Number Placeholder 3"/>
+          <p:cNvSpPr>
+            <a:spLocks noGrp="1"/>
+          </p:cNvSpPr>
+          <p:nvPr>
+            <p:ph type="sldNum" sz="quarter" idx="10"/>
+          </p:nvPr>
+        </p:nvSpPr>
+        <p:spPr/>
+        <p:txBody>
+          <a:bodyPr/>
+          <a:lstStyle/>
+          <a:p>
+            <a:fld id="{F7021451-1387-4CA6-816F-3879F97B5CBC}" type="slidenum">
+              <a:rPr lang="en-US"/>
+              <a:t>11</a:t>
+            </a:fld>
+            <a:endParaRPr lang="en-US"/>
+          </a:p>
+        </p:txBody>
+      </p:sp>
+    </p:spTree>
+    <p:extLst>
+      <p:ext uri="{BB962C8B-B14F-4D97-AF65-F5344CB8AC3E}">
+        <p14:creationId xmlns:p14="http://schemas.microsoft.com/office/powerpoint/2010/main" val="1024086991"/>
+      </p:ext>
+    </p:extLst>
+  </p:cSld>
+  <p:clrMapOvr>
+    <a:masterClrMapping/>
+  </p:clrMapOvr>
+</p:notes>
+</file>
+
 <file path=ppt/notesSlides/notesSlide2.xml><?xml version="1.0" encoding="utf-8"?>
 <p:notes xmlns:a="http://schemas.openxmlformats.org/drawingml/2006/main" xmlns:r="http://schemas.openxmlformats.org/officeDocument/2006/relationships" xmlns:p="http://schemas.openxmlformats.org/presentationml/2006/main">
   <p:cSld>
@@ -774,7 +952,7 @@
           <a:p>
             <a:r>
               <a:rPr lang="en-US" dirty="0"/>
-              <a:t>Switch to the actual phone browser here if the connection holds. If not, this slide alone still shows real waveform + readouts -- don't apologize, just say 'here's what it looks like live' and move on.</a:t>
+              <a:t>Switch to the actual phone browser here if the connection holds. If not, this slide alone still shows real waveform + readouts -- don't apologize, just say 'here's what it looks like live' and move on. If the mic stalls on stage, tap the built-in 'play a sample reading' link instead of fighting it.</a:t>
             </a:r>
             <a:endParaRPr lang="en-US" dirty="0"/>
           </a:p>
@@ -1126,7 +1304,7 @@
           <a:p>
             <a:r>
               <a:rPr lang="en-US" dirty="0"/>
-              <a:t>Keep this to ten seconds -- roadmap slides lose a room fast if you linger.</a:t>
+              <a:t>The regulatory line is the one most teams won't have. Say it plainly -- it shows you thought about go-to-market, not just the demo.</a:t>
             </a:r>
             <a:endParaRPr lang="en-US" dirty="0"/>
           </a:p>
@@ -1214,7 +1392,7 @@
           <a:p>
             <a:r>
               <a:rPr lang="en-US" dirty="0"/>
-              <a:t>End on silence for a beat before taking questions -- don't rush off this slide.</a:t>
+              <a:t>Say clearly this is the plan, not something live today -- judges respect a clear proposal, they don't expect a hackathon team to have market-tested pricing yet.</a:t>
             </a:r>
             <a:endParaRPr lang="en-US" dirty="0"/>
           </a:p>
@@ -1803,6 +1981,740 @@
 </p:sld>
 </file>
 
+<file path=ppt/slides/slide10.xml><?xml version="1.0" encoding="utf-8"?>
+<p:sld xmlns:a="http://schemas.openxmlformats.org/drawingml/2006/main" xmlns:r="http://schemas.openxmlformats.org/officeDocument/2006/relationships" xmlns:p="http://schemas.openxmlformats.org/presentationml/2006/main">
+  <p:cSld name="Slide 10">
+    <p:bg>
+      <p:bgPr>
+        <a:blipFill dpi="0" rotWithShape="1">
+          <a:blip r:embed="rId1">
+            <a:lum/>
+          </a:blip>
+          <a:srcRect/>
+          <a:stretch>
+            <a:fillRect/>
+          </a:stretch>
+        </a:blipFill>
+        <a:effectLst/>
+      </p:bgPr>
+    </p:bg>
+    <p:spTree>
+      <p:nvGrpSpPr>
+        <p:cNvPr id="1" name=""/>
+        <p:cNvGrpSpPr/>
+        <p:nvPr/>
+      </p:nvGrpSpPr>
+      <p:grpSpPr>
+        <a:xfrm>
+          <a:off x="0" y="0"/>
+          <a:ext cx="0" cy="0"/>
+          <a:chOff x="0" y="0"/>
+          <a:chExt cx="0" cy="0"/>
+        </a:xfrm>
+      </p:grpSpPr>
+      <p:sp>
+        <p:nvSpPr>
+          <p:cNvPr id="2" name="Text 0"/>
+          <p:cNvSpPr/>
+          <p:nvPr/>
+        </p:nvSpPr>
+        <p:spPr>
+          <a:xfrm>
+            <a:off x="822960" y="502920"/>
+            <a:ext cx="5486400" cy="292608"/>
+          </a:xfrm>
+          <a:prstGeom prst="rect">
+            <a:avLst/>
+          </a:prstGeom>
+          <a:noFill/>
+          <a:ln/>
+        </p:spPr>
+        <p:txBody>
+          <a:bodyPr wrap="square" lIns="0" tIns="0" rIns="0" bIns="0" rtlCol="0" anchor="ctr"/>
+          <a:lstStyle/>
+          <a:p>
+            <a:pPr algn="l" indent="0" marL="0">
+              <a:buNone/>
+            </a:pPr>
+            <a:r>
+              <a:rPr lang="en-US" sz="1100" b="1" spc="200" kern="0" dirty="0">
+                <a:solidFill>
+                  <a:srgbClr val="8E939A"/>
+                </a:solidFill>
+                <a:latin typeface="Courier New" pitchFamily="34" charset="0"/>
+                <a:ea typeface="Courier New" pitchFamily="34" charset="-122"/>
+                <a:cs typeface="Courier New" pitchFamily="34" charset="-120"/>
+              </a:rPr>
+              <a:t>WHAT'S NEXT</a:t>
+            </a:r>
+            <a:endParaRPr lang="en-US" sz="1100" dirty="0"/>
+          </a:p>
+        </p:txBody>
+      </p:sp>
+      <p:sp>
+        <p:nvSpPr>
+          <p:cNvPr id="3" name="Text 1"/>
+          <p:cNvSpPr/>
+          <p:nvPr/>
+        </p:nvSpPr>
+        <p:spPr>
+          <a:xfrm>
+            <a:off x="822960" y="868680"/>
+            <a:ext cx="7315200" cy="822960"/>
+          </a:xfrm>
+          <a:prstGeom prst="rect">
+            <a:avLst/>
+          </a:prstGeom>
+          <a:noFill/>
+          <a:ln/>
+        </p:spPr>
+        <p:txBody>
+          <a:bodyPr wrap="square" lIns="0" tIns="0" rIns="0" bIns="0" rtlCol="0" anchor="t"/>
+          <a:lstStyle/>
+          <a:p>
+            <a:pPr algn="l" indent="0" marL="0">
+              <a:buNone/>
+            </a:pPr>
+            <a:r>
+              <a:rPr lang="en-US" sz="3000" dirty="0">
+                <a:solidFill>
+                  <a:srgbClr val="141619"/>
+                </a:solidFill>
+                <a:latin typeface="Cambria" pitchFamily="34" charset="0"/>
+                <a:ea typeface="Cambria" pitchFamily="34" charset="-122"/>
+                <a:cs typeface="Cambria" pitchFamily="34" charset="-120"/>
+              </a:rPr>
+              <a:t>Two honest next steps.</a:t>
+            </a:r>
+            <a:endParaRPr lang="en-US" sz="3000" dirty="0"/>
+          </a:p>
+        </p:txBody>
+      </p:sp>
+      <p:sp>
+        <p:nvSpPr>
+          <p:cNvPr id="4" name="Shape 2"/>
+          <p:cNvSpPr/>
+          <p:nvPr/>
+        </p:nvSpPr>
+        <p:spPr>
+          <a:xfrm>
+            <a:off x="822960" y="2331720"/>
+            <a:ext cx="10515600" cy="1234440"/>
+          </a:xfrm>
+          <a:prstGeom prst="rect">
+            <a:avLst/>
+          </a:prstGeom>
+          <a:solidFill>
+            <a:srgbClr val="FFFFFF"/>
+          </a:solidFill>
+          <a:ln w="12700">
+            <a:solidFill>
+              <a:srgbClr val="DCDBD5"/>
+            </a:solidFill>
+            <a:prstDash val="solid"/>
+          </a:ln>
+        </p:spPr>
+      </p:sp>
+      <p:sp>
+        <p:nvSpPr>
+          <p:cNvPr id="5" name="Text 3"/>
+          <p:cNvSpPr/>
+          <p:nvPr/>
+        </p:nvSpPr>
+        <p:spPr>
+          <a:xfrm>
+            <a:off x="1051560" y="2496312"/>
+            <a:ext cx="1005840" cy="914400"/>
+          </a:xfrm>
+          <a:prstGeom prst="rect">
+            <a:avLst/>
+          </a:prstGeom>
+          <a:noFill/>
+          <a:ln/>
+        </p:spPr>
+        <p:txBody>
+          <a:bodyPr wrap="square" lIns="0" tIns="0" rIns="0" bIns="0" rtlCol="0" anchor="ctr"/>
+          <a:lstStyle/>
+          <a:p>
+            <a:pPr indent="0" marL="0">
+              <a:buNone/>
+            </a:pPr>
+            <a:r>
+              <a:rPr lang="en-US" sz="4400" dirty="0">
+                <a:solidFill>
+                  <a:srgbClr val="D6360F"/>
+                </a:solidFill>
+                <a:latin typeface="Cambria" pitchFamily="34" charset="0"/>
+                <a:ea typeface="Cambria" pitchFamily="34" charset="-122"/>
+                <a:cs typeface="Cambria" pitchFamily="34" charset="-120"/>
+              </a:rPr>
+              <a:t>01</a:t>
+            </a:r>
+            <a:endParaRPr lang="en-US" sz="4400" dirty="0"/>
+          </a:p>
+        </p:txBody>
+      </p:sp>
+      <p:sp>
+        <p:nvSpPr>
+          <p:cNvPr id="6" name="Text 4"/>
+          <p:cNvSpPr/>
+          <p:nvPr/>
+        </p:nvSpPr>
+        <p:spPr>
+          <a:xfrm>
+            <a:off x="2240280" y="2514600"/>
+            <a:ext cx="8778240" cy="457200"/>
+          </a:xfrm>
+          <a:prstGeom prst="rect">
+            <a:avLst/>
+          </a:prstGeom>
+          <a:noFill/>
+          <a:ln/>
+        </p:spPr>
+        <p:txBody>
+          <a:bodyPr wrap="square" lIns="0" tIns="0" rIns="0" bIns="0" rtlCol="0" anchor="ctr"/>
+          <a:lstStyle/>
+          <a:p>
+            <a:pPr indent="0" marL="0">
+              <a:buNone/>
+            </a:pPr>
+            <a:r>
+              <a:rPr lang="en-US" sz="1500" b="1" dirty="0">
+                <a:solidFill>
+                  <a:srgbClr val="141619"/>
+                </a:solidFill>
+                <a:latin typeface="Courier New" pitchFamily="34" charset="0"/>
+                <a:ea typeface="Courier New" pitchFamily="34" charset="-122"/>
+                <a:cs typeface="Courier New" pitchFamily="34" charset="-120"/>
+              </a:rPr>
+              <a:t>Validate against a labeled clinical dataset</a:t>
+            </a:r>
+            <a:endParaRPr lang="en-US" sz="1500" dirty="0"/>
+          </a:p>
+        </p:txBody>
+      </p:sp>
+      <p:sp>
+        <p:nvSpPr>
+          <p:cNvPr id="7" name="Text 5"/>
+          <p:cNvSpPr/>
+          <p:nvPr/>
+        </p:nvSpPr>
+        <p:spPr>
+          <a:xfrm>
+            <a:off x="2240280" y="2953512"/>
+            <a:ext cx="8778240" cy="502920"/>
+          </a:xfrm>
+          <a:prstGeom prst="rect">
+            <a:avLst/>
+          </a:prstGeom>
+          <a:noFill/>
+          <a:ln/>
+        </p:spPr>
+        <p:txBody>
+          <a:bodyPr wrap="square" lIns="0" tIns="0" rIns="0" bIns="0" rtlCol="0" anchor="t"/>
+          <a:lstStyle/>
+          <a:p>
+            <a:pPr indent="0" marL="0">
+              <a:buNone/>
+            </a:pPr>
+            <a:r>
+              <a:rPr lang="en-US" sz="1250" dirty="0">
+                <a:solidFill>
+                  <a:srgbClr val="5B6068"/>
+                </a:solidFill>
+                <a:latin typeface="Calibri" pitchFamily="34" charset="0"/>
+                <a:ea typeface="Calibri" pitchFamily="34" charset="-122"/>
+                <a:cs typeface="Calibri" pitchFamily="34" charset="-120"/>
+              </a:rPr>
+              <a:t>The architecture already accepts it — blocked this weekend only by network access, not by design.</a:t>
+            </a:r>
+            <a:endParaRPr lang="en-US" sz="1250" dirty="0"/>
+          </a:p>
+        </p:txBody>
+      </p:sp>
+      <p:sp>
+        <p:nvSpPr>
+          <p:cNvPr id="8" name="Shape 6"/>
+          <p:cNvSpPr/>
+          <p:nvPr/>
+        </p:nvSpPr>
+        <p:spPr>
+          <a:xfrm>
+            <a:off x="822960" y="3794760"/>
+            <a:ext cx="10515600" cy="1234440"/>
+          </a:xfrm>
+          <a:prstGeom prst="rect">
+            <a:avLst/>
+          </a:prstGeom>
+          <a:solidFill>
+            <a:srgbClr val="FFFFFF"/>
+          </a:solidFill>
+          <a:ln w="12700">
+            <a:solidFill>
+              <a:srgbClr val="DCDBD5"/>
+            </a:solidFill>
+            <a:prstDash val="solid"/>
+          </a:ln>
+        </p:spPr>
+      </p:sp>
+      <p:sp>
+        <p:nvSpPr>
+          <p:cNvPr id="9" name="Text 7"/>
+          <p:cNvSpPr/>
+          <p:nvPr/>
+        </p:nvSpPr>
+        <p:spPr>
+          <a:xfrm>
+            <a:off x="1051560" y="3959352"/>
+            <a:ext cx="1005840" cy="914400"/>
+          </a:xfrm>
+          <a:prstGeom prst="rect">
+            <a:avLst/>
+          </a:prstGeom>
+          <a:noFill/>
+          <a:ln/>
+        </p:spPr>
+        <p:txBody>
+          <a:bodyPr wrap="square" lIns="0" tIns="0" rIns="0" bIns="0" rtlCol="0" anchor="ctr"/>
+          <a:lstStyle/>
+          <a:p>
+            <a:pPr indent="0" marL="0">
+              <a:buNone/>
+            </a:pPr>
+            <a:r>
+              <a:rPr lang="en-US" sz="4400" dirty="0">
+                <a:solidFill>
+                  <a:srgbClr val="D6360F"/>
+                </a:solidFill>
+                <a:latin typeface="Cambria" pitchFamily="34" charset="0"/>
+                <a:ea typeface="Cambria" pitchFamily="34" charset="-122"/>
+                <a:cs typeface="Cambria" pitchFamily="34" charset="-120"/>
+              </a:rPr>
+              <a:t>02</a:t>
+            </a:r>
+            <a:endParaRPr lang="en-US" sz="4400" dirty="0"/>
+          </a:p>
+        </p:txBody>
+      </p:sp>
+      <p:sp>
+        <p:nvSpPr>
+          <p:cNvPr id="10" name="Text 8"/>
+          <p:cNvSpPr/>
+          <p:nvPr/>
+        </p:nvSpPr>
+        <p:spPr>
+          <a:xfrm>
+            <a:off x="2240280" y="3977640"/>
+            <a:ext cx="8778240" cy="457200"/>
+          </a:xfrm>
+          <a:prstGeom prst="rect">
+            <a:avLst/>
+          </a:prstGeom>
+          <a:noFill/>
+          <a:ln/>
+        </p:spPr>
+        <p:txBody>
+          <a:bodyPr wrap="square" lIns="0" tIns="0" rIns="0" bIns="0" rtlCol="0" anchor="ctr"/>
+          <a:lstStyle/>
+          <a:p>
+            <a:pPr indent="0" marL="0">
+              <a:buNone/>
+            </a:pPr>
+            <a:r>
+              <a:rPr lang="en-US" sz="1500" b="1" dirty="0">
+                <a:solidFill>
+                  <a:srgbClr val="141619"/>
+                </a:solidFill>
+                <a:latin typeface="Courier New" pitchFamily="34" charset="0"/>
+                <a:ea typeface="Courier New" pitchFamily="34" charset="-122"/>
+                <a:cs typeface="Courier New" pitchFamily="34" charset="-120"/>
+              </a:rPr>
+              <a:t>Field-test the sensor against real skin contact</a:t>
+            </a:r>
+            <a:endParaRPr lang="en-US" sz="1500" dirty="0"/>
+          </a:p>
+        </p:txBody>
+      </p:sp>
+      <p:sp>
+        <p:nvSpPr>
+          <p:cNvPr id="11" name="Text 9"/>
+          <p:cNvSpPr/>
+          <p:nvPr/>
+        </p:nvSpPr>
+        <p:spPr>
+          <a:xfrm>
+            <a:off x="2240280" y="4416552"/>
+            <a:ext cx="8778240" cy="502920"/>
+          </a:xfrm>
+          <a:prstGeom prst="rect">
+            <a:avLst/>
+          </a:prstGeom>
+          <a:noFill/>
+          <a:ln/>
+        </p:spPr>
+        <p:txBody>
+          <a:bodyPr wrap="square" lIns="0" tIns="0" rIns="0" bIns="0" rtlCol="0" anchor="t"/>
+          <a:lstStyle/>
+          <a:p>
+            <a:pPr indent="0" marL="0">
+              <a:buNone/>
+            </a:pPr>
+            <a:r>
+              <a:rPr lang="en-US" sz="1250" dirty="0">
+                <a:solidFill>
+                  <a:srgbClr val="5B6068"/>
+                </a:solidFill>
+                <a:latin typeface="Calibri" pitchFamily="34" charset="0"/>
+                <a:ea typeface="Calibri" pitchFamily="34" charset="-122"/>
+                <a:cs typeface="Calibri" pitchFamily="34" charset="-120"/>
+              </a:rPr>
+              <a:t>Low-frequency response is currently unverified. Flagged in the code, not hidden.</a:t>
+            </a:r>
+            <a:endParaRPr lang="en-US" sz="1250" dirty="0"/>
+          </a:p>
+        </p:txBody>
+      </p:sp>
+      <p:sp>
+        <p:nvSpPr>
+          <p:cNvPr id="12" name="Text 10"/>
+          <p:cNvSpPr/>
+          <p:nvPr/>
+        </p:nvSpPr>
+        <p:spPr>
+          <a:xfrm>
+            <a:off x="502920" y="6400800"/>
+            <a:ext cx="1828800" cy="274320"/>
+          </a:xfrm>
+          <a:prstGeom prst="rect">
+            <a:avLst/>
+          </a:prstGeom>
+          <a:noFill/>
+          <a:ln/>
+        </p:spPr>
+        <p:txBody>
+          <a:bodyPr wrap="square" lIns="0" tIns="0" rIns="0" bIns="0" rtlCol="0" anchor="ctr"/>
+          <a:lstStyle/>
+          <a:p>
+            <a:pPr indent="0" marL="0">
+              <a:buNone/>
+            </a:pPr>
+            <a:r>
+              <a:rPr lang="en-US" sz="900" spc="200" kern="0" dirty="0">
+                <a:solidFill>
+                  <a:srgbClr val="8E939A"/>
+                </a:solidFill>
+                <a:latin typeface="Courier New" pitchFamily="34" charset="0"/>
+                <a:ea typeface="Courier New" pitchFamily="34" charset="-122"/>
+                <a:cs typeface="Courier New" pitchFamily="34" charset="-120"/>
+              </a:rPr>
+              <a:t>PULSO</a:t>
+            </a:r>
+            <a:endParaRPr lang="en-US" sz="900" dirty="0"/>
+          </a:p>
+        </p:txBody>
+      </p:sp>
+      <p:sp>
+        <p:nvSpPr>
+          <p:cNvPr id="13" name="Text 11"/>
+          <p:cNvSpPr/>
+          <p:nvPr/>
+        </p:nvSpPr>
+        <p:spPr>
+          <a:xfrm>
+            <a:off x="11185855" y="6400800"/>
+            <a:ext cx="548640" cy="274320"/>
+          </a:xfrm>
+          <a:prstGeom prst="rect">
+            <a:avLst/>
+          </a:prstGeom>
+          <a:noFill/>
+          <a:ln/>
+        </p:spPr>
+        <p:txBody>
+          <a:bodyPr wrap="square" lIns="0" tIns="0" rIns="0" bIns="0" rtlCol="0" anchor="ctr"/>
+          <a:lstStyle/>
+          <a:p>
+            <a:pPr algn="r" indent="0" marL="0">
+              <a:buNone/>
+            </a:pPr>
+            <a:r>
+              <a:rPr lang="en-US" sz="900" dirty="0">
+                <a:solidFill>
+                  <a:srgbClr val="8E939A"/>
+                </a:solidFill>
+                <a:latin typeface="Courier New" pitchFamily="34" charset="0"/>
+                <a:ea typeface="Courier New" pitchFamily="34" charset="-122"/>
+                <a:cs typeface="Courier New" pitchFamily="34" charset="-120"/>
+              </a:rPr>
+              <a:t>10</a:t>
+            </a:r>
+            <a:endParaRPr lang="en-US" sz="900" dirty="0"/>
+          </a:p>
+        </p:txBody>
+      </p:sp>
+    </p:spTree>
+  </p:cSld>
+  <p:clrMapOvr>
+    <a:masterClrMapping/>
+  </p:clrMapOvr>
+</p:sld>
+</file>
+
+<file path=ppt/slides/slide11.xml><?xml version="1.0" encoding="utf-8"?>
+<p:sld xmlns:a="http://schemas.openxmlformats.org/drawingml/2006/main" xmlns:r="http://schemas.openxmlformats.org/officeDocument/2006/relationships" xmlns:p="http://schemas.openxmlformats.org/presentationml/2006/main">
+  <p:cSld name="Slide 11">
+    <p:bg>
+      <p:bgPr>
+        <a:blipFill dpi="0" rotWithShape="1">
+          <a:blip r:embed="rId1">
+            <a:lum/>
+          </a:blip>
+          <a:srcRect/>
+          <a:stretch>
+            <a:fillRect/>
+          </a:stretch>
+        </a:blipFill>
+        <a:effectLst/>
+      </p:bgPr>
+    </p:bg>
+    <p:spTree>
+      <p:nvGrpSpPr>
+        <p:cNvPr id="1" name=""/>
+        <p:cNvGrpSpPr/>
+        <p:nvPr/>
+      </p:nvGrpSpPr>
+      <p:grpSpPr>
+        <a:xfrm>
+          <a:off x="0" y="0"/>
+          <a:ext cx="0" cy="0"/>
+          <a:chOff x="0" y="0"/>
+          <a:chExt cx="0" cy="0"/>
+        </a:xfrm>
+      </p:grpSpPr>
+      <p:sp>
+        <p:nvSpPr>
+          <p:cNvPr id="2" name="Shape 0"/>
+          <p:cNvSpPr/>
+          <p:nvPr/>
+        </p:nvSpPr>
+        <p:spPr>
+          <a:xfrm>
+            <a:off x="822960" y="2606040"/>
+            <a:ext cx="118872" cy="118872"/>
+          </a:xfrm>
+          <a:prstGeom prst="ellipse">
+            <a:avLst/>
+          </a:prstGeom>
+          <a:solidFill>
+            <a:srgbClr val="FF5A2C"/>
+          </a:solidFill>
+          <a:ln/>
+        </p:spPr>
+      </p:sp>
+      <p:sp>
+        <p:nvSpPr>
+          <p:cNvPr id="3" name="Text 1"/>
+          <p:cNvSpPr/>
+          <p:nvPr/>
+        </p:nvSpPr>
+        <p:spPr>
+          <a:xfrm>
+            <a:off x="822960" y="2331720"/>
+            <a:ext cx="10515600" cy="1554480"/>
+          </a:xfrm>
+          <a:prstGeom prst="rect">
+            <a:avLst/>
+          </a:prstGeom>
+          <a:noFill/>
+          <a:ln/>
+        </p:spPr>
+        <p:txBody>
+          <a:bodyPr wrap="square" lIns="0" tIns="0" rIns="0" bIns="0" rtlCol="0" anchor="t"/>
+          <a:lstStyle/>
+          <a:p>
+            <a:pPr indent="0" marL="0">
+              <a:buNone/>
+            </a:pPr>
+            <a:r>
+              <a:rPr lang="en-US" sz="4000" dirty="0">
+                <a:solidFill>
+                  <a:srgbClr val="EDEEF0"/>
+                </a:solidFill>
+                <a:latin typeface="Cambria" pitchFamily="34" charset="0"/>
+                <a:ea typeface="Cambria" pitchFamily="34" charset="-122"/>
+                <a:cs typeface="Cambria" pitchFamily="34" charset="-120"/>
+              </a:rPr>
+              <a:t>A reason to listen.</a:t>
+            </a:r>
+            <a:endParaRPr lang="en-US" sz="4000" dirty="0"/>
+          </a:p>
+          <a:p>
+            <a:pPr indent="0" marL="0">
+              <a:buNone/>
+            </a:pPr>
+            <a:r>
+              <a:rPr lang="en-US" sz="4000" dirty="0">
+                <a:solidFill>
+                  <a:srgbClr val="EDEEF0"/>
+                </a:solidFill>
+                <a:latin typeface="Cambria" pitchFamily="34" charset="0"/>
+                <a:ea typeface="Cambria" pitchFamily="34" charset="-122"/>
+                <a:cs typeface="Cambria" pitchFamily="34" charset="-120"/>
+              </a:rPr>
+              <a:t>Not a diagnosis.</a:t>
+            </a:r>
+            <a:endParaRPr lang="en-US" sz="4000" dirty="0"/>
+          </a:p>
+        </p:txBody>
+      </p:sp>
+      <p:sp>
+        <p:nvSpPr>
+          <p:cNvPr id="4" name="Text 2"/>
+          <p:cNvSpPr/>
+          <p:nvPr/>
+        </p:nvSpPr>
+        <p:spPr>
+          <a:xfrm>
+            <a:off x="822960" y="3977640"/>
+            <a:ext cx="8686800" cy="731520"/>
+          </a:xfrm>
+          <a:prstGeom prst="rect">
+            <a:avLst/>
+          </a:prstGeom>
+          <a:noFill/>
+          <a:ln/>
+        </p:spPr>
+        <p:txBody>
+          <a:bodyPr wrap="square" lIns="0" tIns="0" rIns="0" bIns="0" rtlCol="0" anchor="ctr"/>
+          <a:lstStyle/>
+          <a:p>
+            <a:pPr indent="0" marL="0">
+              <a:buNone/>
+            </a:pPr>
+            <a:r>
+              <a:rPr lang="en-US" sz="1500" i="1" dirty="0">
+                <a:solidFill>
+                  <a:srgbClr val="FF5A2C"/>
+                </a:solidFill>
+                <a:latin typeface="Calibri" pitchFamily="34" charset="0"/>
+                <a:ea typeface="Calibri" pitchFamily="34" charset="-122"/>
+                <a:cs typeface="Calibri" pitchFamily="34" charset="-120"/>
+              </a:rPr>
+              <a:t>Built to be honest about what it doesn't know — which is exactly what makes it safe to put in someone's hands.</a:t>
+            </a:r>
+            <a:endParaRPr lang="en-US" sz="1500" dirty="0"/>
+          </a:p>
+        </p:txBody>
+      </p:sp>
+      <p:sp>
+        <p:nvSpPr>
+          <p:cNvPr id="5" name="Shape 3"/>
+          <p:cNvSpPr/>
+          <p:nvPr/>
+        </p:nvSpPr>
+        <p:spPr>
+          <a:xfrm>
+            <a:off x="822960" y="5806440"/>
+            <a:ext cx="10515600" cy="0"/>
+          </a:xfrm>
+          <a:prstGeom prst="line">
+            <a:avLst/>
+          </a:prstGeom>
+          <a:noFill/>
+          <a:ln w="12700">
+            <a:solidFill>
+              <a:srgbClr val="343A40"/>
+            </a:solidFill>
+            <a:prstDash val="solid"/>
+          </a:ln>
+        </p:spPr>
+      </p:sp>
+      <p:sp>
+        <p:nvSpPr>
+          <p:cNvPr id="6" name="Text 4"/>
+          <p:cNvSpPr/>
+          <p:nvPr/>
+        </p:nvSpPr>
+        <p:spPr>
+          <a:xfrm>
+            <a:off x="822960" y="5989320"/>
+            <a:ext cx="3657600" cy="274320"/>
+          </a:xfrm>
+          <a:prstGeom prst="rect">
+            <a:avLst/>
+          </a:prstGeom>
+          <a:noFill/>
+          <a:ln/>
+        </p:spPr>
+        <p:txBody>
+          <a:bodyPr wrap="square" lIns="0" tIns="0" rIns="0" bIns="0" rtlCol="0" anchor="ctr"/>
+          <a:lstStyle/>
+          <a:p>
+            <a:pPr indent="0" marL="0">
+              <a:buNone/>
+            </a:pPr>
+            <a:r>
+              <a:rPr lang="en-US" sz="1000" spc="200" kern="0" dirty="0">
+                <a:solidFill>
+                  <a:srgbClr val="9AA0A8"/>
+                </a:solidFill>
+                <a:latin typeface="Courier New" pitchFamily="34" charset="0"/>
+                <a:ea typeface="Courier New" pitchFamily="34" charset="-122"/>
+                <a:cs typeface="Courier New" pitchFamily="34" charset="-120"/>
+              </a:rPr>
+              <a:t>PULSO</a:t>
+            </a:r>
+            <a:endParaRPr lang="en-US" sz="1000" dirty="0"/>
+          </a:p>
+        </p:txBody>
+      </p:sp>
+      <p:sp>
+        <p:nvSpPr>
+          <p:cNvPr id="7" name="Text 5"/>
+          <p:cNvSpPr/>
+          <p:nvPr/>
+        </p:nvSpPr>
+        <p:spPr>
+          <a:xfrm>
+            <a:off x="9082735" y="5989320"/>
+            <a:ext cx="2286000" cy="274320"/>
+          </a:xfrm>
+          <a:prstGeom prst="rect">
+            <a:avLst/>
+          </a:prstGeom>
+          <a:noFill/>
+          <a:ln/>
+        </p:spPr>
+        <p:txBody>
+          <a:bodyPr wrap="square" lIns="0" tIns="0" rIns="0" bIns="0" rtlCol="0" anchor="ctr"/>
+          <a:lstStyle/>
+          <a:p>
+            <a:pPr algn="r" indent="0" marL="0">
+              <a:buNone/>
+            </a:pPr>
+            <a:r>
+              <a:rPr lang="en-US" sz="1000" spc="200" kern="0" dirty="0">
+                <a:solidFill>
+                  <a:srgbClr val="9AA0A8"/>
+                </a:solidFill>
+                <a:latin typeface="Courier New" pitchFamily="34" charset="0"/>
+                <a:ea typeface="Courier New" pitchFamily="34" charset="-122"/>
+                <a:cs typeface="Courier New" pitchFamily="34" charset="-120"/>
+              </a:rPr>
+              <a:t>QUESTIONS?</a:t>
+            </a:r>
+            <a:endParaRPr lang="en-US" sz="1000" dirty="0"/>
+          </a:p>
+        </p:txBody>
+      </p:sp>
+    </p:spTree>
+  </p:cSld>
+  <p:clrMapOvr>
+    <a:masterClrMapping/>
+  </p:clrMapOvr>
+</p:sld>
+</file>
+
 <file path=ppt/slides/slide2.xml><?xml version="1.0" encoding="utf-8"?>
 <p:sld xmlns:a="http://schemas.openxmlformats.org/drawingml/2006/main" xmlns:r="http://schemas.openxmlformats.org/officeDocument/2006/relationships" xmlns:p="http://schemas.openxmlformats.org/presentationml/2006/main">
   <p:cSld name="Slide 2">
@@ -6354,7 +7266,7 @@
                 <a:ea typeface="Courier New" pitchFamily="34" charset="-122"/>
                 <a:cs typeface="Courier New" pitchFamily="34" charset="-120"/>
               </a:rPr>
-              <a:t>WHAT'S NEXT</a:t>
+              <a:t>BUSINESS MODEL</a:t>
             </a:r>
             <a:endParaRPr lang="en-US" sz="1100" dirty="0"/>
           </a:p>
@@ -6369,7 +7281,7 @@
         <p:spPr>
           <a:xfrm>
             <a:off x="822960" y="868680"/>
-            <a:ext cx="7315200" cy="822960"/>
+            <a:ext cx="9601200" cy="822960"/>
           </a:xfrm>
           <a:prstGeom prst="rect">
             <a:avLst/>
@@ -6385,7 +7297,7 @@
               <a:buNone/>
             </a:pPr>
             <a:r>
-              <a:rPr lang="en-US" sz="3000" dirty="0">
+              <a:rPr lang="en-US" sz="2700" dirty="0">
                 <a:solidFill>
                   <a:srgbClr val="141619"/>
                 </a:solidFill>
@@ -6393,9 +7305,26 @@
                 <a:ea typeface="Cambria" pitchFamily="34" charset="-122"/>
                 <a:cs typeface="Cambria" pitchFamily="34" charset="-120"/>
               </a:rPr>
-              <a:t>Two honest next steps.</a:t>
-            </a:r>
-            <a:endParaRPr lang="en-US" sz="3000" dirty="0"/>
+              <a:t>Sell hardware near cost.</a:t>
+            </a:r>
+            <a:endParaRPr lang="en-US" sz="2700" dirty="0"/>
+          </a:p>
+          <a:p>
+            <a:pPr algn="l" indent="0" marL="0">
+              <a:buNone/>
+            </a:pPr>
+            <a:r>
+              <a:rPr lang="en-US" sz="2700" dirty="0">
+                <a:solidFill>
+                  <a:srgbClr val="141619"/>
+                </a:solidFill>
+                <a:latin typeface="Cambria" pitchFamily="34" charset="0"/>
+                <a:ea typeface="Cambria" pitchFamily="34" charset="-122"/>
+                <a:cs typeface="Cambria" pitchFamily="34" charset="-120"/>
+              </a:rPr>
+              <a:t>Charge the program, not the worker.</a:t>
+            </a:r>
+            <a:endParaRPr lang="en-US" sz="2700" dirty="0"/>
           </a:p>
         </p:txBody>
       </p:sp>
@@ -6407,8 +7336,248 @@
         </p:nvSpPr>
         <p:spPr>
           <a:xfrm>
-            <a:off x="822960" y="2331720"/>
-            <a:ext cx="10515600" cy="1234440"/>
+            <a:off x="822960" y="2194560"/>
+            <a:ext cx="5074920" cy="1920240"/>
+          </a:xfrm>
+          <a:prstGeom prst="rect">
+            <a:avLst/>
+          </a:prstGeom>
+          <a:solidFill>
+            <a:srgbClr val="FFFFFF"/>
+          </a:solidFill>
+          <a:ln w="12700">
+            <a:solidFill>
+              <a:srgbClr val="C3C2BA"/>
+            </a:solidFill>
+            <a:prstDash val="solid"/>
+          </a:ln>
+        </p:spPr>
+      </p:sp>
+      <p:sp>
+        <p:nvSpPr>
+          <p:cNvPr id="5" name="Text 3"/>
+          <p:cNvSpPr/>
+          <p:nvPr/>
+        </p:nvSpPr>
+        <p:spPr>
+          <a:xfrm>
+            <a:off x="1005840" y="2377440"/>
+            <a:ext cx="4572000" cy="256032"/>
+          </a:xfrm>
+          <a:prstGeom prst="rect">
+            <a:avLst/>
+          </a:prstGeom>
+          <a:noFill/>
+          <a:ln/>
+        </p:spPr>
+        <p:txBody>
+          <a:bodyPr wrap="square" lIns="0" tIns="0" rIns="0" bIns="0" rtlCol="0" anchor="ctr"/>
+          <a:lstStyle/>
+          <a:p>
+            <a:pPr indent="0" marL="0">
+              <a:buNone/>
+            </a:pPr>
+            <a:r>
+              <a:rPr lang="en-US" sz="1000" b="1" spc="150" kern="0" dirty="0">
+                <a:solidFill>
+                  <a:srgbClr val="8E939A"/>
+                </a:solidFill>
+                <a:latin typeface="Courier New" pitchFamily="34" charset="0"/>
+                <a:ea typeface="Courier New" pitchFamily="34" charset="-122"/>
+                <a:cs typeface="Courier New" pitchFamily="34" charset="-120"/>
+              </a:rPr>
+              <a:t>WHO PAYS</a:t>
+            </a:r>
+            <a:endParaRPr lang="en-US" sz="1000" dirty="0"/>
+          </a:p>
+        </p:txBody>
+      </p:sp>
+      <p:sp>
+        <p:nvSpPr>
+          <p:cNvPr id="6" name="Text 4"/>
+          <p:cNvSpPr/>
+          <p:nvPr/>
+        </p:nvSpPr>
+        <p:spPr>
+          <a:xfrm>
+            <a:off x="1005840" y="2697480"/>
+            <a:ext cx="4709160" cy="1280160"/>
+          </a:xfrm>
+          <a:prstGeom prst="rect">
+            <a:avLst/>
+          </a:prstGeom>
+          <a:noFill/>
+          <a:ln/>
+        </p:spPr>
+        <p:txBody>
+          <a:bodyPr wrap="square" lIns="0" tIns="0" rIns="0" bIns="0" rtlCol="0" anchor="t"/>
+          <a:lstStyle/>
+          <a:p>
+            <a:pPr indent="0" marL="0">
+              <a:lnSpc>
+                <a:spcPct val="125000"/>
+              </a:lnSpc>
+              <a:buNone/>
+            </a:pPr>
+            <a:r>
+              <a:rPr lang="en-US" sz="1300" dirty="0">
+                <a:solidFill>
+                  <a:srgbClr val="141619"/>
+                </a:solidFill>
+                <a:latin typeface="Calibri" pitchFamily="34" charset="0"/>
+                <a:ea typeface="Calibri" pitchFamily="34" charset="-122"/>
+                <a:cs typeface="Calibri" pitchFamily="34" charset="-120"/>
+              </a:rPr>
+              <a:t>Not the individual health worker — they don't hold a budget. The buyer is the NGO, health ministry, or global-health funder that already equips and funds community health worker programs.</a:t>
+            </a:r>
+            <a:endParaRPr lang="en-US" sz="1300" dirty="0"/>
+          </a:p>
+        </p:txBody>
+      </p:sp>
+      <p:sp>
+        <p:nvSpPr>
+          <p:cNvPr id="7" name="Shape 5"/>
+          <p:cNvSpPr/>
+          <p:nvPr/>
+        </p:nvSpPr>
+        <p:spPr>
+          <a:xfrm>
+            <a:off x="6263640" y="2194560"/>
+            <a:ext cx="5074920" cy="1920240"/>
+          </a:xfrm>
+          <a:prstGeom prst="rect">
+            <a:avLst/>
+          </a:prstGeom>
+          <a:solidFill>
+            <a:srgbClr val="FFFFFF"/>
+          </a:solidFill>
+          <a:ln w="12700">
+            <a:solidFill>
+              <a:srgbClr val="D6360F"/>
+            </a:solidFill>
+            <a:prstDash val="solid"/>
+          </a:ln>
+        </p:spPr>
+      </p:sp>
+      <p:sp>
+        <p:nvSpPr>
+          <p:cNvPr id="8" name="Text 6"/>
+          <p:cNvSpPr/>
+          <p:nvPr/>
+        </p:nvSpPr>
+        <p:spPr>
+          <a:xfrm>
+            <a:off x="6446520" y="2377440"/>
+            <a:ext cx="4572000" cy="256032"/>
+          </a:xfrm>
+          <a:prstGeom prst="rect">
+            <a:avLst/>
+          </a:prstGeom>
+          <a:noFill/>
+          <a:ln/>
+        </p:spPr>
+        <p:txBody>
+          <a:bodyPr wrap="square" lIns="0" tIns="0" rIns="0" bIns="0" rtlCol="0" anchor="ctr"/>
+          <a:lstStyle/>
+          <a:p>
+            <a:pPr indent="0" marL="0">
+              <a:buNone/>
+            </a:pPr>
+            <a:r>
+              <a:rPr lang="en-US" sz="1000" b="1" spc="150" kern="0" dirty="0">
+                <a:solidFill>
+                  <a:srgbClr val="D6360F"/>
+                </a:solidFill>
+                <a:latin typeface="Courier New" pitchFamily="34" charset="0"/>
+                <a:ea typeface="Courier New" pitchFamily="34" charset="-122"/>
+                <a:cs typeface="Courier New" pitchFamily="34" charset="-120"/>
+              </a:rPr>
+              <a:t>TWO REVENUE LINES</a:t>
+            </a:r>
+            <a:endParaRPr lang="en-US" sz="1000" dirty="0"/>
+          </a:p>
+        </p:txBody>
+      </p:sp>
+      <p:sp>
+        <p:nvSpPr>
+          <p:cNvPr id="9" name="Text 7"/>
+          <p:cNvSpPr/>
+          <p:nvPr/>
+        </p:nvSpPr>
+        <p:spPr>
+          <a:xfrm>
+            <a:off x="6446520" y="2697480"/>
+            <a:ext cx="4709160" cy="1280160"/>
+          </a:xfrm>
+          <a:prstGeom prst="rect">
+            <a:avLst/>
+          </a:prstGeom>
+          <a:noFill/>
+          <a:ln/>
+        </p:spPr>
+        <p:txBody>
+          <a:bodyPr wrap="square" lIns="0" tIns="0" rIns="0" bIns="0" rtlCol="0" anchor="t"/>
+          <a:lstStyle/>
+          <a:p>
+            <a:pPr marL="342900" indent="-342900">
+              <a:lnSpc>
+                <a:spcPct val="120000"/>
+              </a:lnSpc>
+              <a:spcAft>
+                <a:spcPts val="800"/>
+              </a:spcAft>
+              <a:buSzPct val="100000"/>
+              <a:buChar char="•"/>
+            </a:pPr>
+            <a:r>
+              <a:rPr lang="en-US" sz="1300" dirty="0">
+                <a:solidFill>
+                  <a:srgbClr val="141619"/>
+                </a:solidFill>
+                <a:latin typeface="Calibri" pitchFamily="34" charset="0"/>
+                <a:ea typeface="Calibri" pitchFamily="34" charset="-122"/>
+                <a:cs typeface="Calibri" pitchFamily="34" charset="-120"/>
+              </a:rPr>
+              <a:t>Hardware: sold near BOM cost, low margin, wide reach</a:t>
+            </a:r>
+            <a:endParaRPr lang="en-US" sz="1300" dirty="0"/>
+          </a:p>
+          <a:p>
+            <a:pPr marL="342900" indent="-342900">
+              <a:lnSpc>
+                <a:spcPct val="120000"/>
+              </a:lnSpc>
+              <a:spcAft>
+                <a:spcPts val="800"/>
+              </a:spcAft>
+              <a:buSzPct val="100000"/>
+              <a:buChar char="•"/>
+            </a:pPr>
+            <a:r>
+              <a:rPr lang="en-US" sz="1300" dirty="0">
+                <a:solidFill>
+                  <a:srgbClr val="141619"/>
+                </a:solidFill>
+                <a:latin typeface="Calibri" pitchFamily="34" charset="0"/>
+                <a:ea typeface="Calibri" pitchFamily="34" charset="-122"/>
+                <a:cs typeface="Calibri" pitchFamily="34" charset="-120"/>
+              </a:rPr>
+              <a:t>Software: a program-level reporting subscription, billed to the NGO/ministry</a:t>
+            </a:r>
+            <a:endParaRPr lang="en-US" sz="1300" dirty="0"/>
+          </a:p>
+        </p:txBody>
+      </p:sp>
+      <p:sp>
+        <p:nvSpPr>
+          <p:cNvPr id="10" name="Shape 8"/>
+          <p:cNvSpPr/>
+          <p:nvPr/>
+        </p:nvSpPr>
+        <p:spPr>
+          <a:xfrm>
+            <a:off x="822960" y="4370832"/>
+            <a:ext cx="10515600" cy="1298448"/>
           </a:xfrm>
           <a:prstGeom prst="rect">
             <a:avLst/>
@@ -6426,14 +7595,14 @@
       </p:sp>
       <p:sp>
         <p:nvSpPr>
-          <p:cNvPr id="5" name="Text 3"/>
-          <p:cNvSpPr/>
-          <p:nvPr/>
-        </p:nvSpPr>
-        <p:spPr>
-          <a:xfrm>
-            <a:off x="1051560" y="2496312"/>
-            <a:ext cx="1005840" cy="914400"/>
+          <p:cNvPr id="11" name="Text 9"/>
+          <p:cNvSpPr/>
+          <p:nvPr/>
+        </p:nvSpPr>
+        <p:spPr>
+          <a:xfrm>
+            <a:off x="1005840" y="4517136"/>
+            <a:ext cx="5486400" cy="256032"/>
           </a:xfrm>
           <a:prstGeom prst="rect">
             <a:avLst/>
@@ -6449,30 +7618,111 @@
               <a:buNone/>
             </a:pPr>
             <a:r>
-              <a:rPr lang="en-US" sz="4400" dirty="0">
-                <a:solidFill>
-                  <a:srgbClr val="D6360F"/>
+              <a:rPr lang="en-US" sz="1000" b="1" spc="150" kern="0" dirty="0">
+                <a:solidFill>
+                  <a:srgbClr val="9A6206"/>
+                </a:solidFill>
+                <a:latin typeface="Courier New" pitchFamily="34" charset="0"/>
+                <a:ea typeface="Courier New" pitchFamily="34" charset="-122"/>
+                <a:cs typeface="Courier New" pitchFamily="34" charset="-120"/>
+              </a:rPr>
+              <a:t>REGULATORY STRATEGY</a:t>
+            </a:r>
+            <a:endParaRPr lang="en-US" sz="1000" dirty="0"/>
+          </a:p>
+        </p:txBody>
+      </p:sp>
+      <p:sp>
+        <p:nvSpPr>
+          <p:cNvPr id="12" name="Text 10"/>
+          <p:cNvSpPr/>
+          <p:nvPr/>
+        </p:nvSpPr>
+        <p:spPr>
+          <a:xfrm>
+            <a:off x="1005840" y="4809744"/>
+            <a:ext cx="10149840" cy="777240"/>
+          </a:xfrm>
+          <a:prstGeom prst="rect">
+            <a:avLst/>
+          </a:prstGeom>
+          <a:noFill/>
+          <a:ln/>
+        </p:spPr>
+        <p:txBody>
+          <a:bodyPr wrap="square" lIns="0" tIns="0" rIns="0" bIns="0" rtlCol="0" anchor="t"/>
+          <a:lstStyle/>
+          <a:p>
+            <a:pPr indent="0" marL="0">
+              <a:lnSpc>
+                <a:spcPct val="125000"/>
+              </a:lnSpc>
+              <a:buNone/>
+            </a:pPr>
+            <a:r>
+              <a:rPr lang="en-US" sz="1200" dirty="0">
+                <a:solidFill>
+                  <a:srgbClr val="5B6068"/>
+                </a:solidFill>
+                <a:latin typeface="Calibri" pitchFamily="34" charset="0"/>
+                <a:ea typeface="Calibri" pitchFamily="34" charset="-122"/>
+                <a:cs typeface="Calibri" pitchFamily="34" charset="-120"/>
+              </a:rPr>
+              <a:t>FDA's Jan 2026 clinical-decision-support guidance exempts software that never processes raw signal-acquisition data. We do — so we likely don't qualify for the lightest exemption. Staying a non-clinical wellness/triage tool is a deliberate near-term choice, not just a safety footnote: it reaches NGOs now, without a multi-year clearance process.</a:t>
+            </a:r>
+            <a:endParaRPr lang="en-US" sz="1200" dirty="0"/>
+          </a:p>
+        </p:txBody>
+      </p:sp>
+      <p:sp>
+        <p:nvSpPr>
+          <p:cNvPr id="13" name="Text 11"/>
+          <p:cNvSpPr/>
+          <p:nvPr/>
+        </p:nvSpPr>
+        <p:spPr>
+          <a:xfrm>
+            <a:off x="822960" y="5870448"/>
+            <a:ext cx="10515600" cy="365760"/>
+          </a:xfrm>
+          <a:prstGeom prst="rect">
+            <a:avLst/>
+          </a:prstGeom>
+          <a:noFill/>
+          <a:ln/>
+        </p:spPr>
+        <p:txBody>
+          <a:bodyPr wrap="square" lIns="0" tIns="0" rIns="0" bIns="0" rtlCol="0" anchor="ctr"/>
+          <a:lstStyle/>
+          <a:p>
+            <a:pPr indent="0" marL="0">
+              <a:buNone/>
+            </a:pPr>
+            <a:r>
+              <a:rPr lang="en-US" sz="1350" i="1" dirty="0">
+                <a:solidFill>
+                  <a:srgbClr val="141619"/>
                 </a:solidFill>
                 <a:latin typeface="Cambria" pitchFamily="34" charset="0"/>
                 <a:ea typeface="Cambria" pitchFamily="34" charset="-122"/>
                 <a:cs typeface="Cambria" pitchFamily="34" charset="-120"/>
               </a:rPr>
-              <a:t>01</a:t>
-            </a:r>
-            <a:endParaRPr lang="en-US" sz="4400" dirty="0"/>
-          </a:p>
-        </p:txBody>
-      </p:sp>
-      <p:sp>
-        <p:nvSpPr>
-          <p:cNvPr id="6" name="Text 4"/>
-          <p:cNvSpPr/>
-          <p:nvPr/>
-        </p:nvSpPr>
-        <p:spPr>
-          <a:xfrm>
-            <a:off x="2240280" y="2514600"/>
-            <a:ext cx="8778240" cy="457200"/>
+              <a:t>3.8M community health workers across 98+ countries (WHO) — the workforce this is built to equip.</a:t>
+            </a:r>
+            <a:endParaRPr lang="en-US" sz="1350" dirty="0"/>
+          </a:p>
+        </p:txBody>
+      </p:sp>
+      <p:sp>
+        <p:nvSpPr>
+          <p:cNvPr id="14" name="Text 12"/>
+          <p:cNvSpPr/>
+          <p:nvPr/>
+        </p:nvSpPr>
+        <p:spPr>
+          <a:xfrm>
+            <a:off x="502920" y="6400800"/>
+            <a:ext cx="1828800" cy="274320"/>
           </a:xfrm>
           <a:prstGeom prst="rect">
             <a:avLst/>
@@ -6488,234 +7738,14 @@
               <a:buNone/>
             </a:pPr>
             <a:r>
-              <a:rPr lang="en-US" sz="1500" b="1" dirty="0">
-                <a:solidFill>
-                  <a:srgbClr val="141619"/>
+              <a:rPr lang="en-US" sz="900" spc="200" kern="0" dirty="0">
+                <a:solidFill>
+                  <a:srgbClr val="8E939A"/>
                 </a:solidFill>
                 <a:latin typeface="Courier New" pitchFamily="34" charset="0"/>
                 <a:ea typeface="Courier New" pitchFamily="34" charset="-122"/>
                 <a:cs typeface="Courier New" pitchFamily="34" charset="-120"/>
               </a:rPr>
-              <a:t>Validate against a labeled clinical dataset</a:t>
-            </a:r>
-            <a:endParaRPr lang="en-US" sz="1500" dirty="0"/>
-          </a:p>
-        </p:txBody>
-      </p:sp>
-      <p:sp>
-        <p:nvSpPr>
-          <p:cNvPr id="7" name="Text 5"/>
-          <p:cNvSpPr/>
-          <p:nvPr/>
-        </p:nvSpPr>
-        <p:spPr>
-          <a:xfrm>
-            <a:off x="2240280" y="2953512"/>
-            <a:ext cx="8778240" cy="502920"/>
-          </a:xfrm>
-          <a:prstGeom prst="rect">
-            <a:avLst/>
-          </a:prstGeom>
-          <a:noFill/>
-          <a:ln/>
-        </p:spPr>
-        <p:txBody>
-          <a:bodyPr wrap="square" lIns="0" tIns="0" rIns="0" bIns="0" rtlCol="0" anchor="t"/>
-          <a:lstStyle/>
-          <a:p>
-            <a:pPr indent="0" marL="0">
-              <a:buNone/>
-            </a:pPr>
-            <a:r>
-              <a:rPr lang="en-US" sz="1250" dirty="0">
-                <a:solidFill>
-                  <a:srgbClr val="5B6068"/>
-                </a:solidFill>
-                <a:latin typeface="Calibri" pitchFamily="34" charset="0"/>
-                <a:ea typeface="Calibri" pitchFamily="34" charset="-122"/>
-                <a:cs typeface="Calibri" pitchFamily="34" charset="-120"/>
-              </a:rPr>
-              <a:t>The architecture already accepts it — blocked this weekend only by network access, not by design.</a:t>
-            </a:r>
-            <a:endParaRPr lang="en-US" sz="1250" dirty="0"/>
-          </a:p>
-        </p:txBody>
-      </p:sp>
-      <p:sp>
-        <p:nvSpPr>
-          <p:cNvPr id="8" name="Shape 6"/>
-          <p:cNvSpPr/>
-          <p:nvPr/>
-        </p:nvSpPr>
-        <p:spPr>
-          <a:xfrm>
-            <a:off x="822960" y="3794760"/>
-            <a:ext cx="10515600" cy="1234440"/>
-          </a:xfrm>
-          <a:prstGeom prst="rect">
-            <a:avLst/>
-          </a:prstGeom>
-          <a:solidFill>
-            <a:srgbClr val="FFFFFF"/>
-          </a:solidFill>
-          <a:ln w="12700">
-            <a:solidFill>
-              <a:srgbClr val="DCDBD5"/>
-            </a:solidFill>
-            <a:prstDash val="solid"/>
-          </a:ln>
-        </p:spPr>
-      </p:sp>
-      <p:sp>
-        <p:nvSpPr>
-          <p:cNvPr id="9" name="Text 7"/>
-          <p:cNvSpPr/>
-          <p:nvPr/>
-        </p:nvSpPr>
-        <p:spPr>
-          <a:xfrm>
-            <a:off x="1051560" y="3959352"/>
-            <a:ext cx="1005840" cy="914400"/>
-          </a:xfrm>
-          <a:prstGeom prst="rect">
-            <a:avLst/>
-          </a:prstGeom>
-          <a:noFill/>
-          <a:ln/>
-        </p:spPr>
-        <p:txBody>
-          <a:bodyPr wrap="square" lIns="0" tIns="0" rIns="0" bIns="0" rtlCol="0" anchor="ctr"/>
-          <a:lstStyle/>
-          <a:p>
-            <a:pPr indent="0" marL="0">
-              <a:buNone/>
-            </a:pPr>
-            <a:r>
-              <a:rPr lang="en-US" sz="4400" dirty="0">
-                <a:solidFill>
-                  <a:srgbClr val="D6360F"/>
-                </a:solidFill>
-                <a:latin typeface="Cambria" pitchFamily="34" charset="0"/>
-                <a:ea typeface="Cambria" pitchFamily="34" charset="-122"/>
-                <a:cs typeface="Cambria" pitchFamily="34" charset="-120"/>
-              </a:rPr>
-              <a:t>02</a:t>
-            </a:r>
-            <a:endParaRPr lang="en-US" sz="4400" dirty="0"/>
-          </a:p>
-        </p:txBody>
-      </p:sp>
-      <p:sp>
-        <p:nvSpPr>
-          <p:cNvPr id="10" name="Text 8"/>
-          <p:cNvSpPr/>
-          <p:nvPr/>
-        </p:nvSpPr>
-        <p:spPr>
-          <a:xfrm>
-            <a:off x="2240280" y="3977640"/>
-            <a:ext cx="8778240" cy="457200"/>
-          </a:xfrm>
-          <a:prstGeom prst="rect">
-            <a:avLst/>
-          </a:prstGeom>
-          <a:noFill/>
-          <a:ln/>
-        </p:spPr>
-        <p:txBody>
-          <a:bodyPr wrap="square" lIns="0" tIns="0" rIns="0" bIns="0" rtlCol="0" anchor="ctr"/>
-          <a:lstStyle/>
-          <a:p>
-            <a:pPr indent="0" marL="0">
-              <a:buNone/>
-            </a:pPr>
-            <a:r>
-              <a:rPr lang="en-US" sz="1500" b="1" dirty="0">
-                <a:solidFill>
-                  <a:srgbClr val="141619"/>
-                </a:solidFill>
-                <a:latin typeface="Courier New" pitchFamily="34" charset="0"/>
-                <a:ea typeface="Courier New" pitchFamily="34" charset="-122"/>
-                <a:cs typeface="Courier New" pitchFamily="34" charset="-120"/>
-              </a:rPr>
-              <a:t>Field-test the sensor against real skin contact</a:t>
-            </a:r>
-            <a:endParaRPr lang="en-US" sz="1500" dirty="0"/>
-          </a:p>
-        </p:txBody>
-      </p:sp>
-      <p:sp>
-        <p:nvSpPr>
-          <p:cNvPr id="11" name="Text 9"/>
-          <p:cNvSpPr/>
-          <p:nvPr/>
-        </p:nvSpPr>
-        <p:spPr>
-          <a:xfrm>
-            <a:off x="2240280" y="4416552"/>
-            <a:ext cx="8778240" cy="502920"/>
-          </a:xfrm>
-          <a:prstGeom prst="rect">
-            <a:avLst/>
-          </a:prstGeom>
-          <a:noFill/>
-          <a:ln/>
-        </p:spPr>
-        <p:txBody>
-          <a:bodyPr wrap="square" lIns="0" tIns="0" rIns="0" bIns="0" rtlCol="0" anchor="t"/>
-          <a:lstStyle/>
-          <a:p>
-            <a:pPr indent="0" marL="0">
-              <a:buNone/>
-            </a:pPr>
-            <a:r>
-              <a:rPr lang="en-US" sz="1250" dirty="0">
-                <a:solidFill>
-                  <a:srgbClr val="5B6068"/>
-                </a:solidFill>
-                <a:latin typeface="Calibri" pitchFamily="34" charset="0"/>
-                <a:ea typeface="Calibri" pitchFamily="34" charset="-122"/>
-                <a:cs typeface="Calibri" pitchFamily="34" charset="-120"/>
-              </a:rPr>
-              <a:t>Low-frequency response is currently unverified. Flagged in the code, not hidden.</a:t>
-            </a:r>
-            <a:endParaRPr lang="en-US" sz="1250" dirty="0"/>
-          </a:p>
-        </p:txBody>
-      </p:sp>
-      <p:sp>
-        <p:nvSpPr>
-          <p:cNvPr id="12" name="Text 10"/>
-          <p:cNvSpPr/>
-          <p:nvPr/>
-        </p:nvSpPr>
-        <p:spPr>
-          <a:xfrm>
-            <a:off x="502920" y="6400800"/>
-            <a:ext cx="1828800" cy="274320"/>
-          </a:xfrm>
-          <a:prstGeom prst="rect">
-            <a:avLst/>
-          </a:prstGeom>
-          <a:noFill/>
-          <a:ln/>
-        </p:spPr>
-        <p:txBody>
-          <a:bodyPr wrap="square" lIns="0" tIns="0" rIns="0" bIns="0" rtlCol="0" anchor="ctr"/>
-          <a:lstStyle/>
-          <a:p>
-            <a:pPr indent="0" marL="0">
-              <a:buNone/>
-            </a:pPr>
-            <a:r>
-              <a:rPr lang="en-US" sz="900" spc="200" kern="0" dirty="0">
-                <a:solidFill>
-                  <a:srgbClr val="8E939A"/>
-                </a:solidFill>
-                <a:latin typeface="Courier New" pitchFamily="34" charset="0"/>
-                <a:ea typeface="Courier New" pitchFamily="34" charset="-122"/>
-                <a:cs typeface="Courier New" pitchFamily="34" charset="-120"/>
-              </a:rPr>
               <a:t>PULSO</a:t>
             </a:r>
             <a:endParaRPr lang="en-US" sz="900" dirty="0"/>
@@ -6724,7 +7754,7 @@
       </p:sp>
       <p:sp>
         <p:nvSpPr>
-          <p:cNvPr id="13" name="Text 11"/>
+          <p:cNvPr id="15" name="Text 13"/>
           <p:cNvSpPr/>
           <p:nvPr/>
         </p:nvSpPr>
@@ -6802,23 +7832,42 @@
       </p:grpSpPr>
       <p:sp>
         <p:nvSpPr>
-          <p:cNvPr id="2" name="Shape 0"/>
-          <p:cNvSpPr/>
-          <p:nvPr/>
-        </p:nvSpPr>
-        <p:spPr>
-          <a:xfrm>
-            <a:off x="822960" y="2606040"/>
-            <a:ext cx="118872" cy="118872"/>
-          </a:xfrm>
-          <a:prstGeom prst="ellipse">
-            <a:avLst/>
-          </a:prstGeom>
-          <a:solidFill>
-            <a:srgbClr val="FF5A2C"/>
-          </a:solidFill>
-          <a:ln/>
-        </p:spPr>
+          <p:cNvPr id="2" name="Text 0"/>
+          <p:cNvSpPr/>
+          <p:nvPr/>
+        </p:nvSpPr>
+        <p:spPr>
+          <a:xfrm>
+            <a:off x="822960" y="502920"/>
+            <a:ext cx="8229600" cy="292608"/>
+          </a:xfrm>
+          <a:prstGeom prst="rect">
+            <a:avLst/>
+          </a:prstGeom>
+          <a:noFill/>
+          <a:ln/>
+        </p:spPr>
+        <p:txBody>
+          <a:bodyPr wrap="square" lIns="0" tIns="0" rIns="0" bIns="0" rtlCol="0" anchor="ctr"/>
+          <a:lstStyle/>
+          <a:p>
+            <a:pPr algn="l" indent="0" marL="0">
+              <a:buNone/>
+            </a:pPr>
+            <a:r>
+              <a:rPr lang="en-US" sz="1100" b="1" spc="200" kern="0" dirty="0">
+                <a:solidFill>
+                  <a:srgbClr val="8E939A"/>
+                </a:solidFill>
+                <a:latin typeface="Courier New" pitchFamily="34" charset="0"/>
+                <a:ea typeface="Courier New" pitchFamily="34" charset="-122"/>
+                <a:cs typeface="Courier New" pitchFamily="34" charset="-120"/>
+              </a:rPr>
+              <a:t>PRICING — THE PLAN, NOT A LIVE CHECKOUT</a:t>
+            </a:r>
+            <a:endParaRPr lang="en-US" sz="1100" dirty="0"/>
+          </a:p>
+        </p:txBody>
       </p:sp>
       <p:sp>
         <p:nvSpPr>
@@ -6828,8 +7877,8 @@
         </p:nvSpPr>
         <p:spPr>
           <a:xfrm>
-            <a:off x="822960" y="2331720"/>
-            <a:ext cx="10515600" cy="1554480"/>
+            <a:off x="822960" y="868680"/>
+            <a:ext cx="8229600" cy="822960"/>
           </a:xfrm>
           <a:prstGeom prst="rect">
             <a:avLst/>
@@ -6841,51 +7890,76 @@
           <a:bodyPr wrap="square" lIns="0" tIns="0" rIns="0" bIns="0" rtlCol="0" anchor="t"/>
           <a:lstStyle/>
           <a:p>
-            <a:pPr indent="0" marL="0">
-              <a:buNone/>
-            </a:pPr>
-            <a:r>
-              <a:rPr lang="en-US" sz="4000" dirty="0">
-                <a:solidFill>
-                  <a:srgbClr val="EDEEF0"/>
+            <a:pPr algn="l" indent="0" marL="0">
+              <a:buNone/>
+            </a:pPr>
+            <a:r>
+              <a:rPr lang="en-US" sz="2800" dirty="0">
+                <a:solidFill>
+                  <a:srgbClr val="141619"/>
                 </a:solidFill>
                 <a:latin typeface="Cambria" pitchFamily="34" charset="0"/>
                 <a:ea typeface="Cambria" pitchFamily="34" charset="-122"/>
                 <a:cs typeface="Cambria" pitchFamily="34" charset="-120"/>
               </a:rPr>
-              <a:t>A reason to listen.</a:t>
-            </a:r>
-            <a:endParaRPr lang="en-US" sz="4000" dirty="0"/>
-          </a:p>
-          <a:p>
-            <a:pPr indent="0" marL="0">
-              <a:buNone/>
-            </a:pPr>
-            <a:r>
-              <a:rPr lang="en-US" sz="4000" dirty="0">
-                <a:solidFill>
-                  <a:srgbClr val="EDEEF0"/>
+              <a:t>Priced to be adopted,</a:t>
+            </a:r>
+            <a:endParaRPr lang="en-US" sz="2800" dirty="0"/>
+          </a:p>
+          <a:p>
+            <a:pPr algn="l" indent="0" marL="0">
+              <a:buNone/>
+            </a:pPr>
+            <a:r>
+              <a:rPr lang="en-US" sz="2800" dirty="0">
+                <a:solidFill>
+                  <a:srgbClr val="141619"/>
                 </a:solidFill>
                 <a:latin typeface="Cambria" pitchFamily="34" charset="0"/>
                 <a:ea typeface="Cambria" pitchFamily="34" charset="-122"/>
                 <a:cs typeface="Cambria" pitchFamily="34" charset="-120"/>
               </a:rPr>
-              <a:t>Not a diagnosis.</a:t>
-            </a:r>
-            <a:endParaRPr lang="en-US" sz="4000" dirty="0"/>
-          </a:p>
-        </p:txBody>
-      </p:sp>
-      <p:sp>
-        <p:nvSpPr>
-          <p:cNvPr id="4" name="Text 2"/>
-          <p:cNvSpPr/>
-          <p:nvPr/>
-        </p:nvSpPr>
-        <p:spPr>
-          <a:xfrm>
-            <a:off x="822960" y="3977640"/>
-            <a:ext cx="8686800" cy="731520"/>
+              <a:t>not to maximize margin.</a:t>
+            </a:r>
+            <a:endParaRPr lang="en-US" sz="2800" dirty="0"/>
+          </a:p>
+        </p:txBody>
+      </p:sp>
+      <p:sp>
+        <p:nvSpPr>
+          <p:cNvPr id="4" name="Shape 2"/>
+          <p:cNvSpPr/>
+          <p:nvPr/>
+        </p:nvSpPr>
+        <p:spPr>
+          <a:xfrm>
+            <a:off x="822960" y="2331720"/>
+            <a:ext cx="3337560" cy="3200400"/>
+          </a:xfrm>
+          <a:prstGeom prst="rect">
+            <a:avLst/>
+          </a:prstGeom>
+          <a:solidFill>
+            <a:srgbClr val="FFFFFF"/>
+          </a:solidFill>
+          <a:ln w="12700">
+            <a:solidFill>
+              <a:srgbClr val="C3C2BA"/>
+            </a:solidFill>
+            <a:prstDash val="solid"/>
+          </a:ln>
+        </p:spPr>
+      </p:sp>
+      <p:sp>
+        <p:nvSpPr>
+          <p:cNvPr id="5" name="Text 3"/>
+          <p:cNvSpPr/>
+          <p:nvPr/>
+        </p:nvSpPr>
+        <p:spPr>
+          <a:xfrm>
+            <a:off x="1005840" y="2496312"/>
+            <a:ext cx="2971800" cy="256032"/>
           </a:xfrm>
           <a:prstGeom prst="rect">
             <a:avLst/>
@@ -6901,38 +7975,212 @@
               <a:buNone/>
             </a:pPr>
             <a:r>
-              <a:rPr lang="en-US" sz="1500" i="1" dirty="0">
-                <a:solidFill>
-                  <a:srgbClr val="FF5A2C"/>
+              <a:rPr lang="en-US" sz="1100" b="1" spc="120" kern="0" dirty="0">
+                <a:solidFill>
+                  <a:srgbClr val="8E939A"/>
+                </a:solidFill>
+                <a:latin typeface="Courier New" pitchFamily="34" charset="0"/>
+                <a:ea typeface="Courier New" pitchFamily="34" charset="-122"/>
+                <a:cs typeface="Courier New" pitchFamily="34" charset="-120"/>
+              </a:rPr>
+              <a:t>PILOT</a:t>
+            </a:r>
+            <a:endParaRPr lang="en-US" sz="1100" dirty="0"/>
+          </a:p>
+        </p:txBody>
+      </p:sp>
+      <p:sp>
+        <p:nvSpPr>
+          <p:cNvPr id="6" name="Text 4"/>
+          <p:cNvSpPr/>
+          <p:nvPr/>
+        </p:nvSpPr>
+        <p:spPr>
+          <a:xfrm>
+            <a:off x="1005840" y="2788920"/>
+            <a:ext cx="2971800" cy="502920"/>
+          </a:xfrm>
+          <a:prstGeom prst="rect">
+            <a:avLst/>
+          </a:prstGeom>
+          <a:noFill/>
+          <a:ln/>
+        </p:spPr>
+        <p:txBody>
+          <a:bodyPr wrap="square" lIns="0" tIns="0" rIns="0" bIns="0" rtlCol="0" anchor="ctr"/>
+          <a:lstStyle/>
+          <a:p>
+            <a:pPr indent="0" marL="0">
+              <a:buNone/>
+            </a:pPr>
+            <a:r>
+              <a:rPr lang="en-US" sz="2600" dirty="0">
+                <a:solidFill>
+                  <a:srgbClr val="141619"/>
+                </a:solidFill>
+                <a:latin typeface="Cambria" pitchFamily="34" charset="0"/>
+                <a:ea typeface="Cambria" pitchFamily="34" charset="-122"/>
+                <a:cs typeface="Cambria" pitchFamily="34" charset="-120"/>
+              </a:rPr>
+              <a:t>~$45–60</a:t>
+            </a:r>
+            <a:endParaRPr lang="en-US" sz="2600" dirty="0"/>
+          </a:p>
+        </p:txBody>
+      </p:sp>
+      <p:sp>
+        <p:nvSpPr>
+          <p:cNvPr id="7" name="Text 5"/>
+          <p:cNvSpPr/>
+          <p:nvPr/>
+        </p:nvSpPr>
+        <p:spPr>
+          <a:xfrm>
+            <a:off x="1005840" y="3264408"/>
+            <a:ext cx="2971800" cy="365760"/>
+          </a:xfrm>
+          <a:prstGeom prst="rect">
+            <a:avLst/>
+          </a:prstGeom>
+          <a:noFill/>
+          <a:ln/>
+        </p:spPr>
+        <p:txBody>
+          <a:bodyPr wrap="square" lIns="0" tIns="0" rIns="0" bIns="0" rtlCol="0" anchor="t"/>
+          <a:lstStyle/>
+          <a:p>
+            <a:pPr indent="0" marL="0">
+              <a:buNone/>
+            </a:pPr>
+            <a:r>
+              <a:rPr lang="en-US" sz="1000" i="1" dirty="0">
+                <a:solidFill>
+                  <a:srgbClr val="5B6068"/>
                 </a:solidFill>
                 <a:latin typeface="Calibri" pitchFamily="34" charset="0"/>
                 <a:ea typeface="Calibri" pitchFamily="34" charset="-122"/>
                 <a:cs typeface="Calibri" pitchFamily="34" charset="-120"/>
               </a:rPr>
-              <a:t>Built to be honest about what it doesn't know — which is exactly what makes it safe to put in someone's hands.</a:t>
-            </a:r>
-            <a:endParaRPr lang="en-US" sz="1500" dirty="0"/>
-          </a:p>
-        </p:txBody>
-      </p:sp>
-      <p:sp>
-        <p:nvSpPr>
-          <p:cNvPr id="5" name="Shape 3"/>
-          <p:cNvSpPr/>
-          <p:nvPr/>
-        </p:nvSpPr>
-        <p:spPr>
-          <a:xfrm>
-            <a:off x="822960" y="5806440"/>
-            <a:ext cx="10515600" cy="0"/>
-          </a:xfrm>
-          <a:prstGeom prst="line">
-            <a:avLst/>
-          </a:prstGeom>
-          <a:noFill/>
-          <a:ln w="12700">
+              <a:t>per kit, near BOM cost</a:t>
+            </a:r>
+            <a:endParaRPr lang="en-US" sz="1000" dirty="0"/>
+          </a:p>
+        </p:txBody>
+      </p:sp>
+      <p:sp>
+        <p:nvSpPr>
+          <p:cNvPr id="8" name="Text 6"/>
+          <p:cNvSpPr/>
+          <p:nvPr/>
+        </p:nvSpPr>
+        <p:spPr>
+          <a:xfrm>
+            <a:off x="1005840" y="3703320"/>
+            <a:ext cx="2971800" cy="1691640"/>
+          </a:xfrm>
+          <a:prstGeom prst="rect">
+            <a:avLst/>
+          </a:prstGeom>
+          <a:noFill/>
+          <a:ln/>
+        </p:spPr>
+        <p:txBody>
+          <a:bodyPr wrap="square" lIns="0" tIns="0" rIns="0" bIns="0" rtlCol="0" anchor="t"/>
+          <a:lstStyle/>
+          <a:p>
+            <a:pPr marL="342900" indent="-342900">
+              <a:lnSpc>
+                <a:spcPct val="115000"/>
+              </a:lnSpc>
+              <a:spcAft>
+                <a:spcPts val="600"/>
+              </a:spcAft>
+              <a:buSzPct val="100000"/>
+              <a:buChar char="•"/>
+            </a:pPr>
+            <a:r>
+              <a:rPr lang="en-US" sz="1050" dirty="0">
+                <a:solidFill>
+                  <a:srgbClr val="141619"/>
+                </a:solidFill>
+                <a:latin typeface="Calibri" pitchFamily="34" charset="0"/>
+                <a:ea typeface="Calibri" pitchFamily="34" charset="-122"/>
+                <a:cs typeface="Calibri" pitchFamily="34" charset="-120"/>
+              </a:rPr>
+              <a:t>One hardware kit</a:t>
+            </a:r>
+            <a:endParaRPr lang="en-US" sz="1050" dirty="0"/>
+          </a:p>
+          <a:p>
+            <a:pPr marL="342900" indent="-342900">
+              <a:lnSpc>
+                <a:spcPct val="115000"/>
+              </a:lnSpc>
+              <a:spcAft>
+                <a:spcPts val="600"/>
+              </a:spcAft>
+              <a:buSzPct val="100000"/>
+              <a:buChar char="•"/>
+            </a:pPr>
+            <a:r>
+              <a:rPr lang="en-US" sz="1050" dirty="0">
+                <a:solidFill>
+                  <a:srgbClr val="141619"/>
+                </a:solidFill>
+                <a:latin typeface="Calibri" pitchFamily="34" charset="0"/>
+                <a:ea typeface="Calibri" pitchFamily="34" charset="-122"/>
+                <a:cs typeface="Calibri" pitchFamily="34" charset="-120"/>
+              </a:rPr>
+              <a:t>Single-device app, no login</a:t>
+            </a:r>
+            <a:endParaRPr lang="en-US" sz="1050" dirty="0"/>
+          </a:p>
+          <a:p>
+            <a:pPr marL="342900" indent="-342900">
+              <a:lnSpc>
+                <a:spcPct val="115000"/>
+              </a:lnSpc>
+              <a:spcAft>
+                <a:spcPts val="600"/>
+              </a:spcAft>
+              <a:buSzPct val="100000"/>
+              <a:buChar char="•"/>
+            </a:pPr>
+            <a:r>
+              <a:rPr lang="en-US" sz="1050" dirty="0">
+                <a:solidFill>
+                  <a:srgbClr val="141619"/>
+                </a:solidFill>
+                <a:latin typeface="Calibri" pitchFamily="34" charset="0"/>
+                <a:ea typeface="Calibri" pitchFamily="34" charset="-122"/>
+                <a:cs typeface="Calibri" pitchFamily="34" charset="-120"/>
+              </a:rPr>
+              <a:t>For one health post to try it</a:t>
+            </a:r>
+            <a:endParaRPr lang="en-US" sz="1050" dirty="0"/>
+          </a:p>
+        </p:txBody>
+      </p:sp>
+      <p:sp>
+        <p:nvSpPr>
+          <p:cNvPr id="9" name="Shape 7"/>
+          <p:cNvSpPr/>
+          <p:nvPr/>
+        </p:nvSpPr>
+        <p:spPr>
+          <a:xfrm>
+            <a:off x="4416552" y="2331720"/>
+            <a:ext cx="3337560" cy="3200400"/>
+          </a:xfrm>
+          <a:prstGeom prst="rect">
+            <a:avLst/>
+          </a:prstGeom>
+          <a:solidFill>
+            <a:srgbClr val="FFFFFF"/>
+          </a:solidFill>
+          <a:ln w="19050">
             <a:solidFill>
-              <a:srgbClr val="343A40"/>
+              <a:srgbClr val="D6360F"/>
             </a:solidFill>
             <a:prstDash val="solid"/>
           </a:ln>
@@ -6940,14 +8188,14 @@
       </p:sp>
       <p:sp>
         <p:nvSpPr>
-          <p:cNvPr id="6" name="Text 4"/>
-          <p:cNvSpPr/>
-          <p:nvPr/>
-        </p:nvSpPr>
-        <p:spPr>
-          <a:xfrm>
-            <a:off x="822960" y="5989320"/>
-            <a:ext cx="3657600" cy="274320"/>
+          <p:cNvPr id="10" name="Text 8"/>
+          <p:cNvSpPr/>
+          <p:nvPr/>
+        </p:nvSpPr>
+        <p:spPr>
+          <a:xfrm>
+            <a:off x="4599432" y="2496312"/>
+            <a:ext cx="2971800" cy="256032"/>
           </a:xfrm>
           <a:prstGeom prst="rect">
             <a:avLst/>
@@ -6963,15 +8211,93 @@
               <a:buNone/>
             </a:pPr>
             <a:r>
-              <a:rPr lang="en-US" sz="1000" spc="200" kern="0" dirty="0">
-                <a:solidFill>
-                  <a:srgbClr val="9AA0A8"/>
+              <a:rPr lang="en-US" sz="1100" b="1" spc="120" kern="0" dirty="0">
+                <a:solidFill>
+                  <a:srgbClr val="D6360F"/>
                 </a:solidFill>
                 <a:latin typeface="Courier New" pitchFamily="34" charset="0"/>
                 <a:ea typeface="Courier New" pitchFamily="34" charset="-122"/>
                 <a:cs typeface="Courier New" pitchFamily="34" charset="-120"/>
               </a:rPr>
-              <a:t>PULSO</a:t>
+              <a:t>PROGRAM</a:t>
+            </a:r>
+            <a:endParaRPr lang="en-US" sz="1100" dirty="0"/>
+          </a:p>
+        </p:txBody>
+      </p:sp>
+      <p:sp>
+        <p:nvSpPr>
+          <p:cNvPr id="11" name="Text 9"/>
+          <p:cNvSpPr/>
+          <p:nvPr/>
+        </p:nvSpPr>
+        <p:spPr>
+          <a:xfrm>
+            <a:off x="4599432" y="2788920"/>
+            <a:ext cx="2971800" cy="502920"/>
+          </a:xfrm>
+          <a:prstGeom prst="rect">
+            <a:avLst/>
+          </a:prstGeom>
+          <a:noFill/>
+          <a:ln/>
+        </p:spPr>
+        <p:txBody>
+          <a:bodyPr wrap="square" lIns="0" tIns="0" rIns="0" bIns="0" rtlCol="0" anchor="ctr"/>
+          <a:lstStyle/>
+          <a:p>
+            <a:pPr indent="0" marL="0">
+              <a:buNone/>
+            </a:pPr>
+            <a:r>
+              <a:rPr lang="en-US" sz="2600" dirty="0">
+                <a:solidFill>
+                  <a:srgbClr val="141619"/>
+                </a:solidFill>
+                <a:latin typeface="Cambria" pitchFamily="34" charset="0"/>
+                <a:ea typeface="Cambria" pitchFamily="34" charset="-122"/>
+                <a:cs typeface="Cambria" pitchFamily="34" charset="-120"/>
+              </a:rPr>
+              <a:t>Custom / region</a:t>
+            </a:r>
+            <a:endParaRPr lang="en-US" sz="2600" dirty="0"/>
+          </a:p>
+        </p:txBody>
+      </p:sp>
+      <p:sp>
+        <p:nvSpPr>
+          <p:cNvPr id="12" name="Text 10"/>
+          <p:cNvSpPr/>
+          <p:nvPr/>
+        </p:nvSpPr>
+        <p:spPr>
+          <a:xfrm>
+            <a:off x="4599432" y="3264408"/>
+            <a:ext cx="2971800" cy="365760"/>
+          </a:xfrm>
+          <a:prstGeom prst="rect">
+            <a:avLst/>
+          </a:prstGeom>
+          <a:noFill/>
+          <a:ln/>
+        </p:spPr>
+        <p:txBody>
+          <a:bodyPr wrap="square" lIns="0" tIns="0" rIns="0" bIns="0" rtlCol="0" anchor="t"/>
+          <a:lstStyle/>
+          <a:p>
+            <a:pPr indent="0" marL="0">
+              <a:buNone/>
+            </a:pPr>
+            <a:r>
+              <a:rPr lang="en-US" sz="1000" i="1" dirty="0">
+                <a:solidFill>
+                  <a:srgbClr val="5B6068"/>
+                </a:solidFill>
+                <a:latin typeface="Calibri" pitchFamily="34" charset="0"/>
+                <a:ea typeface="Calibri" pitchFamily="34" charset="-122"/>
+                <a:cs typeface="Calibri" pitchFamily="34" charset="-120"/>
+              </a:rPr>
+              <a:t>annual license, billed to the NGO</a:t>
             </a:r>
             <a:endParaRPr lang="en-US" sz="1000" dirty="0"/>
           </a:p>
@@ -6979,14 +8305,133 @@
       </p:sp>
       <p:sp>
         <p:nvSpPr>
-          <p:cNvPr id="7" name="Text 5"/>
-          <p:cNvSpPr/>
-          <p:nvPr/>
-        </p:nvSpPr>
-        <p:spPr>
-          <a:xfrm>
-            <a:off x="9082735" y="5989320"/>
-            <a:ext cx="2286000" cy="274320"/>
+          <p:cNvPr id="13" name="Text 11"/>
+          <p:cNvSpPr/>
+          <p:nvPr/>
+        </p:nvSpPr>
+        <p:spPr>
+          <a:xfrm>
+            <a:off x="4599432" y="3703320"/>
+            <a:ext cx="2971800" cy="1691640"/>
+          </a:xfrm>
+          <a:prstGeom prst="rect">
+            <a:avLst/>
+          </a:prstGeom>
+          <a:noFill/>
+          <a:ln/>
+        </p:spPr>
+        <p:txBody>
+          <a:bodyPr wrap="square" lIns="0" tIns="0" rIns="0" bIns="0" rtlCol="0" anchor="t"/>
+          <a:lstStyle/>
+          <a:p>
+            <a:pPr marL="342900" indent="-342900">
+              <a:lnSpc>
+                <a:spcPct val="115000"/>
+              </a:lnSpc>
+              <a:spcAft>
+                <a:spcPts val="600"/>
+              </a:spcAft>
+              <a:buSzPct val="100000"/>
+              <a:buChar char="•"/>
+            </a:pPr>
+            <a:r>
+              <a:rPr lang="en-US" sz="1050" dirty="0">
+                <a:solidFill>
+                  <a:srgbClr val="141619"/>
+                </a:solidFill>
+                <a:latin typeface="Calibri" pitchFamily="34" charset="0"/>
+                <a:ea typeface="Calibri" pitchFamily="34" charset="-122"/>
+                <a:cs typeface="Calibri" pitchFamily="34" charset="-120"/>
+              </a:rPr>
+              <a:t>Bulk hardware kits</a:t>
+            </a:r>
+            <a:endParaRPr lang="en-US" sz="1050" dirty="0"/>
+          </a:p>
+          <a:p>
+            <a:pPr marL="342900" indent="-342900">
+              <a:lnSpc>
+                <a:spcPct val="115000"/>
+              </a:lnSpc>
+              <a:spcAft>
+                <a:spcPts val="600"/>
+              </a:spcAft>
+              <a:buSzPct val="100000"/>
+              <a:buChar char="•"/>
+            </a:pPr>
+            <a:r>
+              <a:rPr lang="en-US" sz="1050" dirty="0">
+                <a:solidFill>
+                  <a:srgbClr val="141619"/>
+                </a:solidFill>
+                <a:latin typeface="Calibri" pitchFamily="34" charset="0"/>
+                <a:ea typeface="Calibri" pitchFamily="34" charset="-122"/>
+                <a:cs typeface="Calibri" pitchFamily="34" charset="-120"/>
+              </a:rPr>
+              <a:t>Program-level dashboard across workers</a:t>
+            </a:r>
+            <a:endParaRPr lang="en-US" sz="1050" dirty="0"/>
+          </a:p>
+          <a:p>
+            <a:pPr marL="342900" indent="-342900">
+              <a:lnSpc>
+                <a:spcPct val="115000"/>
+              </a:lnSpc>
+              <a:spcAft>
+                <a:spcPts val="600"/>
+              </a:spcAft>
+              <a:buSzPct val="100000"/>
+              <a:buChar char="•"/>
+            </a:pPr>
+            <a:r>
+              <a:rPr lang="en-US" sz="1050" dirty="0">
+                <a:solidFill>
+                  <a:srgbClr val="141619"/>
+                </a:solidFill>
+                <a:latin typeface="Calibri" pitchFamily="34" charset="0"/>
+                <a:ea typeface="Calibri" pitchFamily="34" charset="-122"/>
+                <a:cs typeface="Calibri" pitchFamily="34" charset="-120"/>
+              </a:rPr>
+              <a:t>Aggregated screening coverage reporting</a:t>
+            </a:r>
+            <a:endParaRPr lang="en-US" sz="1050" dirty="0"/>
+          </a:p>
+        </p:txBody>
+      </p:sp>
+      <p:sp>
+        <p:nvSpPr>
+          <p:cNvPr id="14" name="Shape 12"/>
+          <p:cNvSpPr/>
+          <p:nvPr/>
+        </p:nvSpPr>
+        <p:spPr>
+          <a:xfrm>
+            <a:off x="8010144" y="2331720"/>
+            <a:ext cx="3337560" cy="3200400"/>
+          </a:xfrm>
+          <a:prstGeom prst="rect">
+            <a:avLst/>
+          </a:prstGeom>
+          <a:solidFill>
+            <a:srgbClr val="FFFFFF"/>
+          </a:solidFill>
+          <a:ln w="12700">
+            <a:solidFill>
+              <a:srgbClr val="C3C2BA"/>
+            </a:solidFill>
+            <a:prstDash val="solid"/>
+          </a:ln>
+        </p:spPr>
+      </p:sp>
+      <p:sp>
+        <p:nvSpPr>
+          <p:cNvPr id="15" name="Text 13"/>
+          <p:cNvSpPr/>
+          <p:nvPr/>
+        </p:nvSpPr>
+        <p:spPr>
+          <a:xfrm>
+            <a:off x="8193024" y="2496312"/>
+            <a:ext cx="2971800" cy="256032"/>
           </a:xfrm>
           <a:prstGeom prst="rect">
             <a:avLst/>
@@ -6998,21 +8443,335 @@
           <a:bodyPr wrap="square" lIns="0" tIns="0" rIns="0" bIns="0" rtlCol="0" anchor="ctr"/>
           <a:lstStyle/>
           <a:p>
-            <a:pPr algn="r" indent="0" marL="0">
-              <a:buNone/>
-            </a:pPr>
-            <a:r>
-              <a:rPr lang="en-US" sz="1000" spc="200" kern="0" dirty="0">
-                <a:solidFill>
-                  <a:srgbClr val="9AA0A8"/>
+            <a:pPr indent="0" marL="0">
+              <a:buNone/>
+            </a:pPr>
+            <a:r>
+              <a:rPr lang="en-US" sz="1100" b="1" spc="120" kern="0" dirty="0">
+                <a:solidFill>
+                  <a:srgbClr val="8E939A"/>
                 </a:solidFill>
                 <a:latin typeface="Courier New" pitchFamily="34" charset="0"/>
                 <a:ea typeface="Courier New" pitchFamily="34" charset="-122"/>
                 <a:cs typeface="Courier New" pitchFamily="34" charset="-120"/>
               </a:rPr>
-              <a:t>QUESTIONS?</a:t>
+              <a:t>ENTERPRISE / NGO</a:t>
+            </a:r>
+            <a:endParaRPr lang="en-US" sz="1100" dirty="0"/>
+          </a:p>
+        </p:txBody>
+      </p:sp>
+      <p:sp>
+        <p:nvSpPr>
+          <p:cNvPr id="16" name="Text 14"/>
+          <p:cNvSpPr/>
+          <p:nvPr/>
+        </p:nvSpPr>
+        <p:spPr>
+          <a:xfrm>
+            <a:off x="8193024" y="2788920"/>
+            <a:ext cx="2971800" cy="502920"/>
+          </a:xfrm>
+          <a:prstGeom prst="rect">
+            <a:avLst/>
+          </a:prstGeom>
+          <a:noFill/>
+          <a:ln/>
+        </p:spPr>
+        <p:txBody>
+          <a:bodyPr wrap="square" lIns="0" tIns="0" rIns="0" bIns="0" rtlCol="0" anchor="ctr"/>
+          <a:lstStyle/>
+          <a:p>
+            <a:pPr indent="0" marL="0">
+              <a:buNone/>
+            </a:pPr>
+            <a:r>
+              <a:rPr lang="en-US" sz="2600" dirty="0">
+                <a:solidFill>
+                  <a:srgbClr val="141619"/>
+                </a:solidFill>
+                <a:latin typeface="Cambria" pitchFamily="34" charset="0"/>
+                <a:ea typeface="Cambria" pitchFamily="34" charset="-122"/>
+                <a:cs typeface="Cambria" pitchFamily="34" charset="-120"/>
+              </a:rPr>
+              <a:t>Custom</a:t>
+            </a:r>
+            <a:endParaRPr lang="en-US" sz="2600" dirty="0"/>
+          </a:p>
+        </p:txBody>
+      </p:sp>
+      <p:sp>
+        <p:nvSpPr>
+          <p:cNvPr id="17" name="Text 15"/>
+          <p:cNvSpPr/>
+          <p:nvPr/>
+        </p:nvSpPr>
+        <p:spPr>
+          <a:xfrm>
+            <a:off x="8193024" y="3264408"/>
+            <a:ext cx="2971800" cy="365760"/>
+          </a:xfrm>
+          <a:prstGeom prst="rect">
+            <a:avLst/>
+          </a:prstGeom>
+          <a:noFill/>
+          <a:ln/>
+        </p:spPr>
+        <p:txBody>
+          <a:bodyPr wrap="square" lIns="0" tIns="0" rIns="0" bIns="0" rtlCol="0" anchor="t"/>
+          <a:lstStyle/>
+          <a:p>
+            <a:pPr indent="0" marL="0">
+              <a:buNone/>
+            </a:pPr>
+            <a:r>
+              <a:rPr lang="en-US" sz="1000" i="1" dirty="0">
+                <a:solidFill>
+                  <a:srgbClr val="5B6068"/>
+                </a:solidFill>
+                <a:latin typeface="Calibri" pitchFamily="34" charset="0"/>
+                <a:ea typeface="Calibri" pitchFamily="34" charset="-122"/>
+                <a:cs typeface="Calibri" pitchFamily="34" charset="-120"/>
+              </a:rPr>
+              <a:t>deployment + support</a:t>
             </a:r>
             <a:endParaRPr lang="en-US" sz="1000" dirty="0"/>
+          </a:p>
+        </p:txBody>
+      </p:sp>
+      <p:sp>
+        <p:nvSpPr>
+          <p:cNvPr id="18" name="Text 16"/>
+          <p:cNvSpPr/>
+          <p:nvPr/>
+        </p:nvSpPr>
+        <p:spPr>
+          <a:xfrm>
+            <a:off x="8193024" y="3703320"/>
+            <a:ext cx="2971800" cy="1691640"/>
+          </a:xfrm>
+          <a:prstGeom prst="rect">
+            <a:avLst/>
+          </a:prstGeom>
+          <a:noFill/>
+          <a:ln/>
+        </p:spPr>
+        <p:txBody>
+          <a:bodyPr wrap="square" lIns="0" tIns="0" rIns="0" bIns="0" rtlCol="0" anchor="t"/>
+          <a:lstStyle/>
+          <a:p>
+            <a:pPr marL="342900" indent="-342900">
+              <a:lnSpc>
+                <a:spcPct val="115000"/>
+              </a:lnSpc>
+              <a:spcAft>
+                <a:spcPts val="600"/>
+              </a:spcAft>
+              <a:buSzPct val="100000"/>
+              <a:buChar char="•"/>
+            </a:pPr>
+            <a:r>
+              <a:rPr lang="en-US" sz="1050" dirty="0">
+                <a:solidFill>
+                  <a:srgbClr val="141619"/>
+                </a:solidFill>
+                <a:latin typeface="Calibri" pitchFamily="34" charset="0"/>
+                <a:ea typeface="Calibri" pitchFamily="34" charset="-122"/>
+                <a:cs typeface="Calibri" pitchFamily="34" charset="-120"/>
+              </a:rPr>
+              <a:t>Custom rollout &amp; training</a:t>
+            </a:r>
+            <a:endParaRPr lang="en-US" sz="1050" dirty="0"/>
+          </a:p>
+          <a:p>
+            <a:pPr marL="342900" indent="-342900">
+              <a:lnSpc>
+                <a:spcPct val="115000"/>
+              </a:lnSpc>
+              <a:spcAft>
+                <a:spcPts val="600"/>
+              </a:spcAft>
+              <a:buSzPct val="100000"/>
+              <a:buChar char="•"/>
+            </a:pPr>
+            <a:r>
+              <a:rPr lang="en-US" sz="1050" dirty="0">
+                <a:solidFill>
+                  <a:srgbClr val="141619"/>
+                </a:solidFill>
+                <a:latin typeface="Calibri" pitchFamily="34" charset="0"/>
+                <a:ea typeface="Calibri" pitchFamily="34" charset="-122"/>
+                <a:cs typeface="Calibri" pitchFamily="34" charset="-120"/>
+              </a:rPr>
+              <a:t>Integration with existing health data systems (e.g. DHIS2)</a:t>
+            </a:r>
+            <a:endParaRPr lang="en-US" sz="1050" dirty="0"/>
+          </a:p>
+          <a:p>
+            <a:pPr marL="342900" indent="-342900">
+              <a:lnSpc>
+                <a:spcPct val="115000"/>
+              </a:lnSpc>
+              <a:spcAft>
+                <a:spcPts val="600"/>
+              </a:spcAft>
+              <a:buSzPct val="100000"/>
+              <a:buChar char="•"/>
+            </a:pPr>
+            <a:r>
+              <a:rPr lang="en-US" sz="1050" dirty="0">
+                <a:solidFill>
+                  <a:srgbClr val="141619"/>
+                </a:solidFill>
+                <a:latin typeface="Calibri" pitchFamily="34" charset="0"/>
+                <a:ea typeface="Calibri" pitchFamily="34" charset="-122"/>
+                <a:cs typeface="Calibri" pitchFamily="34" charset="-120"/>
+              </a:rPr>
+              <a:t>Dedicated support</a:t>
+            </a:r>
+            <a:endParaRPr lang="en-US" sz="1050" dirty="0"/>
+          </a:p>
+        </p:txBody>
+      </p:sp>
+      <p:sp>
+        <p:nvSpPr>
+          <p:cNvPr id="19" name="Shape 17"/>
+          <p:cNvSpPr/>
+          <p:nvPr/>
+        </p:nvSpPr>
+        <p:spPr>
+          <a:xfrm>
+            <a:off x="822960" y="5650992"/>
+            <a:ext cx="10515600" cy="512064"/>
+          </a:xfrm>
+          <a:prstGeom prst="rect">
+            <a:avLst/>
+          </a:prstGeom>
+          <a:solidFill>
+            <a:srgbClr val="FFFFFF"/>
+          </a:solidFill>
+          <a:ln w="12700">
+            <a:solidFill>
+              <a:srgbClr val="DCDBD5"/>
+            </a:solidFill>
+            <a:prstDash val="solid"/>
+          </a:ln>
+        </p:spPr>
+      </p:sp>
+      <p:sp>
+        <p:nvSpPr>
+          <p:cNvPr id="20" name="Text 18"/>
+          <p:cNvSpPr/>
+          <p:nvPr/>
+        </p:nvSpPr>
+        <p:spPr>
+          <a:xfrm>
+            <a:off x="1005840" y="5650992"/>
+            <a:ext cx="10149840" cy="512064"/>
+          </a:xfrm>
+          <a:prstGeom prst="rect">
+            <a:avLst/>
+          </a:prstGeom>
+          <a:noFill/>
+          <a:ln/>
+        </p:spPr>
+        <p:txBody>
+          <a:bodyPr wrap="square" lIns="0" tIns="0" rIns="0" bIns="0" rtlCol="0" anchor="ctr"/>
+          <a:lstStyle/>
+          <a:p>
+            <a:pPr indent="0" marL="0">
+              <a:buNone/>
+            </a:pPr>
+            <a:r>
+              <a:rPr lang="en-US" sz="1150" i="1" dirty="0">
+                <a:solidFill>
+                  <a:srgbClr val="5B6068"/>
+                </a:solidFill>
+                <a:latin typeface="Calibri" pitchFamily="34" charset="0"/>
+                <a:ea typeface="Calibri" pitchFamily="34" charset="-122"/>
+                <a:cs typeface="Calibri" pitchFamily="34" charset="-120"/>
+              </a:rPr>
+              <a:t>For comparison: Eko's CORE 500 digital stethoscope is $379 plus $119.99/yr for its AI features — built for clinicians, not this workforce.</a:t>
+            </a:r>
+            <a:endParaRPr lang="en-US" sz="1150" dirty="0"/>
+          </a:p>
+        </p:txBody>
+      </p:sp>
+      <p:sp>
+        <p:nvSpPr>
+          <p:cNvPr id="21" name="Text 19"/>
+          <p:cNvSpPr/>
+          <p:nvPr/>
+        </p:nvSpPr>
+        <p:spPr>
+          <a:xfrm>
+            <a:off x="502920" y="6400800"/>
+            <a:ext cx="1828800" cy="274320"/>
+          </a:xfrm>
+          <a:prstGeom prst="rect">
+            <a:avLst/>
+          </a:prstGeom>
+          <a:noFill/>
+          <a:ln/>
+        </p:spPr>
+        <p:txBody>
+          <a:bodyPr wrap="square" lIns="0" tIns="0" rIns="0" bIns="0" rtlCol="0" anchor="ctr"/>
+          <a:lstStyle/>
+          <a:p>
+            <a:pPr indent="0" marL="0">
+              <a:buNone/>
+            </a:pPr>
+            <a:r>
+              <a:rPr lang="en-US" sz="900" spc="200" kern="0" dirty="0">
+                <a:solidFill>
+                  <a:srgbClr val="8E939A"/>
+                </a:solidFill>
+                <a:latin typeface="Courier New" pitchFamily="34" charset="0"/>
+                <a:ea typeface="Courier New" pitchFamily="34" charset="-122"/>
+                <a:cs typeface="Courier New" pitchFamily="34" charset="-120"/>
+              </a:rPr>
+              <a:t>PULSO</a:t>
+            </a:r>
+            <a:endParaRPr lang="en-US" sz="900" dirty="0"/>
+          </a:p>
+        </p:txBody>
+      </p:sp>
+      <p:sp>
+        <p:nvSpPr>
+          <p:cNvPr id="22" name="Text 20"/>
+          <p:cNvSpPr/>
+          <p:nvPr/>
+        </p:nvSpPr>
+        <p:spPr>
+          <a:xfrm>
+            <a:off x="11185855" y="6400800"/>
+            <a:ext cx="548640" cy="274320"/>
+          </a:xfrm>
+          <a:prstGeom prst="rect">
+            <a:avLst/>
+          </a:prstGeom>
+          <a:noFill/>
+          <a:ln/>
+        </p:spPr>
+        <p:txBody>
+          <a:bodyPr wrap="square" lIns="0" tIns="0" rIns="0" bIns="0" rtlCol="0" anchor="ctr"/>
+          <a:lstStyle/>
+          <a:p>
+            <a:pPr algn="r" indent="0" marL="0">
+              <a:buNone/>
+            </a:pPr>
+            <a:r>
+              <a:rPr lang="en-US" sz="900" dirty="0">
+                <a:solidFill>
+                  <a:srgbClr val="8E939A"/>
+                </a:solidFill>
+                <a:latin typeface="Courier New" pitchFamily="34" charset="0"/>
+                <a:ea typeface="Courier New" pitchFamily="34" charset="-122"/>
+                <a:cs typeface="Courier New" pitchFamily="34" charset="-120"/>
+              </a:rPr>
+              <a:t>09</a:t>
+            </a:r>
+            <a:endParaRPr lang="en-US" sz="900" dirty="0"/>
           </a:p>
         </p:txBody>
       </p:sp>

--- a/presentation/Pulso_Pitch_Deck.pptx
+++ b/presentation/Pulso_Pitch_Deck.pptx
@@ -1039,7 +1039,7 @@
           <a:p>
             <a:r>
               <a:rPr lang="en-US" dirty="0"/>
-              <a:t>Say 'same brain' and gesture at all four -- don't read file names or explain the pipeline, the point is that it's one system, not four.</a:t>
+              <a:t>Say 'same brain' and gesture at all four -- the point is that it's one system, not four. Don't explain how it works under the hood.</a:t>
             </a:r>
             <a:endParaRPr lang="en-US" dirty="0"/>
           </a:p>
@@ -2714,7 +2714,7 @@
                 <a:ea typeface="Cambria" pitchFamily="34" charset="-122"/>
                 <a:cs typeface="Cambria" pitchFamily="34" charset="-120"/>
               </a:rPr>
-              <a:t>A wrong “you have X” from an unvalidated model is dangerous.</a:t>
+              <a:t>A wrong “you have X” from AI that's never been checked is dangerous.</a:t>
             </a:r>
             <a:endParaRPr lang="en-US" sz="2400" dirty="0"/>
           </a:p>
@@ -3683,7 +3683,7 @@
                 <a:ea typeface="Cambria" pitchFamily="34" charset="-122"/>
                 <a:cs typeface="Cambria" pitchFamily="34" charset="-120"/>
               </a:rPr>
-              <a:t>Two real bugs caught before they shipped. A hardware swap that touched zero lines of downstream code.</a:t>
+              <a:t>Two real bugs caught before they ever reached a user. We swapped in new hardware and nothing else broke.</a:t>
             </a:r>
             <a:endParaRPr lang="en-US" sz="1700" dirty="0"/>
           </a:p>
@@ -3957,7 +3957,7 @@
                 <a:ea typeface="Calibri" pitchFamily="34" charset="-122"/>
                 <a:cs typeface="Calibri" pitchFamily="34" charset="-120"/>
               </a:rPr>
-              <a:t>A microphone module on an off-the-shelf microcontroller. Whether the audio comes from that board, a phone, a laptop mic, or a recorded file — it hits the exact same pipeline, unmodified.</a:t>
+              <a:t>A cheap microphone chip picks up the sound. Swap in a phone, a laptop, or a recorded file instead — everything else stays exactly the same.</a:t>
             </a:r>
             <a:endParaRPr lang="en-US" sz="1500" dirty="0"/>
           </a:p>
@@ -5856,7 +5856,7 @@
                 <a:ea typeface="Courier New" pitchFamily="34" charset="-122"/>
                 <a:cs typeface="Courier New" pitchFamily="34" charset="-120"/>
               </a:rPr>
-              <a:t>Validate against a labeled clinical dataset</a:t>
+              <a:t>Test it against real, labeled medical recordings</a:t>
             </a:r>
             <a:endParaRPr lang="en-US" sz="1500" dirty="0"/>
           </a:p>
@@ -5895,7 +5895,7 @@
                 <a:ea typeface="Calibri" pitchFamily="34" charset="-122"/>
                 <a:cs typeface="Calibri" pitchFamily="34" charset="-120"/>
               </a:rPr>
-              <a:t>Architecture already accepts it — blocked this weekend only by network access.</a:t>
+              <a:t>We're ready for this — we just couldn't reach the data this weekend.</a:t>
             </a:r>
             <a:endParaRPr lang="en-US" sz="1300" dirty="0"/>
           </a:p>
@@ -5973,7 +5973,7 @@
                 <a:ea typeface="Courier New" pitchFamily="34" charset="-122"/>
                 <a:cs typeface="Courier New" pitchFamily="34" charset="-120"/>
               </a:rPr>
-              <a:t>Field-test the sensor against real skin contact</a:t>
+              <a:t>Test the microphone against real skin contact</a:t>
             </a:r>
             <a:endParaRPr lang="en-US" sz="1500" dirty="0"/>
           </a:p>

--- a/presentation/Pulso_Pitch_Deck.pptx
+++ b/presentation/Pulso_Pitch_Deck.pptx
@@ -15,9 +15,10 @@
     <p:sldId id="263" r:id="rId9"/>
     <p:sldId id="264" r:id="rId10"/>
     <p:sldId id="265" r:id="rId11"/>
+    <p:sldId id="266" r:id="rId12"/>
   </p:sldIdLst>
   <p:notesMasterIdLst>
-    <p:notesMasterId r:id="rId12"/>
+    <p:notesMasterId r:id="rId13"/>
   </p:notesMasterIdLst>
   <p:sldSz cx="12192000" cy="6858000"/>
   <p:notesSz cx="6858000" cy="12192000"/>
@@ -599,7 +600,7 @@
           <a:p>
             <a:r>
               <a:rPr lang="en-US" dirty="0"/>
-              <a:t>End on silence for a beat before questions.</a:t>
+              <a:t>Ten seconds, no more. Say it with momentum, not apology.</a:t>
             </a:r>
             <a:endParaRPr lang="en-US" dirty="0"/>
           </a:p>
@@ -623,6 +624,94 @@
             <a:fld id="{F7021451-1387-4CA6-816F-3879F97B5CBC}" type="slidenum">
               <a:rPr lang="en-US"/>
               <a:t>10</a:t>
+            </a:fld>
+            <a:endParaRPr lang="en-US"/>
+          </a:p>
+        </p:txBody>
+      </p:sp>
+    </p:spTree>
+    <p:extLst>
+      <p:ext uri="{BB962C8B-B14F-4D97-AF65-F5344CB8AC3E}">
+        <p14:creationId xmlns:p14="http://schemas.microsoft.com/office/powerpoint/2010/main" val="1024086991"/>
+      </p:ext>
+    </p:extLst>
+  </p:cSld>
+  <p:clrMapOvr>
+    <a:masterClrMapping/>
+  </p:clrMapOvr>
+</p:notes>
+</file>
+
+<file path=ppt/notesSlides/notesSlide11.xml><?xml version="1.0" encoding="utf-8"?>
+<p:notes xmlns:a="http://schemas.openxmlformats.org/drawingml/2006/main" xmlns:r="http://schemas.openxmlformats.org/officeDocument/2006/relationships" xmlns:p="http://schemas.openxmlformats.org/presentationml/2006/main">
+  <p:cSld>
+    <p:spTree>
+      <p:nvGrpSpPr>
+        <p:cNvPr id="1" name=""/>
+        <p:cNvGrpSpPr/>
+        <p:nvPr/>
+      </p:nvGrpSpPr>
+      <p:grpSpPr>
+        <a:xfrm>
+          <a:off x="0" y="0"/>
+          <a:ext cx="0" cy="0"/>
+          <a:chOff x="0" y="0"/>
+          <a:chExt cx="0" cy="0"/>
+        </a:xfrm>
+      </p:grpSpPr>
+      <p:sp>
+        <p:nvSpPr>
+          <p:cNvPr id="2" name="Slide Image Placeholder 1"/>
+          <p:cNvSpPr>
+            <a:spLocks noGrp="1" noRot="1" noChangeAspect="1"/>
+          </p:cNvSpPr>
+          <p:nvPr>
+            <p:ph type="sldImg"/>
+          </p:nvPr>
+        </p:nvSpPr>
+        <p:spPr/>
+      </p:sp>
+      <p:sp>
+        <p:nvSpPr>
+          <p:cNvPr id="3" name="Notes Placeholder 2"/>
+          <p:cNvSpPr>
+            <a:spLocks noGrp="1"/>
+          </p:cNvSpPr>
+          <p:nvPr>
+            <p:ph type="body" idx="1"/>
+          </p:nvPr>
+        </p:nvSpPr>
+        <p:spPr/>
+        <p:txBody>
+          <a:bodyPr/>
+          <a:lstStyle/>
+          <a:p>
+            <a:r>
+              <a:rPr lang="en-US" dirty="0"/>
+              <a:t>End on silence for a beat before questions.</a:t>
+            </a:r>
+            <a:endParaRPr lang="en-US" dirty="0"/>
+          </a:p>
+        </p:txBody>
+      </p:sp>
+      <p:sp>
+        <p:nvSpPr>
+          <p:cNvPr id="4" name="Slide Number Placeholder 3"/>
+          <p:cNvSpPr>
+            <a:spLocks noGrp="1"/>
+          </p:cNvSpPr>
+          <p:nvPr>
+            <p:ph type="sldNum" sz="quarter" idx="10"/>
+          </p:nvPr>
+        </p:nvSpPr>
+        <p:spPr/>
+        <p:txBody>
+          <a:bodyPr/>
+          <a:lstStyle/>
+          <a:p>
+            <a:fld id="{F7021451-1387-4CA6-816F-3879F97B5CBC}" type="slidenum">
+              <a:rPr lang="en-US"/>
+              <a:t>11</a:t>
             </a:fld>
             <a:endParaRPr lang="en-US"/>
           </a:p>
@@ -775,7 +864,7 @@
           <a:p>
             <a:r>
               <a:rPr lang="en-US" dirty="0"/>
-              <a:t>Point at the three chips as you say 'exactly three answers.' Don't over-explain -- the chips do the work.</a:t>
+              <a:t>Say plainly what it physically is before you get to the three words -- a mic against the chest, an answer in seconds. Then point at the three chips.</a:t>
             </a:r>
             <a:endParaRPr lang="en-US" dirty="0"/>
           </a:p>
@@ -863,7 +952,7 @@
           <a:p>
             <a:r>
               <a:rPr lang="en-US" dirty="0"/>
-              <a:t>Switch to the phone here if the connection holds. If the mic stalls, tap the built-in sample-reading link instead of fighting it live.</a:t>
+              <a:t>Move through these four fast -- point, don't read every word. The point is 'no guessing,' said plainly at step 3.</a:t>
             </a:r>
             <a:endParaRPr lang="en-US" dirty="0"/>
           </a:p>
@@ -951,7 +1040,7 @@
           <a:p>
             <a:r>
               <a:rPr lang="en-US" dirty="0"/>
-              <a:t>Let the number sit on screen for a beat before you talk. This is the slide that separates you from every other demo -- say the last line with real confidence, slowly.</a:t>
+              <a:t>Switch to the phone here if the connection holds. If the mic stalls, tap the built-in sample-reading link instead of fighting it live.</a:t>
             </a:r>
             <a:endParaRPr lang="en-US" dirty="0"/>
           </a:p>
@@ -1039,7 +1128,7 @@
           <a:p>
             <a:r>
               <a:rPr lang="en-US" dirty="0"/>
-              <a:t>Say 'same brain' and gesture at all four -- the point is that it's one system, not four. Don't explain how it works under the hood.</a:t>
+              <a:t>Let the number sit on screen for a beat before you talk. This is the slide that separates you from every other demo -- say the last line with real confidence, slowly.</a:t>
             </a:r>
             <a:endParaRPr lang="en-US" dirty="0"/>
           </a:p>
@@ -1127,7 +1216,7 @@
           <a:p>
             <a:r>
               <a:rPr lang="en-US" dirty="0"/>
-              <a:t>The regulatory line at the bottom is the one most teams won't have -- say it plainly, don't rush it.</a:t>
+              <a:t>Say 'same brain' and gesture at all four -- the point is that it's one system, not four. Don't explain how it works under the hood.</a:t>
             </a:r>
             <a:endParaRPr lang="en-US" dirty="0"/>
           </a:p>
@@ -1215,7 +1304,7 @@
           <a:p>
             <a:r>
               <a:rPr lang="en-US" dirty="0"/>
-              <a:t>This is the plan, say that plainly -- judges don't expect market-tested pricing from a hackathon team.</a:t>
+              <a:t>The regulatory line at the bottom is the one most teams won't have -- say it plainly, don't rush it.</a:t>
             </a:r>
             <a:endParaRPr lang="en-US" dirty="0"/>
           </a:p>
@@ -1303,7 +1392,7 @@
           <a:p>
             <a:r>
               <a:rPr lang="en-US" dirty="0"/>
-              <a:t>Ten seconds, no more. Say it with momentum, not apology.</a:t>
+              <a:t>This is the plan, say that plainly -- judges don't expect market-tested pricing from a hackathon team.</a:t>
             </a:r>
             <a:endParaRPr lang="en-US" dirty="0"/>
           </a:p>
@@ -1861,6 +1950,452 @@
       </p:grpSpPr>
       <p:sp>
         <p:nvSpPr>
+          <p:cNvPr id="2" name="Text 0"/>
+          <p:cNvSpPr/>
+          <p:nvPr/>
+        </p:nvSpPr>
+        <p:spPr>
+          <a:xfrm>
+            <a:off x="868680" y="777240"/>
+            <a:ext cx="7315200" cy="292608"/>
+          </a:xfrm>
+          <a:prstGeom prst="rect">
+            <a:avLst/>
+          </a:prstGeom>
+          <a:noFill/>
+          <a:ln/>
+        </p:spPr>
+        <p:txBody>
+          <a:bodyPr wrap="square" lIns="0" tIns="0" rIns="0" bIns="0" rtlCol="0" anchor="ctr"/>
+          <a:lstStyle/>
+          <a:p>
+            <a:pPr algn="l" indent="0" marL="0">
+              <a:buNone/>
+            </a:pPr>
+            <a:r>
+              <a:rPr lang="en-US" sz="1200" b="1" spc="220" kern="0" dirty="0">
+                <a:solidFill>
+                  <a:srgbClr val="9AA0A8"/>
+                </a:solidFill>
+                <a:latin typeface="Courier New" pitchFamily="34" charset="0"/>
+                <a:ea typeface="Courier New" pitchFamily="34" charset="-122"/>
+                <a:cs typeface="Courier New" pitchFamily="34" charset="-120"/>
+              </a:rPr>
+              <a:t>WHERE THIS GOES NEXT</a:t>
+            </a:r>
+            <a:endParaRPr lang="en-US" sz="1200" dirty="0"/>
+          </a:p>
+        </p:txBody>
+      </p:sp>
+      <p:sp>
+        <p:nvSpPr>
+          <p:cNvPr id="3" name="Text 1"/>
+          <p:cNvSpPr/>
+          <p:nvPr/>
+        </p:nvSpPr>
+        <p:spPr>
+          <a:xfrm>
+            <a:off x="868680" y="1371600"/>
+            <a:ext cx="9601200" cy="1463040"/>
+          </a:xfrm>
+          <a:prstGeom prst="rect">
+            <a:avLst/>
+          </a:prstGeom>
+          <a:noFill/>
+          <a:ln/>
+        </p:spPr>
+        <p:txBody>
+          <a:bodyPr wrap="square" lIns="0" tIns="0" rIns="0" bIns="0" rtlCol="0" anchor="t"/>
+          <a:lstStyle/>
+          <a:p>
+            <a:pPr indent="0" marL="0">
+              <a:buNone/>
+            </a:pPr>
+            <a:r>
+              <a:rPr lang="en-US" sz="3600" dirty="0">
+                <a:solidFill>
+                  <a:srgbClr val="EDEEF0"/>
+                </a:solidFill>
+                <a:latin typeface="Cambria" pitchFamily="34" charset="0"/>
+                <a:ea typeface="Cambria" pitchFamily="34" charset="-122"/>
+                <a:cs typeface="Cambria" pitchFamily="34" charset="-120"/>
+              </a:rPr>
+              <a:t>Two real steps.</a:t>
+            </a:r>
+            <a:endParaRPr lang="en-US" sz="3600" dirty="0"/>
+          </a:p>
+          <a:p>
+            <a:pPr indent="0" marL="0">
+              <a:buNone/>
+            </a:pPr>
+            <a:r>
+              <a:rPr lang="en-US" sz="3600" dirty="0">
+                <a:solidFill>
+                  <a:srgbClr val="EDEEF0"/>
+                </a:solidFill>
+                <a:latin typeface="Cambria" pitchFamily="34" charset="0"/>
+                <a:ea typeface="Cambria" pitchFamily="34" charset="-122"/>
+                <a:cs typeface="Cambria" pitchFamily="34" charset="-120"/>
+              </a:rPr>
+              <a:t>Not a hundred maybes.</a:t>
+            </a:r>
+            <a:endParaRPr lang="en-US" sz="3600" dirty="0"/>
+          </a:p>
+        </p:txBody>
+      </p:sp>
+      <p:sp>
+        <p:nvSpPr>
+          <p:cNvPr id="4" name="Text 2"/>
+          <p:cNvSpPr/>
+          <p:nvPr/>
+        </p:nvSpPr>
+        <p:spPr>
+          <a:xfrm>
+            <a:off x="868680" y="3246120"/>
+            <a:ext cx="1005840" cy="914400"/>
+          </a:xfrm>
+          <a:prstGeom prst="rect">
+            <a:avLst/>
+          </a:prstGeom>
+          <a:noFill/>
+          <a:ln/>
+        </p:spPr>
+        <p:txBody>
+          <a:bodyPr wrap="square" lIns="0" tIns="0" rIns="0" bIns="0" rtlCol="0" anchor="ctr"/>
+          <a:lstStyle/>
+          <a:p>
+            <a:pPr indent="0" marL="0">
+              <a:buNone/>
+            </a:pPr>
+            <a:r>
+              <a:rPr lang="en-US" sz="4000" dirty="0">
+                <a:solidFill>
+                  <a:srgbClr val="FF5A2C"/>
+                </a:solidFill>
+                <a:latin typeface="Cambria" pitchFamily="34" charset="0"/>
+                <a:ea typeface="Cambria" pitchFamily="34" charset="-122"/>
+                <a:cs typeface="Cambria" pitchFamily="34" charset="-120"/>
+              </a:rPr>
+              <a:t>01</a:t>
+            </a:r>
+            <a:endParaRPr lang="en-US" sz="4000" dirty="0"/>
+          </a:p>
+        </p:txBody>
+      </p:sp>
+      <p:sp>
+        <p:nvSpPr>
+          <p:cNvPr id="5" name="Text 3"/>
+          <p:cNvSpPr/>
+          <p:nvPr/>
+        </p:nvSpPr>
+        <p:spPr>
+          <a:xfrm>
+            <a:off x="1920240" y="3246120"/>
+            <a:ext cx="9326880" cy="411480"/>
+          </a:xfrm>
+          <a:prstGeom prst="rect">
+            <a:avLst/>
+          </a:prstGeom>
+          <a:noFill/>
+          <a:ln/>
+        </p:spPr>
+        <p:txBody>
+          <a:bodyPr wrap="square" lIns="0" tIns="0" rIns="0" bIns="0" rtlCol="0" anchor="ctr"/>
+          <a:lstStyle/>
+          <a:p>
+            <a:pPr indent="0" marL="0">
+              <a:buNone/>
+            </a:pPr>
+            <a:r>
+              <a:rPr lang="en-US" sz="1500" b="1" dirty="0">
+                <a:solidFill>
+                  <a:srgbClr val="EDEEF0"/>
+                </a:solidFill>
+                <a:latin typeface="Courier New" pitchFamily="34" charset="0"/>
+                <a:ea typeface="Courier New" pitchFamily="34" charset="-122"/>
+                <a:cs typeface="Courier New" pitchFamily="34" charset="-120"/>
+              </a:rPr>
+              <a:t>Test it against real, labeled medical recordings</a:t>
+            </a:r>
+            <a:endParaRPr lang="en-US" sz="1500" dirty="0"/>
+          </a:p>
+        </p:txBody>
+      </p:sp>
+      <p:sp>
+        <p:nvSpPr>
+          <p:cNvPr id="6" name="Text 4"/>
+          <p:cNvSpPr/>
+          <p:nvPr/>
+        </p:nvSpPr>
+        <p:spPr>
+          <a:xfrm>
+            <a:off x="1920240" y="3666744"/>
+            <a:ext cx="9326880" cy="457200"/>
+          </a:xfrm>
+          <a:prstGeom prst="rect">
+            <a:avLst/>
+          </a:prstGeom>
+          <a:noFill/>
+          <a:ln/>
+        </p:spPr>
+        <p:txBody>
+          <a:bodyPr wrap="square" lIns="0" tIns="0" rIns="0" bIns="0" rtlCol="0" anchor="t"/>
+          <a:lstStyle/>
+          <a:p>
+            <a:pPr indent="0" marL="0">
+              <a:buNone/>
+            </a:pPr>
+            <a:r>
+              <a:rPr lang="en-US" sz="1300" dirty="0">
+                <a:solidFill>
+                  <a:srgbClr val="9AA0A8"/>
+                </a:solidFill>
+                <a:latin typeface="Calibri" pitchFamily="34" charset="0"/>
+                <a:ea typeface="Calibri" pitchFamily="34" charset="-122"/>
+                <a:cs typeface="Calibri" pitchFamily="34" charset="-120"/>
+              </a:rPr>
+              <a:t>We're ready for this — we just couldn't reach the data this weekend.</a:t>
+            </a:r>
+            <a:endParaRPr lang="en-US" sz="1300" dirty="0"/>
+          </a:p>
+        </p:txBody>
+      </p:sp>
+      <p:sp>
+        <p:nvSpPr>
+          <p:cNvPr id="7" name="Text 5"/>
+          <p:cNvSpPr/>
+          <p:nvPr/>
+        </p:nvSpPr>
+        <p:spPr>
+          <a:xfrm>
+            <a:off x="868680" y="4617720"/>
+            <a:ext cx="1005840" cy="914400"/>
+          </a:xfrm>
+          <a:prstGeom prst="rect">
+            <a:avLst/>
+          </a:prstGeom>
+          <a:noFill/>
+          <a:ln/>
+        </p:spPr>
+        <p:txBody>
+          <a:bodyPr wrap="square" lIns="0" tIns="0" rIns="0" bIns="0" rtlCol="0" anchor="ctr"/>
+          <a:lstStyle/>
+          <a:p>
+            <a:pPr indent="0" marL="0">
+              <a:buNone/>
+            </a:pPr>
+            <a:r>
+              <a:rPr lang="en-US" sz="4000" dirty="0">
+                <a:solidFill>
+                  <a:srgbClr val="FF5A2C"/>
+                </a:solidFill>
+                <a:latin typeface="Cambria" pitchFamily="34" charset="0"/>
+                <a:ea typeface="Cambria" pitchFamily="34" charset="-122"/>
+                <a:cs typeface="Cambria" pitchFamily="34" charset="-120"/>
+              </a:rPr>
+              <a:t>02</a:t>
+            </a:r>
+            <a:endParaRPr lang="en-US" sz="4000" dirty="0"/>
+          </a:p>
+        </p:txBody>
+      </p:sp>
+      <p:sp>
+        <p:nvSpPr>
+          <p:cNvPr id="8" name="Text 6"/>
+          <p:cNvSpPr/>
+          <p:nvPr/>
+        </p:nvSpPr>
+        <p:spPr>
+          <a:xfrm>
+            <a:off x="1920240" y="4617720"/>
+            <a:ext cx="9326880" cy="411480"/>
+          </a:xfrm>
+          <a:prstGeom prst="rect">
+            <a:avLst/>
+          </a:prstGeom>
+          <a:noFill/>
+          <a:ln/>
+        </p:spPr>
+        <p:txBody>
+          <a:bodyPr wrap="square" lIns="0" tIns="0" rIns="0" bIns="0" rtlCol="0" anchor="ctr"/>
+          <a:lstStyle/>
+          <a:p>
+            <a:pPr indent="0" marL="0">
+              <a:buNone/>
+            </a:pPr>
+            <a:r>
+              <a:rPr lang="en-US" sz="1500" b="1" dirty="0">
+                <a:solidFill>
+                  <a:srgbClr val="EDEEF0"/>
+                </a:solidFill>
+                <a:latin typeface="Courier New" pitchFamily="34" charset="0"/>
+                <a:ea typeface="Courier New" pitchFamily="34" charset="-122"/>
+                <a:cs typeface="Courier New" pitchFamily="34" charset="-120"/>
+              </a:rPr>
+              <a:t>Test the microphone against real skin contact</a:t>
+            </a:r>
+            <a:endParaRPr lang="en-US" sz="1500" dirty="0"/>
+          </a:p>
+        </p:txBody>
+      </p:sp>
+      <p:sp>
+        <p:nvSpPr>
+          <p:cNvPr id="9" name="Text 7"/>
+          <p:cNvSpPr/>
+          <p:nvPr/>
+        </p:nvSpPr>
+        <p:spPr>
+          <a:xfrm>
+            <a:off x="1920240" y="5038344"/>
+            <a:ext cx="9326880" cy="457200"/>
+          </a:xfrm>
+          <a:prstGeom prst="rect">
+            <a:avLst/>
+          </a:prstGeom>
+          <a:noFill/>
+          <a:ln/>
+        </p:spPr>
+        <p:txBody>
+          <a:bodyPr wrap="square" lIns="0" tIns="0" rIns="0" bIns="0" rtlCol="0" anchor="t"/>
+          <a:lstStyle/>
+          <a:p>
+            <a:pPr indent="0" marL="0">
+              <a:buNone/>
+            </a:pPr>
+            <a:r>
+              <a:rPr lang="en-US" sz="1300" dirty="0">
+                <a:solidFill>
+                  <a:srgbClr val="9AA0A8"/>
+                </a:solidFill>
+                <a:latin typeface="Calibri" pitchFamily="34" charset="0"/>
+                <a:ea typeface="Calibri" pitchFamily="34" charset="-122"/>
+                <a:cs typeface="Calibri" pitchFamily="34" charset="-120"/>
+              </a:rPr>
+              <a:t>The one honest unknown left. Flagged, not hidden.</a:t>
+            </a:r>
+            <a:endParaRPr lang="en-US" sz="1300" dirty="0"/>
+          </a:p>
+        </p:txBody>
+      </p:sp>
+      <p:sp>
+        <p:nvSpPr>
+          <p:cNvPr id="10" name="Text 8"/>
+          <p:cNvSpPr/>
+          <p:nvPr/>
+        </p:nvSpPr>
+        <p:spPr>
+          <a:xfrm>
+            <a:off x="502920" y="6400800"/>
+            <a:ext cx="1828800" cy="274320"/>
+          </a:xfrm>
+          <a:prstGeom prst="rect">
+            <a:avLst/>
+          </a:prstGeom>
+          <a:noFill/>
+          <a:ln/>
+        </p:spPr>
+        <p:txBody>
+          <a:bodyPr wrap="square" lIns="0" tIns="0" rIns="0" bIns="0" rtlCol="0" anchor="ctr"/>
+          <a:lstStyle/>
+          <a:p>
+            <a:pPr indent="0" marL="0">
+              <a:buNone/>
+            </a:pPr>
+            <a:r>
+              <a:rPr lang="en-US" sz="900" spc="200" kern="0" dirty="0">
+                <a:solidFill>
+                  <a:srgbClr val="9AA0A8"/>
+                </a:solidFill>
+                <a:latin typeface="Courier New" pitchFamily="34" charset="0"/>
+                <a:ea typeface="Courier New" pitchFamily="34" charset="-122"/>
+                <a:cs typeface="Courier New" pitchFamily="34" charset="-120"/>
+              </a:rPr>
+              <a:t>PULSO</a:t>
+            </a:r>
+            <a:endParaRPr lang="en-US" sz="900" dirty="0"/>
+          </a:p>
+        </p:txBody>
+      </p:sp>
+      <p:sp>
+        <p:nvSpPr>
+          <p:cNvPr id="11" name="Text 9"/>
+          <p:cNvSpPr/>
+          <p:nvPr/>
+        </p:nvSpPr>
+        <p:spPr>
+          <a:xfrm>
+            <a:off x="11185855" y="6400800"/>
+            <a:ext cx="548640" cy="274320"/>
+          </a:xfrm>
+          <a:prstGeom prst="rect">
+            <a:avLst/>
+          </a:prstGeom>
+          <a:noFill/>
+          <a:ln/>
+        </p:spPr>
+        <p:txBody>
+          <a:bodyPr wrap="square" lIns="0" tIns="0" rIns="0" bIns="0" rtlCol="0" anchor="ctr"/>
+          <a:lstStyle/>
+          <a:p>
+            <a:pPr algn="r" indent="0" marL="0">
+              <a:buNone/>
+            </a:pPr>
+            <a:r>
+              <a:rPr lang="en-US" sz="900" dirty="0">
+                <a:solidFill>
+                  <a:srgbClr val="9AA0A8"/>
+                </a:solidFill>
+                <a:latin typeface="Courier New" pitchFamily="34" charset="0"/>
+                <a:ea typeface="Courier New" pitchFamily="34" charset="-122"/>
+                <a:cs typeface="Courier New" pitchFamily="34" charset="-120"/>
+              </a:rPr>
+              <a:t>10</a:t>
+            </a:r>
+            <a:endParaRPr lang="en-US" sz="900" dirty="0"/>
+          </a:p>
+        </p:txBody>
+      </p:sp>
+    </p:spTree>
+  </p:cSld>
+  <p:clrMapOvr>
+    <a:masterClrMapping/>
+  </p:clrMapOvr>
+</p:sld>
+</file>
+
+<file path=ppt/slides/slide11.xml><?xml version="1.0" encoding="utf-8"?>
+<p:sld xmlns:a="http://schemas.openxmlformats.org/drawingml/2006/main" xmlns:r="http://schemas.openxmlformats.org/officeDocument/2006/relationships" xmlns:p="http://schemas.openxmlformats.org/presentationml/2006/main">
+  <p:cSld name="Slide 11">
+    <p:bg>
+      <p:bgPr>
+        <a:blipFill dpi="0" rotWithShape="1">
+          <a:blip r:embed="rId1">
+            <a:lum/>
+          </a:blip>
+          <a:srcRect/>
+          <a:stretch>
+            <a:fillRect/>
+          </a:stretch>
+        </a:blipFill>
+        <a:effectLst/>
+      </p:bgPr>
+    </p:bg>
+    <p:spTree>
+      <p:nvGrpSpPr>
+        <p:cNvPr id="1" name=""/>
+        <p:cNvGrpSpPr/>
+        <p:nvPr/>
+      </p:nvGrpSpPr>
+      <p:grpSpPr>
+        <a:xfrm>
+          <a:off x="0" y="0"/>
+          <a:ext cx="0" cy="0"/>
+          <a:chOff x="0" y="0"/>
+          <a:chExt cx="0" cy="0"/>
+        </a:xfrm>
+      </p:grpSpPr>
+      <p:sp>
+        <p:nvSpPr>
           <p:cNvPr id="2" name="Shape 0"/>
           <p:cNvSpPr/>
           <p:nvPr/>
@@ -2424,7 +2959,7 @@
                 <a:ea typeface="Courier New" pitchFamily="34" charset="-122"/>
                 <a:cs typeface="Courier New" pitchFamily="34" charset="-120"/>
               </a:rPr>
-              <a:t>WHAT PULSO DOES</a:t>
+              <a:t>THE SOLUTION</a:t>
             </a:r>
             <a:endParaRPr lang="en-US" sz="1200" dirty="0"/>
           </a:p>
@@ -2439,7 +2974,7 @@
         <p:spPr>
           <a:xfrm>
             <a:off x="868680" y="1188720"/>
-            <a:ext cx="10058400" cy="1463040"/>
+            <a:ext cx="10332720" cy="1554480"/>
           </a:xfrm>
           <a:prstGeom prst="rect">
             <a:avLst/>
@@ -2455,7 +2990,7 @@
               <a:buNone/>
             </a:pPr>
             <a:r>
-              <a:rPr lang="en-US" sz="4000" dirty="0">
+              <a:rPr lang="en-US" sz="3400" dirty="0">
                 <a:solidFill>
                   <a:srgbClr val="141619"/>
                 </a:solidFill>
@@ -2463,16 +2998,16 @@
                 <a:ea typeface="Cambria" pitchFamily="34" charset="-122"/>
                 <a:cs typeface="Cambria" pitchFamily="34" charset="-120"/>
               </a:rPr>
-              <a:t>One of exactly three answers.</a:t>
-            </a:r>
-            <a:endParaRPr lang="en-US" sz="4000" dirty="0"/>
-          </a:p>
-          <a:p>
-            <a:pPr indent="0" marL="0">
-              <a:buNone/>
-            </a:pPr>
-            <a:r>
-              <a:rPr lang="en-US" sz="4000" dirty="0">
+              <a:t>A low-cost digital stethoscope.</a:t>
+            </a:r>
+            <a:endParaRPr lang="en-US" sz="3400" dirty="0"/>
+          </a:p>
+          <a:p>
+            <a:pPr indent="0" marL="0">
+              <a:buNone/>
+            </a:pPr>
+            <a:r>
+              <a:rPr lang="en-US" sz="3400" dirty="0">
                 <a:solidFill>
                   <a:srgbClr val="141619"/>
                 </a:solidFill>
@@ -2480,21 +3015,63 @@
                 <a:ea typeface="Cambria" pitchFamily="34" charset="-122"/>
                 <a:cs typeface="Cambria" pitchFamily="34" charset="-120"/>
               </a:rPr>
-              <a:t>Never a fourth.</a:t>
-            </a:r>
-            <a:endParaRPr lang="en-US" sz="4000" dirty="0"/>
-          </a:p>
-        </p:txBody>
-      </p:sp>
-      <p:sp>
-        <p:nvSpPr>
-          <p:cNvPr id="4" name="Shape 2"/>
-          <p:cNvSpPr/>
-          <p:nvPr/>
-        </p:nvSpPr>
-        <p:spPr>
-          <a:xfrm>
-            <a:off x="868680" y="3017520"/>
+              <a:t>One honest answer, every time.</a:t>
+            </a:r>
+            <a:endParaRPr lang="en-US" sz="3400" dirty="0"/>
+          </a:p>
+        </p:txBody>
+      </p:sp>
+      <p:sp>
+        <p:nvSpPr>
+          <p:cNvPr id="4" name="Text 2"/>
+          <p:cNvSpPr/>
+          <p:nvPr/>
+        </p:nvSpPr>
+        <p:spPr>
+          <a:xfrm>
+            <a:off x="868680" y="2514600"/>
+            <a:ext cx="10241280" cy="1005840"/>
+          </a:xfrm>
+          <a:prstGeom prst="rect">
+            <a:avLst/>
+          </a:prstGeom>
+          <a:noFill/>
+          <a:ln/>
+        </p:spPr>
+        <p:txBody>
+          <a:bodyPr wrap="square" lIns="0" tIns="0" rIns="0" bIns="0" rtlCol="0" anchor="ctr"/>
+          <a:lstStyle/>
+          <a:p>
+            <a:pPr indent="0" marL="0">
+              <a:lnSpc>
+                <a:spcPct val="135000"/>
+              </a:lnSpc>
+              <a:buNone/>
+            </a:pPr>
+            <a:r>
+              <a:rPr lang="en-US" sz="1550" dirty="0">
+                <a:solidFill>
+                  <a:srgbClr val="5B6068"/>
+                </a:solidFill>
+                <a:latin typeface="Calibri" pitchFamily="34" charset="0"/>
+                <a:ea typeface="Calibri" pitchFamily="34" charset="-122"/>
+                <a:cs typeface="Calibri" pitchFamily="34" charset="-120"/>
+              </a:rPr>
+              <a:t>A small contact microphone listens to the heartbeat through the chest. Pulso analyzes it in seconds and gives exactly one of three answers — never a guess dressed up as a diagnosis.</a:t>
+            </a:r>
+            <a:endParaRPr lang="en-US" sz="1550" dirty="0"/>
+          </a:p>
+        </p:txBody>
+      </p:sp>
+      <p:sp>
+        <p:nvSpPr>
+          <p:cNvPr id="5" name="Shape 3"/>
+          <p:cNvSpPr/>
+          <p:nvPr/>
+        </p:nvSpPr>
+        <p:spPr>
+          <a:xfrm>
+            <a:off x="868680" y="3794760"/>
             <a:ext cx="3017520" cy="438912"/>
           </a:xfrm>
           <a:prstGeom prst="rect">
@@ -2513,13 +3090,13 @@
       </p:sp>
       <p:sp>
         <p:nvSpPr>
-          <p:cNvPr id="5" name="Text 3"/>
-          <p:cNvSpPr/>
-          <p:nvPr/>
-        </p:nvSpPr>
-        <p:spPr>
-          <a:xfrm>
-            <a:off x="868680" y="3017520"/>
+          <p:cNvPr id="6" name="Text 4"/>
+          <p:cNvSpPr/>
+          <p:nvPr/>
+        </p:nvSpPr>
+        <p:spPr>
+          <a:xfrm>
+            <a:off x="868680" y="3794760"/>
             <a:ext cx="3017520" cy="438912"/>
           </a:xfrm>
           <a:prstGeom prst="rect">
@@ -2552,13 +3129,13 @@
       </p:sp>
       <p:sp>
         <p:nvSpPr>
-          <p:cNvPr id="6" name="Shape 4"/>
-          <p:cNvSpPr/>
-          <p:nvPr/>
-        </p:nvSpPr>
-        <p:spPr>
-          <a:xfrm>
-            <a:off x="4023360" y="3017520"/>
+          <p:cNvPr id="7" name="Shape 5"/>
+          <p:cNvSpPr/>
+          <p:nvPr/>
+        </p:nvSpPr>
+        <p:spPr>
+          <a:xfrm>
+            <a:off x="4023360" y="3794760"/>
             <a:ext cx="3474720" cy="438912"/>
           </a:xfrm>
           <a:prstGeom prst="rect">
@@ -2577,13 +3154,13 @@
       </p:sp>
       <p:sp>
         <p:nvSpPr>
-          <p:cNvPr id="7" name="Text 5"/>
-          <p:cNvSpPr/>
-          <p:nvPr/>
-        </p:nvSpPr>
-        <p:spPr>
-          <a:xfrm>
-            <a:off x="4023360" y="3017520"/>
+          <p:cNvPr id="8" name="Text 6"/>
+          <p:cNvSpPr/>
+          <p:nvPr/>
+        </p:nvSpPr>
+        <p:spPr>
+          <a:xfrm>
+            <a:off x="4023360" y="3794760"/>
             <a:ext cx="3474720" cy="438912"/>
           </a:xfrm>
           <a:prstGeom prst="rect">
@@ -2616,13 +3193,13 @@
       </p:sp>
       <p:sp>
         <p:nvSpPr>
-          <p:cNvPr id="8" name="Shape 6"/>
-          <p:cNvSpPr/>
-          <p:nvPr/>
-        </p:nvSpPr>
-        <p:spPr>
-          <a:xfrm>
-            <a:off x="7635240" y="3017520"/>
+          <p:cNvPr id="9" name="Shape 7"/>
+          <p:cNvSpPr/>
+          <p:nvPr/>
+        </p:nvSpPr>
+        <p:spPr>
+          <a:xfrm>
+            <a:off x="7635240" y="3794760"/>
             <a:ext cx="3474720" cy="438912"/>
           </a:xfrm>
           <a:prstGeom prst="rect">
@@ -2641,13 +3218,13 @@
       </p:sp>
       <p:sp>
         <p:nvSpPr>
-          <p:cNvPr id="9" name="Text 7"/>
-          <p:cNvSpPr/>
-          <p:nvPr/>
-        </p:nvSpPr>
-        <p:spPr>
-          <a:xfrm>
-            <a:off x="7635240" y="3017520"/>
+          <p:cNvPr id="10" name="Text 8"/>
+          <p:cNvSpPr/>
+          <p:nvPr/>
+        </p:nvSpPr>
+        <p:spPr>
+          <a:xfrm>
+            <a:off x="7635240" y="3794760"/>
             <a:ext cx="3474720" cy="438912"/>
           </a:xfrm>
           <a:prstGeom prst="rect">
@@ -2680,14 +3257,14 @@
       </p:sp>
       <p:sp>
         <p:nvSpPr>
-          <p:cNvPr id="10" name="Text 8"/>
-          <p:cNvSpPr/>
-          <p:nvPr/>
-        </p:nvSpPr>
-        <p:spPr>
-          <a:xfrm>
-            <a:off x="868680" y="4206240"/>
-            <a:ext cx="10241280" cy="1280160"/>
+          <p:cNvPr id="11" name="Text 9"/>
+          <p:cNvSpPr/>
+          <p:nvPr/>
+        </p:nvSpPr>
+        <p:spPr>
+          <a:xfrm>
+            <a:off x="868680" y="4937760"/>
+            <a:ext cx="10241280" cy="1005840"/>
           </a:xfrm>
           <a:prstGeom prst="rect">
             <a:avLst/>
@@ -2706,9 +3283,9 @@
               <a:buNone/>
             </a:pPr>
             <a:r>
-              <a:rPr lang="en-US" sz="2400" i="1" dirty="0">
-                <a:solidFill>
-                  <a:srgbClr val="141619"/>
+              <a:rPr lang="en-US" sz="1900" i="1" dirty="0">
+                <a:solidFill>
+                  <a:srgbClr val="D6360F"/>
                 </a:solidFill>
                 <a:latin typeface="Cambria" pitchFamily="34" charset="0"/>
                 <a:ea typeface="Cambria" pitchFamily="34" charset="-122"/>
@@ -2716,7 +3293,7 @@
               </a:rPr>
               <a:t>A wrong “you have X” from AI that's never been checked is dangerous.</a:t>
             </a:r>
-            <a:endParaRPr lang="en-US" sz="2400" dirty="0"/>
+            <a:endParaRPr lang="en-US" sz="1900" dirty="0"/>
           </a:p>
           <a:p>
             <a:pPr indent="0" marL="0">
@@ -2726,9 +3303,9 @@
               <a:buNone/>
             </a:pPr>
             <a:r>
-              <a:rPr lang="en-US" sz="2400" i="1" dirty="0">
-                <a:solidFill>
-                  <a:srgbClr val="141619"/>
+              <a:rPr lang="en-US" sz="1900" i="1" dirty="0">
+                <a:solidFill>
+                  <a:srgbClr val="D6360F"/>
                 </a:solidFill>
                 <a:latin typeface="Cambria" pitchFamily="34" charset="0"/>
                 <a:ea typeface="Cambria" pitchFamily="34" charset="-122"/>
@@ -2736,13 +3313,13 @@
               </a:rPr>
               <a:t>“Worth a second listen” is honest — and still useful.</a:t>
             </a:r>
-            <a:endParaRPr lang="en-US" sz="2400" dirty="0"/>
-          </a:p>
-        </p:txBody>
-      </p:sp>
-      <p:sp>
-        <p:nvSpPr>
-          <p:cNvPr id="11" name="Text 9"/>
+            <a:endParaRPr lang="en-US" sz="1900" dirty="0"/>
+          </a:p>
+        </p:txBody>
+      </p:sp>
+      <p:sp>
+        <p:nvSpPr>
+          <p:cNvPr id="12" name="Text 10"/>
           <p:cNvSpPr/>
           <p:nvPr/>
         </p:nvSpPr>
@@ -2781,7 +3358,7 @@
       </p:sp>
       <p:sp>
         <p:nvSpPr>
-          <p:cNvPr id="12" name="Text 10"/>
+          <p:cNvPr id="13" name="Text 11"/>
           <p:cNvSpPr/>
           <p:nvPr/>
         </p:nvSpPr>
@@ -2865,7 +3442,7 @@
         </p:nvSpPr>
         <p:spPr>
           <a:xfrm>
-            <a:off x="868680" y="548640"/>
+            <a:off x="868680" y="640080"/>
             <a:ext cx="5486400" cy="292608"/>
           </a:xfrm>
           <a:prstGeom prst="rect">
@@ -2890,7 +3467,7 @@
                 <a:ea typeface="Courier New" pitchFamily="34" charset="-122"/>
                 <a:cs typeface="Courier New" pitchFamily="34" charset="-120"/>
               </a:rPr>
-              <a:t>LIVE DEMO</a:t>
+              <a:t>HOW IT WORKS</a:t>
             </a:r>
             <a:endParaRPr lang="en-US" sz="1200" dirty="0"/>
           </a:p>
@@ -2904,24 +3481,24 @@
         </p:nvSpPr>
         <p:spPr>
           <a:xfrm>
-            <a:off x="868680" y="914400"/>
-            <a:ext cx="8229600" cy="1188720"/>
-          </a:xfrm>
-          <a:prstGeom prst="rect">
-            <a:avLst/>
-          </a:prstGeom>
-          <a:noFill/>
-          <a:ln/>
-        </p:spPr>
-        <p:txBody>
-          <a:bodyPr wrap="square" lIns="0" tIns="0" rIns="0" bIns="0" rtlCol="0" anchor="ctr"/>
-          <a:lstStyle/>
-          <a:p>
-            <a:pPr indent="0" marL="0">
-              <a:buNone/>
-            </a:pPr>
-            <a:r>
-              <a:rPr lang="en-US" sz="3200" dirty="0">
+            <a:off x="868680" y="1188720"/>
+            <a:ext cx="9601200" cy="1005840"/>
+          </a:xfrm>
+          <a:prstGeom prst="rect">
+            <a:avLst/>
+          </a:prstGeom>
+          <a:noFill/>
+          <a:ln/>
+        </p:spPr>
+        <p:txBody>
+          <a:bodyPr wrap="square" lIns="0" tIns="0" rIns="0" bIns="0" rtlCol="0" anchor="t"/>
+          <a:lstStyle/>
+          <a:p>
+            <a:pPr indent="0" marL="0">
+              <a:buNone/>
+            </a:pPr>
+            <a:r>
+              <a:rPr lang="en-US" sz="3400" dirty="0">
                 <a:solidFill>
                   <a:srgbClr val="141619"/>
                 </a:solidFill>
@@ -2929,26 +3506,9 @@
                 <a:ea typeface="Cambria" pitchFamily="34" charset="-122"/>
                 <a:cs typeface="Cambria" pitchFamily="34" charset="-120"/>
               </a:rPr>
-              <a:t>Phone mic → live triage,</a:t>
-            </a:r>
-            <a:endParaRPr lang="en-US" sz="3200" dirty="0"/>
-          </a:p>
-          <a:p>
-            <a:pPr indent="0" marL="0">
-              <a:buNone/>
-            </a:pPr>
-            <a:r>
-              <a:rPr lang="en-US" sz="3200" dirty="0">
-                <a:solidFill>
-                  <a:srgbClr val="141619"/>
-                </a:solidFill>
-                <a:latin typeface="Cambria" pitchFamily="34" charset="0"/>
-                <a:ea typeface="Cambria" pitchFamily="34" charset="-122"/>
-                <a:cs typeface="Cambria" pitchFamily="34" charset="-120"/>
-              </a:rPr>
-              <a:t>right now.</a:t>
-            </a:r>
-            <a:endParaRPr lang="en-US" sz="3200" dirty="0"/>
+              <a:t>Four steps. No guessing.</a:t>
+            </a:r>
+            <a:endParaRPr lang="en-US" sz="3400" dirty="0"/>
           </a:p>
         </p:txBody>
       </p:sp>
@@ -2960,57 +3520,8 @@
         </p:nvSpPr>
         <p:spPr>
           <a:xfrm>
-            <a:off x="868680" y="2148840"/>
-            <a:ext cx="10469880" cy="2103120"/>
-          </a:xfrm>
-          <a:prstGeom prst="rect">
-            <a:avLst/>
-          </a:prstGeom>
-          <a:solidFill>
-            <a:srgbClr val="F4F4F1"/>
-          </a:solidFill>
-          <a:ln w="12700">
-            <a:solidFill>
-              <a:srgbClr val="DCDBD5"/>
-            </a:solidFill>
-            <a:prstDash val="solid"/>
-          </a:ln>
-        </p:spPr>
-      </p:sp>
-      <p:pic>
-        <p:nvPicPr>
-          <p:cNvPr id="5" name="Image 0" descr="waveform.png">    </p:cNvPr>
-          <p:cNvPicPr>
-            <a:picLocks noChangeAspect="1"/>
-          </p:cNvPicPr>
-          <p:nvPr/>
-        </p:nvPicPr>
-        <p:blipFill>
-          <a:blip r:embed="rId2"/>
-          <a:stretch>
-            <a:fillRect/>
-          </a:stretch>
-        </p:blipFill>
-        <p:spPr>
-          <a:xfrm>
-            <a:off x="1097280" y="2286000"/>
-            <a:ext cx="10012680" cy="1828800"/>
-          </a:xfrm>
-          <a:prstGeom prst="rect">
-            <a:avLst/>
-          </a:prstGeom>
-        </p:spPr>
-      </p:pic>
-      <p:sp>
-        <p:nvSpPr>
-          <p:cNvPr id="6" name="Shape 3"/>
-          <p:cNvSpPr/>
-          <p:nvPr/>
-        </p:nvSpPr>
-        <p:spPr>
-          <a:xfrm>
-            <a:off x="868680" y="4343400"/>
-            <a:ext cx="2507742" cy="960120"/>
+            <a:off x="868680" y="2606040"/>
+            <a:ext cx="2487168" cy="3017520"/>
           </a:xfrm>
           <a:prstGeom prst="rect">
             <a:avLst/>
@@ -3020,7 +3531,7 @@
           </a:solidFill>
           <a:ln w="12700">
             <a:solidFill>
-              <a:srgbClr val="DCDBD5"/>
+              <a:srgbClr val="C3C2BA"/>
             </a:solidFill>
             <a:prstDash val="solid"/>
           </a:ln>
@@ -3028,77 +3539,77 @@
       </p:sp>
       <p:sp>
         <p:nvSpPr>
-          <p:cNvPr id="7" name="Text 4"/>
-          <p:cNvSpPr/>
-          <p:nvPr/>
-        </p:nvSpPr>
-        <p:spPr>
-          <a:xfrm>
-            <a:off x="1014984" y="4471416"/>
-            <a:ext cx="2251710" cy="256032"/>
-          </a:xfrm>
-          <a:prstGeom prst="rect">
-            <a:avLst/>
-          </a:prstGeom>
-          <a:noFill/>
-          <a:ln/>
-        </p:spPr>
-        <p:txBody>
-          <a:bodyPr wrap="square" lIns="0" tIns="0" rIns="0" bIns="0" rtlCol="0" anchor="ctr"/>
-          <a:lstStyle/>
-          <a:p>
-            <a:pPr indent="0" marL="0">
-              <a:buNone/>
-            </a:pPr>
-            <a:r>
-              <a:rPr lang="en-US" sz="1000" b="1" spc="120" kern="0" dirty="0">
-                <a:solidFill>
-                  <a:srgbClr val="8E939A"/>
+          <p:cNvPr id="5" name="Text 3"/>
+          <p:cNvSpPr/>
+          <p:nvPr/>
+        </p:nvSpPr>
+        <p:spPr>
+          <a:xfrm>
+            <a:off x="1033272" y="2788920"/>
+            <a:ext cx="2157984" cy="365760"/>
+          </a:xfrm>
+          <a:prstGeom prst="rect">
+            <a:avLst/>
+          </a:prstGeom>
+          <a:noFill/>
+          <a:ln/>
+        </p:spPr>
+        <p:txBody>
+          <a:bodyPr wrap="square" lIns="0" tIns="0" rIns="0" bIns="0" rtlCol="0" anchor="ctr"/>
+          <a:lstStyle/>
+          <a:p>
+            <a:pPr indent="0" marL="0">
+              <a:buNone/>
+            </a:pPr>
+            <a:r>
+              <a:rPr lang="en-US" sz="1300" b="1" spc="100" kern="0" dirty="0">
+                <a:solidFill>
+                  <a:srgbClr val="D6360F"/>
                 </a:solidFill>
                 <a:latin typeface="Courier New" pitchFamily="34" charset="0"/>
                 <a:ea typeface="Courier New" pitchFamily="34" charset="-122"/>
                 <a:cs typeface="Courier New" pitchFamily="34" charset="-120"/>
               </a:rPr>
-              <a:t>HEART RATE</a:t>
-            </a:r>
-            <a:endParaRPr lang="en-US" sz="1000" dirty="0"/>
-          </a:p>
-        </p:txBody>
-      </p:sp>
-      <p:sp>
-        <p:nvSpPr>
-          <p:cNvPr id="8" name="Text 5"/>
-          <p:cNvSpPr/>
-          <p:nvPr/>
-        </p:nvSpPr>
-        <p:spPr>
-          <a:xfrm>
-            <a:off x="1014984" y="4727448"/>
-            <a:ext cx="2251710" cy="457200"/>
-          </a:xfrm>
-          <a:prstGeom prst="rect">
-            <a:avLst/>
-          </a:prstGeom>
-          <a:noFill/>
-          <a:ln/>
-        </p:spPr>
-        <p:txBody>
-          <a:bodyPr wrap="square" lIns="0" tIns="0" rIns="0" bIns="0" rtlCol="0" anchor="ctr"/>
-          <a:lstStyle/>
-          <a:p>
-            <a:pPr indent="0" marL="0">
-              <a:buNone/>
-            </a:pPr>
-            <a:r>
-              <a:rPr lang="en-US" sz="2000" b="1" dirty="0">
+              <a:t>01</a:t>
+            </a:r>
+            <a:endParaRPr lang="en-US" sz="1300" dirty="0"/>
+          </a:p>
+        </p:txBody>
+      </p:sp>
+      <p:sp>
+        <p:nvSpPr>
+          <p:cNvPr id="6" name="Text 4"/>
+          <p:cNvSpPr/>
+          <p:nvPr/>
+        </p:nvSpPr>
+        <p:spPr>
+          <a:xfrm>
+            <a:off x="1033272" y="3172968"/>
+            <a:ext cx="2157984" cy="365760"/>
+          </a:xfrm>
+          <a:prstGeom prst="rect">
+            <a:avLst/>
+          </a:prstGeom>
+          <a:noFill/>
+          <a:ln/>
+        </p:spPr>
+        <p:txBody>
+          <a:bodyPr wrap="square" lIns="0" tIns="0" rIns="0" bIns="0" rtlCol="0" anchor="ctr"/>
+          <a:lstStyle/>
+          <a:p>
+            <a:pPr indent="0" marL="0">
+              <a:buNone/>
+            </a:pPr>
+            <a:r>
+              <a:rPr lang="en-US" sz="2000" dirty="0">
                 <a:solidFill>
                   <a:srgbClr val="141619"/>
                 </a:solidFill>
-                <a:latin typeface="Courier New" pitchFamily="34" charset="0"/>
-                <a:ea typeface="Courier New" pitchFamily="34" charset="-122"/>
-                <a:cs typeface="Courier New" pitchFamily="34" charset="-120"/>
-              </a:rPr>
-              <a:t>68 BPM</a:t>
+                <a:latin typeface="Cambria" pitchFamily="34" charset="0"/>
+                <a:ea typeface="Cambria" pitchFamily="34" charset="-122"/>
+                <a:cs typeface="Cambria" pitchFamily="34" charset="-120"/>
+              </a:rPr>
+              <a:t>Listen</a:t>
             </a:r>
             <a:endParaRPr lang="en-US" sz="2000" dirty="0"/>
           </a:p>
@@ -3106,14 +3617,56 @@
       </p:sp>
       <p:sp>
         <p:nvSpPr>
-          <p:cNvPr id="9" name="Shape 6"/>
-          <p:cNvSpPr/>
-          <p:nvPr/>
-        </p:nvSpPr>
-        <p:spPr>
-          <a:xfrm>
-            <a:off x="3486150" y="4343400"/>
-            <a:ext cx="2507742" cy="960120"/>
+          <p:cNvPr id="7" name="Text 5"/>
+          <p:cNvSpPr/>
+          <p:nvPr/>
+        </p:nvSpPr>
+        <p:spPr>
+          <a:xfrm>
+            <a:off x="1033272" y="3611880"/>
+            <a:ext cx="2157984" cy="1828800"/>
+          </a:xfrm>
+          <a:prstGeom prst="rect">
+            <a:avLst/>
+          </a:prstGeom>
+          <a:noFill/>
+          <a:ln/>
+        </p:spPr>
+        <p:txBody>
+          <a:bodyPr wrap="square" lIns="0" tIns="0" rIns="0" bIns="0" rtlCol="0" anchor="t"/>
+          <a:lstStyle/>
+          <a:p>
+            <a:pPr indent="0" marL="0">
+              <a:lnSpc>
+                <a:spcPct val="130000"/>
+              </a:lnSpc>
+              <a:buNone/>
+            </a:pPr>
+            <a:r>
+              <a:rPr lang="en-US" sz="1150" dirty="0">
+                <a:solidFill>
+                  <a:srgbClr val="5B6068"/>
+                </a:solidFill>
+                <a:latin typeface="Calibri" pitchFamily="34" charset="0"/>
+                <a:ea typeface="Calibri" pitchFamily="34" charset="-122"/>
+                <a:cs typeface="Calibri" pitchFamily="34" charset="-120"/>
+              </a:rPr>
+              <a:t>A cheap microphone against the chest picks up the heartbeat — the same idea as a stethoscope, at a fraction of the cost.</a:t>
+            </a:r>
+            <a:endParaRPr lang="en-US" sz="1150" dirty="0"/>
+          </a:p>
+        </p:txBody>
+      </p:sp>
+      <p:sp>
+        <p:nvSpPr>
+          <p:cNvPr id="8" name="Shape 6"/>
+          <p:cNvSpPr/>
+          <p:nvPr/>
+        </p:nvSpPr>
+        <p:spPr>
+          <a:xfrm>
+            <a:off x="3575304" y="2606040"/>
+            <a:ext cx="2487168" cy="3017520"/>
           </a:xfrm>
           <a:prstGeom prst="rect">
             <a:avLst/>
@@ -3123,7 +3676,7 @@
           </a:solidFill>
           <a:ln w="12700">
             <a:solidFill>
-              <a:srgbClr val="DCDBD5"/>
+              <a:srgbClr val="C3C2BA"/>
             </a:solidFill>
             <a:prstDash val="solid"/>
           </a:ln>
@@ -3131,77 +3684,77 @@
       </p:sp>
       <p:sp>
         <p:nvSpPr>
-          <p:cNvPr id="10" name="Text 7"/>
-          <p:cNvSpPr/>
-          <p:nvPr/>
-        </p:nvSpPr>
-        <p:spPr>
-          <a:xfrm>
-            <a:off x="3632454" y="4471416"/>
-            <a:ext cx="2251710" cy="256032"/>
-          </a:xfrm>
-          <a:prstGeom prst="rect">
-            <a:avLst/>
-          </a:prstGeom>
-          <a:noFill/>
-          <a:ln/>
-        </p:spPr>
-        <p:txBody>
-          <a:bodyPr wrap="square" lIns="0" tIns="0" rIns="0" bIns="0" rtlCol="0" anchor="ctr"/>
-          <a:lstStyle/>
-          <a:p>
-            <a:pPr indent="0" marL="0">
-              <a:buNone/>
-            </a:pPr>
-            <a:r>
-              <a:rPr lang="en-US" sz="1000" b="1" spc="120" kern="0" dirty="0">
-                <a:solidFill>
-                  <a:srgbClr val="8E939A"/>
+          <p:cNvPr id="9" name="Text 7"/>
+          <p:cNvSpPr/>
+          <p:nvPr/>
+        </p:nvSpPr>
+        <p:spPr>
+          <a:xfrm>
+            <a:off x="3739896" y="2788920"/>
+            <a:ext cx="2157984" cy="365760"/>
+          </a:xfrm>
+          <a:prstGeom prst="rect">
+            <a:avLst/>
+          </a:prstGeom>
+          <a:noFill/>
+          <a:ln/>
+        </p:spPr>
+        <p:txBody>
+          <a:bodyPr wrap="square" lIns="0" tIns="0" rIns="0" bIns="0" rtlCol="0" anchor="ctr"/>
+          <a:lstStyle/>
+          <a:p>
+            <a:pPr indent="0" marL="0">
+              <a:buNone/>
+            </a:pPr>
+            <a:r>
+              <a:rPr lang="en-US" sz="1300" b="1" spc="100" kern="0" dirty="0">
+                <a:solidFill>
+                  <a:srgbClr val="D6360F"/>
                 </a:solidFill>
                 <a:latin typeface="Courier New" pitchFamily="34" charset="0"/>
                 <a:ea typeface="Courier New" pitchFamily="34" charset="-122"/>
                 <a:cs typeface="Courier New" pitchFamily="34" charset="-120"/>
               </a:rPr>
-              <a:t>BEATS DETECTED</a:t>
-            </a:r>
-            <a:endParaRPr lang="en-US" sz="1000" dirty="0"/>
-          </a:p>
-        </p:txBody>
-      </p:sp>
-      <p:sp>
-        <p:nvSpPr>
-          <p:cNvPr id="11" name="Text 8"/>
-          <p:cNvSpPr/>
-          <p:nvPr/>
-        </p:nvSpPr>
-        <p:spPr>
-          <a:xfrm>
-            <a:off x="3632454" y="4727448"/>
-            <a:ext cx="2251710" cy="457200"/>
-          </a:xfrm>
-          <a:prstGeom prst="rect">
-            <a:avLst/>
-          </a:prstGeom>
-          <a:noFill/>
-          <a:ln/>
-        </p:spPr>
-        <p:txBody>
-          <a:bodyPr wrap="square" lIns="0" tIns="0" rIns="0" bIns="0" rtlCol="0" anchor="ctr"/>
-          <a:lstStyle/>
-          <a:p>
-            <a:pPr indent="0" marL="0">
-              <a:buNone/>
-            </a:pPr>
-            <a:r>
-              <a:rPr lang="en-US" sz="2000" b="1" dirty="0">
+              <a:t>02</a:t>
+            </a:r>
+            <a:endParaRPr lang="en-US" sz="1300" dirty="0"/>
+          </a:p>
+        </p:txBody>
+      </p:sp>
+      <p:sp>
+        <p:nvSpPr>
+          <p:cNvPr id="10" name="Text 8"/>
+          <p:cNvSpPr/>
+          <p:nvPr/>
+        </p:nvSpPr>
+        <p:spPr>
+          <a:xfrm>
+            <a:off x="3739896" y="3172968"/>
+            <a:ext cx="2157984" cy="365760"/>
+          </a:xfrm>
+          <a:prstGeom prst="rect">
+            <a:avLst/>
+          </a:prstGeom>
+          <a:noFill/>
+          <a:ln/>
+        </p:spPr>
+        <p:txBody>
+          <a:bodyPr wrap="square" lIns="0" tIns="0" rIns="0" bIns="0" rtlCol="0" anchor="ctr"/>
+          <a:lstStyle/>
+          <a:p>
+            <a:pPr indent="0" marL="0">
+              <a:buNone/>
+            </a:pPr>
+            <a:r>
+              <a:rPr lang="en-US" sz="2000" dirty="0">
                 <a:solidFill>
                   <a:srgbClr val="141619"/>
                 </a:solidFill>
-                <a:latin typeface="Courier New" pitchFamily="34" charset="0"/>
-                <a:ea typeface="Courier New" pitchFamily="34" charset="-122"/>
-                <a:cs typeface="Courier New" pitchFamily="34" charset="-120"/>
-              </a:rPr>
-              <a:t>8</a:t>
+                <a:latin typeface="Cambria" pitchFamily="34" charset="0"/>
+                <a:ea typeface="Cambria" pitchFamily="34" charset="-122"/>
+                <a:cs typeface="Cambria" pitchFamily="34" charset="-120"/>
+              </a:rPr>
+              <a:t>Clean</a:t>
             </a:r>
             <a:endParaRPr lang="en-US" sz="2000" dirty="0"/>
           </a:p>
@@ -3209,14 +3762,56 @@
       </p:sp>
       <p:sp>
         <p:nvSpPr>
-          <p:cNvPr id="12" name="Shape 9"/>
-          <p:cNvSpPr/>
-          <p:nvPr/>
-        </p:nvSpPr>
-        <p:spPr>
-          <a:xfrm>
-            <a:off x="6103620" y="4343400"/>
-            <a:ext cx="2507742" cy="960120"/>
+          <p:cNvPr id="11" name="Text 9"/>
+          <p:cNvSpPr/>
+          <p:nvPr/>
+        </p:nvSpPr>
+        <p:spPr>
+          <a:xfrm>
+            <a:off x="3739896" y="3611880"/>
+            <a:ext cx="2157984" cy="1828800"/>
+          </a:xfrm>
+          <a:prstGeom prst="rect">
+            <a:avLst/>
+          </a:prstGeom>
+          <a:noFill/>
+          <a:ln/>
+        </p:spPr>
+        <p:txBody>
+          <a:bodyPr wrap="square" lIns="0" tIns="0" rIns="0" bIns="0" rtlCol="0" anchor="t"/>
+          <a:lstStyle/>
+          <a:p>
+            <a:pPr indent="0" marL="0">
+              <a:lnSpc>
+                <a:spcPct val="130000"/>
+              </a:lnSpc>
+              <a:buNone/>
+            </a:pPr>
+            <a:r>
+              <a:rPr lang="en-US" sz="1150" dirty="0">
+                <a:solidFill>
+                  <a:srgbClr val="5B6068"/>
+                </a:solidFill>
+                <a:latin typeface="Calibri" pitchFamily="34" charset="0"/>
+                <a:ea typeface="Calibri" pitchFamily="34" charset="-122"/>
+                <a:cs typeface="Calibri" pitchFamily="34" charset="-120"/>
+              </a:rPr>
+              <a:t>Background noise gets filtered out automatically, leaving just the heart sound behind.</a:t>
+            </a:r>
+            <a:endParaRPr lang="en-US" sz="1150" dirty="0"/>
+          </a:p>
+        </p:txBody>
+      </p:sp>
+      <p:sp>
+        <p:nvSpPr>
+          <p:cNvPr id="12" name="Shape 10"/>
+          <p:cNvSpPr/>
+          <p:nvPr/>
+        </p:nvSpPr>
+        <p:spPr>
+          <a:xfrm>
+            <a:off x="6281928" y="2606040"/>
+            <a:ext cx="2487168" cy="3017520"/>
           </a:xfrm>
           <a:prstGeom prst="rect">
             <a:avLst/>
@@ -3226,7 +3821,7 @@
           </a:solidFill>
           <a:ln w="12700">
             <a:solidFill>
-              <a:srgbClr val="DCDBD5"/>
+              <a:srgbClr val="C3C2BA"/>
             </a:solidFill>
             <a:prstDash val="solid"/>
           </a:ln>
@@ -3234,77 +3829,77 @@
       </p:sp>
       <p:sp>
         <p:nvSpPr>
-          <p:cNvPr id="13" name="Text 10"/>
-          <p:cNvSpPr/>
-          <p:nvPr/>
-        </p:nvSpPr>
-        <p:spPr>
-          <a:xfrm>
-            <a:off x="6249924" y="4471416"/>
-            <a:ext cx="2251710" cy="256032"/>
-          </a:xfrm>
-          <a:prstGeom prst="rect">
-            <a:avLst/>
-          </a:prstGeom>
-          <a:noFill/>
-          <a:ln/>
-        </p:spPr>
-        <p:txBody>
-          <a:bodyPr wrap="square" lIns="0" tIns="0" rIns="0" bIns="0" rtlCol="0" anchor="ctr"/>
-          <a:lstStyle/>
-          <a:p>
-            <a:pPr indent="0" marL="0">
-              <a:buNone/>
-            </a:pPr>
-            <a:r>
-              <a:rPr lang="en-US" sz="1000" b="1" spc="120" kern="0" dirty="0">
-                <a:solidFill>
-                  <a:srgbClr val="8E939A"/>
+          <p:cNvPr id="13" name="Text 11"/>
+          <p:cNvSpPr/>
+          <p:nvPr/>
+        </p:nvSpPr>
+        <p:spPr>
+          <a:xfrm>
+            <a:off x="6446520" y="2788920"/>
+            <a:ext cx="2157984" cy="365760"/>
+          </a:xfrm>
+          <a:prstGeom prst="rect">
+            <a:avLst/>
+          </a:prstGeom>
+          <a:noFill/>
+          <a:ln/>
+        </p:spPr>
+        <p:txBody>
+          <a:bodyPr wrap="square" lIns="0" tIns="0" rIns="0" bIns="0" rtlCol="0" anchor="ctr"/>
+          <a:lstStyle/>
+          <a:p>
+            <a:pPr indent="0" marL="0">
+              <a:buNone/>
+            </a:pPr>
+            <a:r>
+              <a:rPr lang="en-US" sz="1300" b="1" spc="100" kern="0" dirty="0">
+                <a:solidFill>
+                  <a:srgbClr val="D6360F"/>
                 </a:solidFill>
                 <a:latin typeface="Courier New" pitchFamily="34" charset="0"/>
                 <a:ea typeface="Courier New" pitchFamily="34" charset="-122"/>
                 <a:cs typeface="Courier New" pitchFamily="34" charset="-120"/>
               </a:rPr>
-              <a:t>RHYTHM</a:t>
-            </a:r>
-            <a:endParaRPr lang="en-US" sz="1000" dirty="0"/>
-          </a:p>
-        </p:txBody>
-      </p:sp>
-      <p:sp>
-        <p:nvSpPr>
-          <p:cNvPr id="14" name="Text 11"/>
-          <p:cNvSpPr/>
-          <p:nvPr/>
-        </p:nvSpPr>
-        <p:spPr>
-          <a:xfrm>
-            <a:off x="6249924" y="4727448"/>
-            <a:ext cx="2251710" cy="457200"/>
-          </a:xfrm>
-          <a:prstGeom prst="rect">
-            <a:avLst/>
-          </a:prstGeom>
-          <a:noFill/>
-          <a:ln/>
-        </p:spPr>
-        <p:txBody>
-          <a:bodyPr wrap="square" lIns="0" tIns="0" rIns="0" bIns="0" rtlCol="0" anchor="ctr"/>
-          <a:lstStyle/>
-          <a:p>
-            <a:pPr indent="0" marL="0">
-              <a:buNone/>
-            </a:pPr>
-            <a:r>
-              <a:rPr lang="en-US" sz="2000" b="1" dirty="0">
+              <a:t>03</a:t>
+            </a:r>
+            <a:endParaRPr lang="en-US" sz="1300" dirty="0"/>
+          </a:p>
+        </p:txBody>
+      </p:sp>
+      <p:sp>
+        <p:nvSpPr>
+          <p:cNvPr id="14" name="Text 12"/>
+          <p:cNvSpPr/>
+          <p:nvPr/>
+        </p:nvSpPr>
+        <p:spPr>
+          <a:xfrm>
+            <a:off x="6446520" y="3172968"/>
+            <a:ext cx="2157984" cy="365760"/>
+          </a:xfrm>
+          <a:prstGeom prst="rect">
+            <a:avLst/>
+          </a:prstGeom>
+          <a:noFill/>
+          <a:ln/>
+        </p:spPr>
+        <p:txBody>
+          <a:bodyPr wrap="square" lIns="0" tIns="0" rIns="0" bIns="0" rtlCol="0" anchor="ctr"/>
+          <a:lstStyle/>
+          <a:p>
+            <a:pPr indent="0" marL="0">
+              <a:buNone/>
+            </a:pPr>
+            <a:r>
+              <a:rPr lang="en-US" sz="2000" dirty="0">
                 <a:solidFill>
                   <a:srgbClr val="141619"/>
                 </a:solidFill>
-                <a:latin typeface="Courier New" pitchFamily="34" charset="0"/>
-                <a:ea typeface="Courier New" pitchFamily="34" charset="-122"/>
-                <a:cs typeface="Courier New" pitchFamily="34" charset="-120"/>
-              </a:rPr>
-              <a:t>Regular</a:t>
+                <a:latin typeface="Cambria" pitchFamily="34" charset="0"/>
+                <a:ea typeface="Cambria" pitchFamily="34" charset="-122"/>
+                <a:cs typeface="Cambria" pitchFamily="34" charset="-120"/>
+              </a:rPr>
+              <a:t>Find</a:t>
             </a:r>
             <a:endParaRPr lang="en-US" sz="2000" dirty="0"/>
           </a:p>
@@ -3312,14 +3907,56 @@
       </p:sp>
       <p:sp>
         <p:nvSpPr>
-          <p:cNvPr id="15" name="Shape 12"/>
-          <p:cNvSpPr/>
-          <p:nvPr/>
-        </p:nvSpPr>
-        <p:spPr>
-          <a:xfrm>
-            <a:off x="8721090" y="4343400"/>
-            <a:ext cx="2507742" cy="960120"/>
+          <p:cNvPr id="15" name="Text 13"/>
+          <p:cNvSpPr/>
+          <p:nvPr/>
+        </p:nvSpPr>
+        <p:spPr>
+          <a:xfrm>
+            <a:off x="6446520" y="3611880"/>
+            <a:ext cx="2157984" cy="1828800"/>
+          </a:xfrm>
+          <a:prstGeom prst="rect">
+            <a:avLst/>
+          </a:prstGeom>
+          <a:noFill/>
+          <a:ln/>
+        </p:spPr>
+        <p:txBody>
+          <a:bodyPr wrap="square" lIns="0" tIns="0" rIns="0" bIns="0" rtlCol="0" anchor="t"/>
+          <a:lstStyle/>
+          <a:p>
+            <a:pPr indent="0" marL="0">
+              <a:lnSpc>
+                <a:spcPct val="130000"/>
+              </a:lnSpc>
+              <a:buNone/>
+            </a:pPr>
+            <a:r>
+              <a:rPr lang="en-US" sz="1150" dirty="0">
+                <a:solidFill>
+                  <a:srgbClr val="5B6068"/>
+                </a:solidFill>
+                <a:latin typeface="Calibri" pitchFamily="34" charset="0"/>
+                <a:ea typeface="Calibri" pitchFamily="34" charset="-122"/>
+                <a:cs typeface="Calibri" pitchFamily="34" charset="-120"/>
+              </a:rPr>
+              <a:t>Finds each heartbeat by its timing — and says so honestly when it isn't sure, instead of guessing.</a:t>
+            </a:r>
+            <a:endParaRPr lang="en-US" sz="1150" dirty="0"/>
+          </a:p>
+        </p:txBody>
+      </p:sp>
+      <p:sp>
+        <p:nvSpPr>
+          <p:cNvPr id="16" name="Shape 14"/>
+          <p:cNvSpPr/>
+          <p:nvPr/>
+        </p:nvSpPr>
+        <p:spPr>
+          <a:xfrm>
+            <a:off x="8988552" y="2606040"/>
+            <a:ext cx="2487168" cy="3017520"/>
           </a:xfrm>
           <a:prstGeom prst="rect">
             <a:avLst/>
@@ -3329,7 +3966,7 @@
           </a:solidFill>
           <a:ln w="12700">
             <a:solidFill>
-              <a:srgbClr val="DCDBD5"/>
+              <a:srgbClr val="C3C2BA"/>
             </a:solidFill>
             <a:prstDash val="solid"/>
           </a:ln>
@@ -3337,115 +3974,157 @@
       </p:sp>
       <p:sp>
         <p:nvSpPr>
-          <p:cNvPr id="16" name="Text 13"/>
-          <p:cNvSpPr/>
-          <p:nvPr/>
-        </p:nvSpPr>
-        <p:spPr>
-          <a:xfrm>
-            <a:off x="8867394" y="4471416"/>
-            <a:ext cx="2251710" cy="256032"/>
-          </a:xfrm>
-          <a:prstGeom prst="rect">
-            <a:avLst/>
-          </a:prstGeom>
-          <a:noFill/>
-          <a:ln/>
-        </p:spPr>
-        <p:txBody>
-          <a:bodyPr wrap="square" lIns="0" tIns="0" rIns="0" bIns="0" rtlCol="0" anchor="ctr"/>
-          <a:lstStyle/>
-          <a:p>
-            <a:pPr indent="0" marL="0">
-              <a:buNone/>
-            </a:pPr>
-            <a:r>
-              <a:rPr lang="en-US" sz="1000" b="1" spc="120" kern="0" dirty="0">
-                <a:solidFill>
-                  <a:srgbClr val="8E939A"/>
+          <p:cNvPr id="17" name="Text 15"/>
+          <p:cNvSpPr/>
+          <p:nvPr/>
+        </p:nvSpPr>
+        <p:spPr>
+          <a:xfrm>
+            <a:off x="9153144" y="2788920"/>
+            <a:ext cx="2157984" cy="365760"/>
+          </a:xfrm>
+          <a:prstGeom prst="rect">
+            <a:avLst/>
+          </a:prstGeom>
+          <a:noFill/>
+          <a:ln/>
+        </p:spPr>
+        <p:txBody>
+          <a:bodyPr wrap="square" lIns="0" tIns="0" rIns="0" bIns="0" rtlCol="0" anchor="ctr"/>
+          <a:lstStyle/>
+          <a:p>
+            <a:pPr indent="0" marL="0">
+              <a:buNone/>
+            </a:pPr>
+            <a:r>
+              <a:rPr lang="en-US" sz="1300" b="1" spc="100" kern="0" dirty="0">
+                <a:solidFill>
+                  <a:srgbClr val="D6360F"/>
                 </a:solidFill>
                 <a:latin typeface="Courier New" pitchFamily="34" charset="0"/>
                 <a:ea typeface="Courier New" pitchFamily="34" charset="-122"/>
                 <a:cs typeface="Courier New" pitchFamily="34" charset="-120"/>
               </a:rPr>
-              <a:t>TRIAGE OUTPUT</a:t>
-            </a:r>
-            <a:endParaRPr lang="en-US" sz="1000" dirty="0"/>
-          </a:p>
-        </p:txBody>
-      </p:sp>
-      <p:sp>
-        <p:nvSpPr>
-          <p:cNvPr id="17" name="Text 14"/>
-          <p:cNvSpPr/>
-          <p:nvPr/>
-        </p:nvSpPr>
-        <p:spPr>
-          <a:xfrm>
-            <a:off x="8867394" y="4727448"/>
-            <a:ext cx="2251710" cy="457200"/>
-          </a:xfrm>
-          <a:prstGeom prst="rect">
-            <a:avLst/>
-          </a:prstGeom>
-          <a:noFill/>
-          <a:ln/>
-        </p:spPr>
-        <p:txBody>
-          <a:bodyPr wrap="square" lIns="0" tIns="0" rIns="0" bIns="0" rtlCol="0" anchor="ctr"/>
-          <a:lstStyle/>
-          <a:p>
-            <a:pPr indent="0" marL="0">
-              <a:buNone/>
-            </a:pPr>
-            <a:r>
-              <a:rPr lang="en-US" sz="2000" b="1" dirty="0">
-                <a:solidFill>
-                  <a:srgbClr val="D6360F"/>
+              <a:t>04</a:t>
+            </a:r>
+            <a:endParaRPr lang="en-US" sz="1300" dirty="0"/>
+          </a:p>
+        </p:txBody>
+      </p:sp>
+      <p:sp>
+        <p:nvSpPr>
+          <p:cNvPr id="18" name="Text 16"/>
+          <p:cNvSpPr/>
+          <p:nvPr/>
+        </p:nvSpPr>
+        <p:spPr>
+          <a:xfrm>
+            <a:off x="9153144" y="3172968"/>
+            <a:ext cx="2157984" cy="365760"/>
+          </a:xfrm>
+          <a:prstGeom prst="rect">
+            <a:avLst/>
+          </a:prstGeom>
+          <a:noFill/>
+          <a:ln/>
+        </p:spPr>
+        <p:txBody>
+          <a:bodyPr wrap="square" lIns="0" tIns="0" rIns="0" bIns="0" rtlCol="0" anchor="ctr"/>
+          <a:lstStyle/>
+          <a:p>
+            <a:pPr indent="0" marL="0">
+              <a:buNone/>
+            </a:pPr>
+            <a:r>
+              <a:rPr lang="en-US" sz="2000" dirty="0">
+                <a:solidFill>
+                  <a:srgbClr val="141619"/>
+                </a:solidFill>
+                <a:latin typeface="Cambria" pitchFamily="34" charset="0"/>
+                <a:ea typeface="Cambria" pitchFamily="34" charset="-122"/>
+                <a:cs typeface="Cambria" pitchFamily="34" charset="-120"/>
+              </a:rPr>
+              <a:t>Decide</a:t>
+            </a:r>
+            <a:endParaRPr lang="en-US" sz="2000" dirty="0"/>
+          </a:p>
+        </p:txBody>
+      </p:sp>
+      <p:sp>
+        <p:nvSpPr>
+          <p:cNvPr id="19" name="Text 17"/>
+          <p:cNvSpPr/>
+          <p:nvPr/>
+        </p:nvSpPr>
+        <p:spPr>
+          <a:xfrm>
+            <a:off x="9153144" y="3611880"/>
+            <a:ext cx="2157984" cy="1828800"/>
+          </a:xfrm>
+          <a:prstGeom prst="rect">
+            <a:avLst/>
+          </a:prstGeom>
+          <a:noFill/>
+          <a:ln/>
+        </p:spPr>
+        <p:txBody>
+          <a:bodyPr wrap="square" lIns="0" tIns="0" rIns="0" bIns="0" rtlCol="0" anchor="t"/>
+          <a:lstStyle/>
+          <a:p>
+            <a:pPr indent="0" marL="0">
+              <a:lnSpc>
+                <a:spcPct val="130000"/>
+              </a:lnSpc>
+              <a:buNone/>
+            </a:pPr>
+            <a:r>
+              <a:rPr lang="en-US" sz="1150" dirty="0">
+                <a:solidFill>
+                  <a:srgbClr val="5B6068"/>
+                </a:solidFill>
+                <a:latin typeface="Calibri" pitchFamily="34" charset="0"/>
+                <a:ea typeface="Calibri" pitchFamily="34" charset="-122"/>
+                <a:cs typeface="Calibri" pitchFamily="34" charset="-120"/>
+              </a:rPr>
+              <a:t>One of three words, plus a plain next step when something's flagged. Never a diagnosis.</a:t>
+            </a:r>
+            <a:endParaRPr lang="en-US" sz="1150" dirty="0"/>
+          </a:p>
+        </p:txBody>
+      </p:sp>
+      <p:sp>
+        <p:nvSpPr>
+          <p:cNvPr id="20" name="Text 18"/>
+          <p:cNvSpPr/>
+          <p:nvPr/>
+        </p:nvSpPr>
+        <p:spPr>
+          <a:xfrm>
+            <a:off x="502920" y="6400800"/>
+            <a:ext cx="1828800" cy="274320"/>
+          </a:xfrm>
+          <a:prstGeom prst="rect">
+            <a:avLst/>
+          </a:prstGeom>
+          <a:noFill/>
+          <a:ln/>
+        </p:spPr>
+        <p:txBody>
+          <a:bodyPr wrap="square" lIns="0" tIns="0" rIns="0" bIns="0" rtlCol="0" anchor="ctr"/>
+          <a:lstStyle/>
+          <a:p>
+            <a:pPr indent="0" marL="0">
+              <a:buNone/>
+            </a:pPr>
+            <a:r>
+              <a:rPr lang="en-US" sz="900" spc="200" kern="0" dirty="0">
+                <a:solidFill>
+                  <a:srgbClr val="8E939A"/>
                 </a:solidFill>
                 <a:latin typeface="Courier New" pitchFamily="34" charset="0"/>
                 <a:ea typeface="Courier New" pitchFamily="34" charset="-122"/>
                 <a:cs typeface="Courier New" pitchFamily="34" charset="-120"/>
               </a:rPr>
-              <a:t>Normal</a:t>
-            </a:r>
-            <a:endParaRPr lang="en-US" sz="2000" dirty="0"/>
-          </a:p>
-        </p:txBody>
-      </p:sp>
-      <p:sp>
-        <p:nvSpPr>
-          <p:cNvPr id="18" name="Text 15"/>
-          <p:cNvSpPr/>
-          <p:nvPr/>
-        </p:nvSpPr>
-        <p:spPr>
-          <a:xfrm>
-            <a:off x="502920" y="6400800"/>
-            <a:ext cx="1828800" cy="274320"/>
-          </a:xfrm>
-          <a:prstGeom prst="rect">
-            <a:avLst/>
-          </a:prstGeom>
-          <a:noFill/>
-          <a:ln/>
-        </p:spPr>
-        <p:txBody>
-          <a:bodyPr wrap="square" lIns="0" tIns="0" rIns="0" bIns="0" rtlCol="0" anchor="ctr"/>
-          <a:lstStyle/>
-          <a:p>
-            <a:pPr indent="0" marL="0">
-              <a:buNone/>
-            </a:pPr>
-            <a:r>
-              <a:rPr lang="en-US" sz="900" spc="200" kern="0" dirty="0">
-                <a:solidFill>
-                  <a:srgbClr val="8E939A"/>
-                </a:solidFill>
-                <a:latin typeface="Courier New" pitchFamily="34" charset="0"/>
-                <a:ea typeface="Courier New" pitchFamily="34" charset="-122"/>
-                <a:cs typeface="Courier New" pitchFamily="34" charset="-120"/>
-              </a:rPr>
               <a:t>PULSO</a:t>
             </a:r>
             <a:endParaRPr lang="en-US" sz="900" dirty="0"/>
@@ -3454,7 +4133,7 @@
       </p:sp>
       <p:sp>
         <p:nvSpPr>
-          <p:cNvPr id="19" name="Text 16"/>
+          <p:cNvPr id="21" name="Text 19"/>
           <p:cNvSpPr/>
           <p:nvPr/>
         </p:nvSpPr>
@@ -3538,8 +4217,8 @@
         </p:nvSpPr>
         <p:spPr>
           <a:xfrm>
-            <a:off x="868680" y="777240"/>
-            <a:ext cx="7315200" cy="292608"/>
+            <a:off x="868680" y="548640"/>
+            <a:ext cx="5486400" cy="292608"/>
           </a:xfrm>
           <a:prstGeom prst="rect">
             <a:avLst/>
@@ -3557,13 +4236,13 @@
             <a:r>
               <a:rPr lang="en-US" sz="1200" b="1" spc="220" kern="0" dirty="0">
                 <a:solidFill>
-                  <a:srgbClr val="9AA0A8"/>
+                  <a:srgbClr val="8E939A"/>
                 </a:solidFill>
                 <a:latin typeface="Courier New" pitchFamily="34" charset="0"/>
                 <a:ea typeface="Courier New" pitchFamily="34" charset="-122"/>
                 <a:cs typeface="Courier New" pitchFamily="34" charset="-120"/>
               </a:rPr>
-              <a:t>WHY WE'RE DIFFERENT</a:t>
+              <a:t>LIVE DEMO</a:t>
             </a:r>
             <a:endParaRPr lang="en-US" sz="1200" dirty="0"/>
           </a:p>
@@ -3577,171 +4256,548 @@
         </p:nvSpPr>
         <p:spPr>
           <a:xfrm>
-            <a:off x="777240" y="1371600"/>
-            <a:ext cx="10515600" cy="2834640"/>
-          </a:xfrm>
-          <a:prstGeom prst="rect">
-            <a:avLst/>
-          </a:prstGeom>
-          <a:noFill/>
-          <a:ln/>
-        </p:spPr>
-        <p:txBody>
-          <a:bodyPr wrap="square" lIns="0" tIns="0" rIns="0" bIns="0" rtlCol="0" anchor="t"/>
-          <a:lstStyle/>
-          <a:p>
-            <a:pPr algn="ctr" indent="0" marL="0">
-              <a:buNone/>
-            </a:pPr>
-            <a:r>
-              <a:rPr lang="en-US" sz="17000" dirty="0">
-                <a:solidFill>
-                  <a:srgbClr val="FF5A2C"/>
+            <a:off x="868680" y="914400"/>
+            <a:ext cx="8229600" cy="1188720"/>
+          </a:xfrm>
+          <a:prstGeom prst="rect">
+            <a:avLst/>
+          </a:prstGeom>
+          <a:noFill/>
+          <a:ln/>
+        </p:spPr>
+        <p:txBody>
+          <a:bodyPr wrap="square" lIns="0" tIns="0" rIns="0" bIns="0" rtlCol="0" anchor="ctr"/>
+          <a:lstStyle/>
+          <a:p>
+            <a:pPr indent="0" marL="0">
+              <a:buNone/>
+            </a:pPr>
+            <a:r>
+              <a:rPr lang="en-US" sz="3200" dirty="0">
+                <a:solidFill>
+                  <a:srgbClr val="141619"/>
                 </a:solidFill>
                 <a:latin typeface="Cambria" pitchFamily="34" charset="0"/>
                 <a:ea typeface="Cambria" pitchFamily="34" charset="-122"/>
                 <a:cs typeface="Cambria" pitchFamily="34" charset="-120"/>
               </a:rPr>
-              <a:t>302</a:t>
-            </a:r>
-            <a:endParaRPr lang="en-US" sz="17000" dirty="0"/>
-          </a:p>
-        </p:txBody>
-      </p:sp>
-      <p:sp>
-        <p:nvSpPr>
-          <p:cNvPr id="4" name="Text 2"/>
-          <p:cNvSpPr/>
-          <p:nvPr/>
-        </p:nvSpPr>
-        <p:spPr>
-          <a:xfrm>
-            <a:off x="868680" y="4251960"/>
-            <a:ext cx="10515600" cy="502920"/>
-          </a:xfrm>
-          <a:prstGeom prst="rect">
-            <a:avLst/>
-          </a:prstGeom>
-          <a:noFill/>
-          <a:ln/>
-        </p:spPr>
-        <p:txBody>
-          <a:bodyPr wrap="square" lIns="0" tIns="0" rIns="0" bIns="0" rtlCol="0" anchor="ctr"/>
-          <a:lstStyle/>
-          <a:p>
-            <a:pPr algn="ctr" indent="0" marL="0">
-              <a:buNone/>
-            </a:pPr>
-            <a:r>
-              <a:rPr lang="en-US" sz="1600" b="1" spc="150" kern="0" dirty="0">
-                <a:solidFill>
-                  <a:srgbClr val="EDEEF0"/>
+              <a:t>Phone mic → live triage,</a:t>
+            </a:r>
+            <a:endParaRPr lang="en-US" sz="3200" dirty="0"/>
+          </a:p>
+          <a:p>
+            <a:pPr indent="0" marL="0">
+              <a:buNone/>
+            </a:pPr>
+            <a:r>
+              <a:rPr lang="en-US" sz="3200" dirty="0">
+                <a:solidFill>
+                  <a:srgbClr val="141619"/>
+                </a:solidFill>
+                <a:latin typeface="Cambria" pitchFamily="34" charset="0"/>
+                <a:ea typeface="Cambria" pitchFamily="34" charset="-122"/>
+                <a:cs typeface="Cambria" pitchFamily="34" charset="-120"/>
+              </a:rPr>
+              <a:t>right now.</a:t>
+            </a:r>
+            <a:endParaRPr lang="en-US" sz="3200" dirty="0"/>
+          </a:p>
+        </p:txBody>
+      </p:sp>
+      <p:sp>
+        <p:nvSpPr>
+          <p:cNvPr id="4" name="Shape 2"/>
+          <p:cNvSpPr/>
+          <p:nvPr/>
+        </p:nvSpPr>
+        <p:spPr>
+          <a:xfrm>
+            <a:off x="868680" y="2148840"/>
+            <a:ext cx="10469880" cy="2103120"/>
+          </a:xfrm>
+          <a:prstGeom prst="rect">
+            <a:avLst/>
+          </a:prstGeom>
+          <a:solidFill>
+            <a:srgbClr val="F4F4F1"/>
+          </a:solidFill>
+          <a:ln w="12700">
+            <a:solidFill>
+              <a:srgbClr val="DCDBD5"/>
+            </a:solidFill>
+            <a:prstDash val="solid"/>
+          </a:ln>
+        </p:spPr>
+      </p:sp>
+      <p:pic>
+        <p:nvPicPr>
+          <p:cNvPr id="5" name="Image 0" descr="waveform.png">    </p:cNvPr>
+          <p:cNvPicPr>
+            <a:picLocks noChangeAspect="1"/>
+          </p:cNvPicPr>
+          <p:nvPr/>
+        </p:nvPicPr>
+        <p:blipFill>
+          <a:blip r:embed="rId2"/>
+          <a:stretch>
+            <a:fillRect/>
+          </a:stretch>
+        </p:blipFill>
+        <p:spPr>
+          <a:xfrm>
+            <a:off x="1097280" y="2286000"/>
+            <a:ext cx="10012680" cy="1828800"/>
+          </a:xfrm>
+          <a:prstGeom prst="rect">
+            <a:avLst/>
+          </a:prstGeom>
+        </p:spPr>
+      </p:pic>
+      <p:sp>
+        <p:nvSpPr>
+          <p:cNvPr id="6" name="Shape 3"/>
+          <p:cNvSpPr/>
+          <p:nvPr/>
+        </p:nvSpPr>
+        <p:spPr>
+          <a:xfrm>
+            <a:off x="868680" y="4343400"/>
+            <a:ext cx="2507742" cy="960120"/>
+          </a:xfrm>
+          <a:prstGeom prst="rect">
+            <a:avLst/>
+          </a:prstGeom>
+          <a:solidFill>
+            <a:srgbClr val="FFFFFF"/>
+          </a:solidFill>
+          <a:ln w="12700">
+            <a:solidFill>
+              <a:srgbClr val="DCDBD5"/>
+            </a:solidFill>
+            <a:prstDash val="solid"/>
+          </a:ln>
+        </p:spPr>
+      </p:sp>
+      <p:sp>
+        <p:nvSpPr>
+          <p:cNvPr id="7" name="Text 4"/>
+          <p:cNvSpPr/>
+          <p:nvPr/>
+        </p:nvSpPr>
+        <p:spPr>
+          <a:xfrm>
+            <a:off x="1014984" y="4471416"/>
+            <a:ext cx="2251710" cy="256032"/>
+          </a:xfrm>
+          <a:prstGeom prst="rect">
+            <a:avLst/>
+          </a:prstGeom>
+          <a:noFill/>
+          <a:ln/>
+        </p:spPr>
+        <p:txBody>
+          <a:bodyPr wrap="square" lIns="0" tIns="0" rIns="0" bIns="0" rtlCol="0" anchor="ctr"/>
+          <a:lstStyle/>
+          <a:p>
+            <a:pPr indent="0" marL="0">
+              <a:buNone/>
+            </a:pPr>
+            <a:r>
+              <a:rPr lang="en-US" sz="1000" b="1" spc="120" kern="0" dirty="0">
+                <a:solidFill>
+                  <a:srgbClr val="8E939A"/>
                 </a:solidFill>
                 <a:latin typeface="Courier New" pitchFamily="34" charset="0"/>
                 <a:ea typeface="Courier New" pitchFamily="34" charset="-122"/>
                 <a:cs typeface="Courier New" pitchFamily="34" charset="-120"/>
               </a:rPr>
-              <a:t>automated tests. All passing.</a:t>
-            </a:r>
-            <a:endParaRPr lang="en-US" sz="1600" dirty="0"/>
-          </a:p>
-        </p:txBody>
-      </p:sp>
-      <p:sp>
-        <p:nvSpPr>
-          <p:cNvPr id="5" name="Text 3"/>
-          <p:cNvSpPr/>
-          <p:nvPr/>
-        </p:nvSpPr>
-        <p:spPr>
-          <a:xfrm>
-            <a:off x="1280160" y="5029200"/>
-            <a:ext cx="9601200" cy="1097280"/>
-          </a:xfrm>
-          <a:prstGeom prst="rect">
-            <a:avLst/>
-          </a:prstGeom>
-          <a:noFill/>
-          <a:ln/>
-        </p:spPr>
-        <p:txBody>
-          <a:bodyPr wrap="square" lIns="0" tIns="0" rIns="0" bIns="0" rtlCol="0" anchor="ctr"/>
-          <a:lstStyle/>
-          <a:p>
-            <a:pPr algn="ctr" indent="0" marL="0">
-              <a:lnSpc>
-                <a:spcPct val="130000"/>
-              </a:lnSpc>
-              <a:buNone/>
-            </a:pPr>
-            <a:r>
-              <a:rPr lang="en-US" sz="1700" i="1" dirty="0">
-                <a:solidFill>
-                  <a:srgbClr val="9AA0A8"/>
-                </a:solidFill>
-                <a:latin typeface="Cambria" pitchFamily="34" charset="0"/>
-                <a:ea typeface="Cambria" pitchFamily="34" charset="-122"/>
-                <a:cs typeface="Cambria" pitchFamily="34" charset="-120"/>
-              </a:rPr>
-              <a:t>Two real bugs caught before they ever reached a user. We swapped in new hardware and nothing else broke.</a:t>
-            </a:r>
-            <a:endParaRPr lang="en-US" sz="1700" dirty="0"/>
-          </a:p>
-          <a:p>
-            <a:pPr algn="ctr" indent="0" marL="0">
-              <a:lnSpc>
-                <a:spcPct val="130000"/>
-              </a:lnSpc>
-              <a:buNone/>
-            </a:pPr>
-            <a:r>
-              <a:rPr lang="en-US" sz="1700" i="1" dirty="0">
-                <a:solidFill>
-                  <a:srgbClr val="9AA0A8"/>
-                </a:solidFill>
-                <a:latin typeface="Cambria" pitchFamily="34" charset="0"/>
-                <a:ea typeface="Cambria" pitchFamily="34" charset="-122"/>
-                <a:cs typeface="Cambria" pitchFamily="34" charset="-120"/>
-              </a:rPr>
-              <a:t>Most hackathon demos have none of this. We built it like it has to work.</a:t>
-            </a:r>
-            <a:endParaRPr lang="en-US" sz="1700" dirty="0"/>
-          </a:p>
-        </p:txBody>
-      </p:sp>
-      <p:sp>
-        <p:nvSpPr>
-          <p:cNvPr id="6" name="Text 4"/>
-          <p:cNvSpPr/>
-          <p:nvPr/>
-        </p:nvSpPr>
-        <p:spPr>
-          <a:xfrm>
-            <a:off x="502920" y="6400800"/>
-            <a:ext cx="1828800" cy="274320"/>
-          </a:xfrm>
-          <a:prstGeom prst="rect">
-            <a:avLst/>
-          </a:prstGeom>
-          <a:noFill/>
-          <a:ln/>
-        </p:spPr>
-        <p:txBody>
-          <a:bodyPr wrap="square" lIns="0" tIns="0" rIns="0" bIns="0" rtlCol="0" anchor="ctr"/>
-          <a:lstStyle/>
-          <a:p>
-            <a:pPr indent="0" marL="0">
-              <a:buNone/>
-            </a:pPr>
-            <a:r>
-              <a:rPr lang="en-US" sz="900" spc="200" kern="0" dirty="0">
-                <a:solidFill>
-                  <a:srgbClr val="9AA0A8"/>
+              <a:t>HEART RATE</a:t>
+            </a:r>
+            <a:endParaRPr lang="en-US" sz="1000" dirty="0"/>
+          </a:p>
+        </p:txBody>
+      </p:sp>
+      <p:sp>
+        <p:nvSpPr>
+          <p:cNvPr id="8" name="Text 5"/>
+          <p:cNvSpPr/>
+          <p:nvPr/>
+        </p:nvSpPr>
+        <p:spPr>
+          <a:xfrm>
+            <a:off x="1014984" y="4727448"/>
+            <a:ext cx="2251710" cy="457200"/>
+          </a:xfrm>
+          <a:prstGeom prst="rect">
+            <a:avLst/>
+          </a:prstGeom>
+          <a:noFill/>
+          <a:ln/>
+        </p:spPr>
+        <p:txBody>
+          <a:bodyPr wrap="square" lIns="0" tIns="0" rIns="0" bIns="0" rtlCol="0" anchor="ctr"/>
+          <a:lstStyle/>
+          <a:p>
+            <a:pPr indent="0" marL="0">
+              <a:buNone/>
+            </a:pPr>
+            <a:r>
+              <a:rPr lang="en-US" sz="2000" b="1" dirty="0">
+                <a:solidFill>
+                  <a:srgbClr val="141619"/>
                 </a:solidFill>
                 <a:latin typeface="Courier New" pitchFamily="34" charset="0"/>
                 <a:ea typeface="Courier New" pitchFamily="34" charset="-122"/>
                 <a:cs typeface="Courier New" pitchFamily="34" charset="-120"/>
               </a:rPr>
+              <a:t>68 BPM</a:t>
+            </a:r>
+            <a:endParaRPr lang="en-US" sz="2000" dirty="0"/>
+          </a:p>
+        </p:txBody>
+      </p:sp>
+      <p:sp>
+        <p:nvSpPr>
+          <p:cNvPr id="9" name="Shape 6"/>
+          <p:cNvSpPr/>
+          <p:nvPr/>
+        </p:nvSpPr>
+        <p:spPr>
+          <a:xfrm>
+            <a:off x="3486150" y="4343400"/>
+            <a:ext cx="2507742" cy="960120"/>
+          </a:xfrm>
+          <a:prstGeom prst="rect">
+            <a:avLst/>
+          </a:prstGeom>
+          <a:solidFill>
+            <a:srgbClr val="FFFFFF"/>
+          </a:solidFill>
+          <a:ln w="12700">
+            <a:solidFill>
+              <a:srgbClr val="DCDBD5"/>
+            </a:solidFill>
+            <a:prstDash val="solid"/>
+          </a:ln>
+        </p:spPr>
+      </p:sp>
+      <p:sp>
+        <p:nvSpPr>
+          <p:cNvPr id="10" name="Text 7"/>
+          <p:cNvSpPr/>
+          <p:nvPr/>
+        </p:nvSpPr>
+        <p:spPr>
+          <a:xfrm>
+            <a:off x="3632454" y="4471416"/>
+            <a:ext cx="2251710" cy="256032"/>
+          </a:xfrm>
+          <a:prstGeom prst="rect">
+            <a:avLst/>
+          </a:prstGeom>
+          <a:noFill/>
+          <a:ln/>
+        </p:spPr>
+        <p:txBody>
+          <a:bodyPr wrap="square" lIns="0" tIns="0" rIns="0" bIns="0" rtlCol="0" anchor="ctr"/>
+          <a:lstStyle/>
+          <a:p>
+            <a:pPr indent="0" marL="0">
+              <a:buNone/>
+            </a:pPr>
+            <a:r>
+              <a:rPr lang="en-US" sz="1000" b="1" spc="120" kern="0" dirty="0">
+                <a:solidFill>
+                  <a:srgbClr val="8E939A"/>
+                </a:solidFill>
+                <a:latin typeface="Courier New" pitchFamily="34" charset="0"/>
+                <a:ea typeface="Courier New" pitchFamily="34" charset="-122"/>
+                <a:cs typeface="Courier New" pitchFamily="34" charset="-120"/>
+              </a:rPr>
+              <a:t>BEATS DETECTED</a:t>
+            </a:r>
+            <a:endParaRPr lang="en-US" sz="1000" dirty="0"/>
+          </a:p>
+        </p:txBody>
+      </p:sp>
+      <p:sp>
+        <p:nvSpPr>
+          <p:cNvPr id="11" name="Text 8"/>
+          <p:cNvSpPr/>
+          <p:nvPr/>
+        </p:nvSpPr>
+        <p:spPr>
+          <a:xfrm>
+            <a:off x="3632454" y="4727448"/>
+            <a:ext cx="2251710" cy="457200"/>
+          </a:xfrm>
+          <a:prstGeom prst="rect">
+            <a:avLst/>
+          </a:prstGeom>
+          <a:noFill/>
+          <a:ln/>
+        </p:spPr>
+        <p:txBody>
+          <a:bodyPr wrap="square" lIns="0" tIns="0" rIns="0" bIns="0" rtlCol="0" anchor="ctr"/>
+          <a:lstStyle/>
+          <a:p>
+            <a:pPr indent="0" marL="0">
+              <a:buNone/>
+            </a:pPr>
+            <a:r>
+              <a:rPr lang="en-US" sz="2000" b="1" dirty="0">
+                <a:solidFill>
+                  <a:srgbClr val="141619"/>
+                </a:solidFill>
+                <a:latin typeface="Courier New" pitchFamily="34" charset="0"/>
+                <a:ea typeface="Courier New" pitchFamily="34" charset="-122"/>
+                <a:cs typeface="Courier New" pitchFamily="34" charset="-120"/>
+              </a:rPr>
+              <a:t>8</a:t>
+            </a:r>
+            <a:endParaRPr lang="en-US" sz="2000" dirty="0"/>
+          </a:p>
+        </p:txBody>
+      </p:sp>
+      <p:sp>
+        <p:nvSpPr>
+          <p:cNvPr id="12" name="Shape 9"/>
+          <p:cNvSpPr/>
+          <p:nvPr/>
+        </p:nvSpPr>
+        <p:spPr>
+          <a:xfrm>
+            <a:off x="6103620" y="4343400"/>
+            <a:ext cx="2507742" cy="960120"/>
+          </a:xfrm>
+          <a:prstGeom prst="rect">
+            <a:avLst/>
+          </a:prstGeom>
+          <a:solidFill>
+            <a:srgbClr val="FFFFFF"/>
+          </a:solidFill>
+          <a:ln w="12700">
+            <a:solidFill>
+              <a:srgbClr val="DCDBD5"/>
+            </a:solidFill>
+            <a:prstDash val="solid"/>
+          </a:ln>
+        </p:spPr>
+      </p:sp>
+      <p:sp>
+        <p:nvSpPr>
+          <p:cNvPr id="13" name="Text 10"/>
+          <p:cNvSpPr/>
+          <p:nvPr/>
+        </p:nvSpPr>
+        <p:spPr>
+          <a:xfrm>
+            <a:off x="6249924" y="4471416"/>
+            <a:ext cx="2251710" cy="256032"/>
+          </a:xfrm>
+          <a:prstGeom prst="rect">
+            <a:avLst/>
+          </a:prstGeom>
+          <a:noFill/>
+          <a:ln/>
+        </p:spPr>
+        <p:txBody>
+          <a:bodyPr wrap="square" lIns="0" tIns="0" rIns="0" bIns="0" rtlCol="0" anchor="ctr"/>
+          <a:lstStyle/>
+          <a:p>
+            <a:pPr indent="0" marL="0">
+              <a:buNone/>
+            </a:pPr>
+            <a:r>
+              <a:rPr lang="en-US" sz="1000" b="1" spc="120" kern="0" dirty="0">
+                <a:solidFill>
+                  <a:srgbClr val="8E939A"/>
+                </a:solidFill>
+                <a:latin typeface="Courier New" pitchFamily="34" charset="0"/>
+                <a:ea typeface="Courier New" pitchFamily="34" charset="-122"/>
+                <a:cs typeface="Courier New" pitchFamily="34" charset="-120"/>
+              </a:rPr>
+              <a:t>RHYTHM</a:t>
+            </a:r>
+            <a:endParaRPr lang="en-US" sz="1000" dirty="0"/>
+          </a:p>
+        </p:txBody>
+      </p:sp>
+      <p:sp>
+        <p:nvSpPr>
+          <p:cNvPr id="14" name="Text 11"/>
+          <p:cNvSpPr/>
+          <p:nvPr/>
+        </p:nvSpPr>
+        <p:spPr>
+          <a:xfrm>
+            <a:off x="6249924" y="4727448"/>
+            <a:ext cx="2251710" cy="457200"/>
+          </a:xfrm>
+          <a:prstGeom prst="rect">
+            <a:avLst/>
+          </a:prstGeom>
+          <a:noFill/>
+          <a:ln/>
+        </p:spPr>
+        <p:txBody>
+          <a:bodyPr wrap="square" lIns="0" tIns="0" rIns="0" bIns="0" rtlCol="0" anchor="ctr"/>
+          <a:lstStyle/>
+          <a:p>
+            <a:pPr indent="0" marL="0">
+              <a:buNone/>
+            </a:pPr>
+            <a:r>
+              <a:rPr lang="en-US" sz="2000" b="1" dirty="0">
+                <a:solidFill>
+                  <a:srgbClr val="141619"/>
+                </a:solidFill>
+                <a:latin typeface="Courier New" pitchFamily="34" charset="0"/>
+                <a:ea typeface="Courier New" pitchFamily="34" charset="-122"/>
+                <a:cs typeface="Courier New" pitchFamily="34" charset="-120"/>
+              </a:rPr>
+              <a:t>Regular</a:t>
+            </a:r>
+            <a:endParaRPr lang="en-US" sz="2000" dirty="0"/>
+          </a:p>
+        </p:txBody>
+      </p:sp>
+      <p:sp>
+        <p:nvSpPr>
+          <p:cNvPr id="15" name="Shape 12"/>
+          <p:cNvSpPr/>
+          <p:nvPr/>
+        </p:nvSpPr>
+        <p:spPr>
+          <a:xfrm>
+            <a:off x="8721090" y="4343400"/>
+            <a:ext cx="2507742" cy="960120"/>
+          </a:xfrm>
+          <a:prstGeom prst="rect">
+            <a:avLst/>
+          </a:prstGeom>
+          <a:solidFill>
+            <a:srgbClr val="FFFFFF"/>
+          </a:solidFill>
+          <a:ln w="12700">
+            <a:solidFill>
+              <a:srgbClr val="DCDBD5"/>
+            </a:solidFill>
+            <a:prstDash val="solid"/>
+          </a:ln>
+        </p:spPr>
+      </p:sp>
+      <p:sp>
+        <p:nvSpPr>
+          <p:cNvPr id="16" name="Text 13"/>
+          <p:cNvSpPr/>
+          <p:nvPr/>
+        </p:nvSpPr>
+        <p:spPr>
+          <a:xfrm>
+            <a:off x="8867394" y="4471416"/>
+            <a:ext cx="2251710" cy="256032"/>
+          </a:xfrm>
+          <a:prstGeom prst="rect">
+            <a:avLst/>
+          </a:prstGeom>
+          <a:noFill/>
+          <a:ln/>
+        </p:spPr>
+        <p:txBody>
+          <a:bodyPr wrap="square" lIns="0" tIns="0" rIns="0" bIns="0" rtlCol="0" anchor="ctr"/>
+          <a:lstStyle/>
+          <a:p>
+            <a:pPr indent="0" marL="0">
+              <a:buNone/>
+            </a:pPr>
+            <a:r>
+              <a:rPr lang="en-US" sz="1000" b="1" spc="120" kern="0" dirty="0">
+                <a:solidFill>
+                  <a:srgbClr val="8E939A"/>
+                </a:solidFill>
+                <a:latin typeface="Courier New" pitchFamily="34" charset="0"/>
+                <a:ea typeface="Courier New" pitchFamily="34" charset="-122"/>
+                <a:cs typeface="Courier New" pitchFamily="34" charset="-120"/>
+              </a:rPr>
+              <a:t>TRIAGE OUTPUT</a:t>
+            </a:r>
+            <a:endParaRPr lang="en-US" sz="1000" dirty="0"/>
+          </a:p>
+        </p:txBody>
+      </p:sp>
+      <p:sp>
+        <p:nvSpPr>
+          <p:cNvPr id="17" name="Text 14"/>
+          <p:cNvSpPr/>
+          <p:nvPr/>
+        </p:nvSpPr>
+        <p:spPr>
+          <a:xfrm>
+            <a:off x="8867394" y="4727448"/>
+            <a:ext cx="2251710" cy="457200"/>
+          </a:xfrm>
+          <a:prstGeom prst="rect">
+            <a:avLst/>
+          </a:prstGeom>
+          <a:noFill/>
+          <a:ln/>
+        </p:spPr>
+        <p:txBody>
+          <a:bodyPr wrap="square" lIns="0" tIns="0" rIns="0" bIns="0" rtlCol="0" anchor="ctr"/>
+          <a:lstStyle/>
+          <a:p>
+            <a:pPr indent="0" marL="0">
+              <a:buNone/>
+            </a:pPr>
+            <a:r>
+              <a:rPr lang="en-US" sz="2000" b="1" dirty="0">
+                <a:solidFill>
+                  <a:srgbClr val="D6360F"/>
+                </a:solidFill>
+                <a:latin typeface="Courier New" pitchFamily="34" charset="0"/>
+                <a:ea typeface="Courier New" pitchFamily="34" charset="-122"/>
+                <a:cs typeface="Courier New" pitchFamily="34" charset="-120"/>
+              </a:rPr>
+              <a:t>Normal</a:t>
+            </a:r>
+            <a:endParaRPr lang="en-US" sz="2000" dirty="0"/>
+          </a:p>
+        </p:txBody>
+      </p:sp>
+      <p:sp>
+        <p:nvSpPr>
+          <p:cNvPr id="18" name="Text 15"/>
+          <p:cNvSpPr/>
+          <p:nvPr/>
+        </p:nvSpPr>
+        <p:spPr>
+          <a:xfrm>
+            <a:off x="502920" y="6400800"/>
+            <a:ext cx="1828800" cy="274320"/>
+          </a:xfrm>
+          <a:prstGeom prst="rect">
+            <a:avLst/>
+          </a:prstGeom>
+          <a:noFill/>
+          <a:ln/>
+        </p:spPr>
+        <p:txBody>
+          <a:bodyPr wrap="square" lIns="0" tIns="0" rIns="0" bIns="0" rtlCol="0" anchor="ctr"/>
+          <a:lstStyle/>
+          <a:p>
+            <a:pPr indent="0" marL="0">
+              <a:buNone/>
+            </a:pPr>
+            <a:r>
+              <a:rPr lang="en-US" sz="900" spc="200" kern="0" dirty="0">
+                <a:solidFill>
+                  <a:srgbClr val="8E939A"/>
+                </a:solidFill>
+                <a:latin typeface="Courier New" pitchFamily="34" charset="0"/>
+                <a:ea typeface="Courier New" pitchFamily="34" charset="-122"/>
+                <a:cs typeface="Courier New" pitchFamily="34" charset="-120"/>
+              </a:rPr>
               <a:t>PULSO</a:t>
             </a:r>
             <a:endParaRPr lang="en-US" sz="900" dirty="0"/>
@@ -3750,7 +4806,7 @@
       </p:sp>
       <p:sp>
         <p:nvSpPr>
-          <p:cNvPr id="7" name="Text 5"/>
+          <p:cNvPr id="19" name="Text 16"/>
           <p:cNvSpPr/>
           <p:nvPr/>
         </p:nvSpPr>
@@ -3775,7 +4831,7 @@
             <a:r>
               <a:rPr lang="en-US" sz="900" dirty="0">
                 <a:solidFill>
-                  <a:srgbClr val="9AA0A8"/>
+                  <a:srgbClr val="8E939A"/>
                 </a:solidFill>
                 <a:latin typeface="Courier New" pitchFamily="34" charset="0"/>
                 <a:ea typeface="Courier New" pitchFamily="34" charset="-122"/>
@@ -3834,8 +4890,8 @@
         </p:nvSpPr>
         <p:spPr>
           <a:xfrm>
-            <a:off x="868680" y="640080"/>
-            <a:ext cx="5486400" cy="292608"/>
+            <a:off x="868680" y="777240"/>
+            <a:ext cx="7315200" cy="292608"/>
           </a:xfrm>
           <a:prstGeom prst="rect">
             <a:avLst/>
@@ -3853,13 +4909,13 @@
             <a:r>
               <a:rPr lang="en-US" sz="1200" b="1" spc="220" kern="0" dirty="0">
                 <a:solidFill>
-                  <a:srgbClr val="8E939A"/>
+                  <a:srgbClr val="9AA0A8"/>
                 </a:solidFill>
                 <a:latin typeface="Courier New" pitchFamily="34" charset="0"/>
                 <a:ea typeface="Courier New" pitchFamily="34" charset="-122"/>
                 <a:cs typeface="Courier New" pitchFamily="34" charset="-120"/>
               </a:rPr>
-              <a:t>HARDWARE</a:t>
+              <a:t>WHY WE'RE DIFFERENT</a:t>
             </a:r>
             <a:endParaRPr lang="en-US" sz="1200" dirty="0"/>
           </a:p>
@@ -3873,8 +4929,8 @@
         </p:nvSpPr>
         <p:spPr>
           <a:xfrm>
-            <a:off x="868680" y="1188720"/>
-            <a:ext cx="9601200" cy="1463040"/>
+            <a:off x="777240" y="1371600"/>
+            <a:ext cx="10515600" cy="2834640"/>
           </a:xfrm>
           <a:prstGeom prst="rect">
             <a:avLst/>
@@ -3886,107 +4942,124 @@
           <a:bodyPr wrap="square" lIns="0" tIns="0" rIns="0" bIns="0" rtlCol="0" anchor="t"/>
           <a:lstStyle/>
           <a:p>
-            <a:pPr indent="0" marL="0">
-              <a:buNone/>
-            </a:pPr>
-            <a:r>
-              <a:rPr lang="en-US" sz="3800" dirty="0">
-                <a:solidFill>
-                  <a:srgbClr val="141619"/>
+            <a:pPr algn="ctr" indent="0" marL="0">
+              <a:buNone/>
+            </a:pPr>
+            <a:r>
+              <a:rPr lang="en-US" sz="17000" dirty="0">
+                <a:solidFill>
+                  <a:srgbClr val="FF5A2C"/>
                 </a:solidFill>
                 <a:latin typeface="Cambria" pitchFamily="34" charset="0"/>
                 <a:ea typeface="Cambria" pitchFamily="34" charset="-122"/>
                 <a:cs typeface="Cambria" pitchFamily="34" charset="-120"/>
               </a:rPr>
-              <a:t>Under $20 in parts.</a:t>
-            </a:r>
-            <a:endParaRPr lang="en-US" sz="3800" dirty="0"/>
-          </a:p>
-          <a:p>
-            <a:pPr indent="0" marL="0">
-              <a:buNone/>
-            </a:pPr>
-            <a:r>
-              <a:rPr lang="en-US" sz="3800" dirty="0">
-                <a:solidFill>
-                  <a:srgbClr val="141619"/>
+              <a:t>302</a:t>
+            </a:r>
+            <a:endParaRPr lang="en-US" sz="17000" dirty="0"/>
+          </a:p>
+        </p:txBody>
+      </p:sp>
+      <p:sp>
+        <p:nvSpPr>
+          <p:cNvPr id="4" name="Text 2"/>
+          <p:cNvSpPr/>
+          <p:nvPr/>
+        </p:nvSpPr>
+        <p:spPr>
+          <a:xfrm>
+            <a:off x="868680" y="4251960"/>
+            <a:ext cx="10515600" cy="502920"/>
+          </a:xfrm>
+          <a:prstGeom prst="rect">
+            <a:avLst/>
+          </a:prstGeom>
+          <a:noFill/>
+          <a:ln/>
+        </p:spPr>
+        <p:txBody>
+          <a:bodyPr wrap="square" lIns="0" tIns="0" rIns="0" bIns="0" rtlCol="0" anchor="ctr"/>
+          <a:lstStyle/>
+          <a:p>
+            <a:pPr algn="ctr" indent="0" marL="0">
+              <a:buNone/>
+            </a:pPr>
+            <a:r>
+              <a:rPr lang="en-US" sz="1600" b="1" spc="150" kern="0" dirty="0">
+                <a:solidFill>
+                  <a:srgbClr val="EDEEF0"/>
+                </a:solidFill>
+                <a:latin typeface="Courier New" pitchFamily="34" charset="0"/>
+                <a:ea typeface="Courier New" pitchFamily="34" charset="-122"/>
+                <a:cs typeface="Courier New" pitchFamily="34" charset="-120"/>
+              </a:rPr>
+              <a:t>automated tests. All passing.</a:t>
+            </a:r>
+            <a:endParaRPr lang="en-US" sz="1600" dirty="0"/>
+          </a:p>
+        </p:txBody>
+      </p:sp>
+      <p:sp>
+        <p:nvSpPr>
+          <p:cNvPr id="5" name="Text 3"/>
+          <p:cNvSpPr/>
+          <p:nvPr/>
+        </p:nvSpPr>
+        <p:spPr>
+          <a:xfrm>
+            <a:off x="1280160" y="5029200"/>
+            <a:ext cx="9601200" cy="1097280"/>
+          </a:xfrm>
+          <a:prstGeom prst="rect">
+            <a:avLst/>
+          </a:prstGeom>
+          <a:noFill/>
+          <a:ln/>
+        </p:spPr>
+        <p:txBody>
+          <a:bodyPr wrap="square" lIns="0" tIns="0" rIns="0" bIns="0" rtlCol="0" anchor="ctr"/>
+          <a:lstStyle/>
+          <a:p>
+            <a:pPr algn="ctr" indent="0" marL="0">
+              <a:lnSpc>
+                <a:spcPct val="130000"/>
+              </a:lnSpc>
+              <a:buNone/>
+            </a:pPr>
+            <a:r>
+              <a:rPr lang="en-US" sz="1700" i="1" dirty="0">
+                <a:solidFill>
+                  <a:srgbClr val="9AA0A8"/>
                 </a:solidFill>
                 <a:latin typeface="Cambria" pitchFamily="34" charset="0"/>
                 <a:ea typeface="Cambria" pitchFamily="34" charset="-122"/>
                 <a:cs typeface="Cambria" pitchFamily="34" charset="-120"/>
               </a:rPr>
-              <a:t>Same brain as the software.</a:t>
-            </a:r>
-            <a:endParaRPr lang="en-US" sz="3800" dirty="0"/>
-          </a:p>
-        </p:txBody>
-      </p:sp>
-      <p:sp>
-        <p:nvSpPr>
-          <p:cNvPr id="4" name="Text 2"/>
-          <p:cNvSpPr/>
-          <p:nvPr/>
-        </p:nvSpPr>
-        <p:spPr>
-          <a:xfrm>
-            <a:off x="868680" y="2788920"/>
-            <a:ext cx="10058400" cy="914400"/>
-          </a:xfrm>
-          <a:prstGeom prst="rect">
-            <a:avLst/>
-          </a:prstGeom>
-          <a:noFill/>
-          <a:ln/>
-        </p:spPr>
-        <p:txBody>
-          <a:bodyPr wrap="square" lIns="0" tIns="0" rIns="0" bIns="0" rtlCol="0" anchor="ctr"/>
-          <a:lstStyle/>
-          <a:p>
-            <a:pPr indent="0" marL="0">
+              <a:t>Two real bugs caught before they ever reached a user. We swapped in new hardware and nothing else broke.</a:t>
+            </a:r>
+            <a:endParaRPr lang="en-US" sz="1700" dirty="0"/>
+          </a:p>
+          <a:p>
+            <a:pPr algn="ctr" indent="0" marL="0">
               <a:lnSpc>
                 <a:spcPct val="130000"/>
               </a:lnSpc>
               <a:buNone/>
             </a:pPr>
             <a:r>
-              <a:rPr lang="en-US" sz="1500" dirty="0">
-                <a:solidFill>
-                  <a:srgbClr val="5B6068"/>
-                </a:solidFill>
-                <a:latin typeface="Calibri" pitchFamily="34" charset="0"/>
-                <a:ea typeface="Calibri" pitchFamily="34" charset="-122"/>
-                <a:cs typeface="Calibri" pitchFamily="34" charset="-120"/>
-              </a:rPr>
-              <a:t>A cheap microphone chip picks up the sound. Swap in a phone, a laptop, or a recorded file instead — everything else stays exactly the same.</a:t>
-            </a:r>
-            <a:endParaRPr lang="en-US" sz="1500" dirty="0"/>
-          </a:p>
-        </p:txBody>
-      </p:sp>
-      <p:sp>
-        <p:nvSpPr>
-          <p:cNvPr id="5" name="Shape 3"/>
-          <p:cNvSpPr/>
-          <p:nvPr/>
-        </p:nvSpPr>
-        <p:spPr>
-          <a:xfrm>
-            <a:off x="868680" y="4114800"/>
-            <a:ext cx="2514600" cy="438912"/>
-          </a:xfrm>
-          <a:prstGeom prst="rect">
-            <a:avLst/>
-          </a:prstGeom>
-          <a:solidFill>
-            <a:srgbClr val="FFFFFF"/>
-          </a:solidFill>
-          <a:ln w="12700">
-            <a:solidFill>
-              <a:srgbClr val="C3C2BA"/>
-            </a:solidFill>
-            <a:prstDash val="solid"/>
-          </a:ln>
-        </p:spPr>
+              <a:rPr lang="en-US" sz="1700" i="1" dirty="0">
+                <a:solidFill>
+                  <a:srgbClr val="9AA0A8"/>
+                </a:solidFill>
+                <a:latin typeface="Cambria" pitchFamily="34" charset="0"/>
+                <a:ea typeface="Cambria" pitchFamily="34" charset="-122"/>
+                <a:cs typeface="Cambria" pitchFamily="34" charset="-120"/>
+              </a:rPr>
+              <a:t>Most hackathon demos have none of this. We built it like it has to work.</a:t>
+            </a:r>
+            <a:endParaRPr lang="en-US" sz="1700" dirty="0"/>
+          </a:p>
+        </p:txBody>
       </p:sp>
       <p:sp>
         <p:nvSpPr>
@@ -3996,262 +5069,31 @@
         </p:nvSpPr>
         <p:spPr>
           <a:xfrm>
-            <a:off x="868680" y="4114800"/>
-            <a:ext cx="2514600" cy="438912"/>
-          </a:xfrm>
-          <a:prstGeom prst="rect">
-            <a:avLst/>
-          </a:prstGeom>
-          <a:noFill/>
-          <a:ln/>
-        </p:spPr>
-        <p:txBody>
-          <a:bodyPr wrap="square" lIns="0" tIns="0" rIns="0" bIns="0" rtlCol="0" anchor="ctr"/>
-          <a:lstStyle/>
-          <a:p>
-            <a:pPr algn="ctr" indent="0" marL="0">
-              <a:buNone/>
-            </a:pPr>
-            <a:r>
-              <a:rPr lang="en-US" sz="1300" b="1" dirty="0">
-                <a:solidFill>
-                  <a:srgbClr val="141619"/>
+            <a:off x="502920" y="6400800"/>
+            <a:ext cx="1828800" cy="274320"/>
+          </a:xfrm>
+          <a:prstGeom prst="rect">
+            <a:avLst/>
+          </a:prstGeom>
+          <a:noFill/>
+          <a:ln/>
+        </p:spPr>
+        <p:txBody>
+          <a:bodyPr wrap="square" lIns="0" tIns="0" rIns="0" bIns="0" rtlCol="0" anchor="ctr"/>
+          <a:lstStyle/>
+          <a:p>
+            <a:pPr indent="0" marL="0">
+              <a:buNone/>
+            </a:pPr>
+            <a:r>
+              <a:rPr lang="en-US" sz="900" spc="200" kern="0" dirty="0">
+                <a:solidFill>
+                  <a:srgbClr val="9AA0A8"/>
                 </a:solidFill>
                 <a:latin typeface="Courier New" pitchFamily="34" charset="0"/>
                 <a:ea typeface="Courier New" pitchFamily="34" charset="-122"/>
                 <a:cs typeface="Courier New" pitchFamily="34" charset="-120"/>
               </a:rPr>
-              <a:t>Recorded file</a:t>
-            </a:r>
-            <a:endParaRPr lang="en-US" sz="1300" dirty="0"/>
-          </a:p>
-        </p:txBody>
-      </p:sp>
-      <p:sp>
-        <p:nvSpPr>
-          <p:cNvPr id="7" name="Shape 5"/>
-          <p:cNvSpPr/>
-          <p:nvPr/>
-        </p:nvSpPr>
-        <p:spPr>
-          <a:xfrm>
-            <a:off x="3566160" y="4114800"/>
-            <a:ext cx="2514600" cy="438912"/>
-          </a:xfrm>
-          <a:prstGeom prst="rect">
-            <a:avLst/>
-          </a:prstGeom>
-          <a:solidFill>
-            <a:srgbClr val="FFFFFF"/>
-          </a:solidFill>
-          <a:ln w="12700">
-            <a:solidFill>
-              <a:srgbClr val="C3C2BA"/>
-            </a:solidFill>
-            <a:prstDash val="solid"/>
-          </a:ln>
-        </p:spPr>
-      </p:sp>
-      <p:sp>
-        <p:nvSpPr>
-          <p:cNvPr id="8" name="Text 6"/>
-          <p:cNvSpPr/>
-          <p:nvPr/>
-        </p:nvSpPr>
-        <p:spPr>
-          <a:xfrm>
-            <a:off x="3566160" y="4114800"/>
-            <a:ext cx="2514600" cy="438912"/>
-          </a:xfrm>
-          <a:prstGeom prst="rect">
-            <a:avLst/>
-          </a:prstGeom>
-          <a:noFill/>
-          <a:ln/>
-        </p:spPr>
-        <p:txBody>
-          <a:bodyPr wrap="square" lIns="0" tIns="0" rIns="0" bIns="0" rtlCol="0" anchor="ctr"/>
-          <a:lstStyle/>
-          <a:p>
-            <a:pPr algn="ctr" indent="0" marL="0">
-              <a:buNone/>
-            </a:pPr>
-            <a:r>
-              <a:rPr lang="en-US" sz="1300" b="1" dirty="0">
-                <a:solidFill>
-                  <a:srgbClr val="141619"/>
-                </a:solidFill>
-                <a:latin typeface="Courier New" pitchFamily="34" charset="0"/>
-                <a:ea typeface="Courier New" pitchFamily="34" charset="-122"/>
-                <a:cs typeface="Courier New" pitchFamily="34" charset="-120"/>
-              </a:rPr>
-              <a:t>Laptop mic</a:t>
-            </a:r>
-            <a:endParaRPr lang="en-US" sz="1300" dirty="0"/>
-          </a:p>
-        </p:txBody>
-      </p:sp>
-      <p:sp>
-        <p:nvSpPr>
-          <p:cNvPr id="9" name="Shape 7"/>
-          <p:cNvSpPr/>
-          <p:nvPr/>
-        </p:nvSpPr>
-        <p:spPr>
-          <a:xfrm>
-            <a:off x="6263640" y="4114800"/>
-            <a:ext cx="2514600" cy="438912"/>
-          </a:xfrm>
-          <a:prstGeom prst="rect">
-            <a:avLst/>
-          </a:prstGeom>
-          <a:solidFill>
-            <a:srgbClr val="FFFFFF"/>
-          </a:solidFill>
-          <a:ln w="12700">
-            <a:solidFill>
-              <a:srgbClr val="D6360F"/>
-            </a:solidFill>
-            <a:prstDash val="solid"/>
-          </a:ln>
-        </p:spPr>
-      </p:sp>
-      <p:sp>
-        <p:nvSpPr>
-          <p:cNvPr id="10" name="Text 8"/>
-          <p:cNvSpPr/>
-          <p:nvPr/>
-        </p:nvSpPr>
-        <p:spPr>
-          <a:xfrm>
-            <a:off x="6263640" y="4114800"/>
-            <a:ext cx="2514600" cy="438912"/>
-          </a:xfrm>
-          <a:prstGeom prst="rect">
-            <a:avLst/>
-          </a:prstGeom>
-          <a:noFill/>
-          <a:ln/>
-        </p:spPr>
-        <p:txBody>
-          <a:bodyPr wrap="square" lIns="0" tIns="0" rIns="0" bIns="0" rtlCol="0" anchor="ctr"/>
-          <a:lstStyle/>
-          <a:p>
-            <a:pPr algn="ctr" indent="0" marL="0">
-              <a:buNone/>
-            </a:pPr>
-            <a:r>
-              <a:rPr lang="en-US" sz="1300" b="1" dirty="0">
-                <a:solidFill>
-                  <a:srgbClr val="D6360F"/>
-                </a:solidFill>
-                <a:latin typeface="Courier New" pitchFamily="34" charset="0"/>
-                <a:ea typeface="Courier New" pitchFamily="34" charset="-122"/>
-                <a:cs typeface="Courier New" pitchFamily="34" charset="-120"/>
-              </a:rPr>
-              <a:t>Custom hardware</a:t>
-            </a:r>
-            <a:endParaRPr lang="en-US" sz="1300" dirty="0"/>
-          </a:p>
-        </p:txBody>
-      </p:sp>
-      <p:sp>
-        <p:nvSpPr>
-          <p:cNvPr id="11" name="Shape 9"/>
-          <p:cNvSpPr/>
-          <p:nvPr/>
-        </p:nvSpPr>
-        <p:spPr>
-          <a:xfrm>
-            <a:off x="8961120" y="4114800"/>
-            <a:ext cx="2514600" cy="438912"/>
-          </a:xfrm>
-          <a:prstGeom prst="rect">
-            <a:avLst/>
-          </a:prstGeom>
-          <a:solidFill>
-            <a:srgbClr val="FFFFFF"/>
-          </a:solidFill>
-          <a:ln w="12700">
-            <a:solidFill>
-              <a:srgbClr val="C3C2BA"/>
-            </a:solidFill>
-            <a:prstDash val="solid"/>
-          </a:ln>
-        </p:spPr>
-      </p:sp>
-      <p:sp>
-        <p:nvSpPr>
-          <p:cNvPr id="12" name="Text 10"/>
-          <p:cNvSpPr/>
-          <p:nvPr/>
-        </p:nvSpPr>
-        <p:spPr>
-          <a:xfrm>
-            <a:off x="8961120" y="4114800"/>
-            <a:ext cx="2514600" cy="438912"/>
-          </a:xfrm>
-          <a:prstGeom prst="rect">
-            <a:avLst/>
-          </a:prstGeom>
-          <a:noFill/>
-          <a:ln/>
-        </p:spPr>
-        <p:txBody>
-          <a:bodyPr wrap="square" lIns="0" tIns="0" rIns="0" bIns="0" rtlCol="0" anchor="ctr"/>
-          <a:lstStyle/>
-          <a:p>
-            <a:pPr algn="ctr" indent="0" marL="0">
-              <a:buNone/>
-            </a:pPr>
-            <a:r>
-              <a:rPr lang="en-US" sz="1300" b="1" dirty="0">
-                <a:solidFill>
-                  <a:srgbClr val="141619"/>
-                </a:solidFill>
-                <a:latin typeface="Courier New" pitchFamily="34" charset="0"/>
-                <a:ea typeface="Courier New" pitchFamily="34" charset="-122"/>
-                <a:cs typeface="Courier New" pitchFamily="34" charset="-120"/>
-              </a:rPr>
-              <a:t>Phone (WiFi)</a:t>
-            </a:r>
-            <a:endParaRPr lang="en-US" sz="1300" dirty="0"/>
-          </a:p>
-        </p:txBody>
-      </p:sp>
-      <p:sp>
-        <p:nvSpPr>
-          <p:cNvPr id="13" name="Text 11"/>
-          <p:cNvSpPr/>
-          <p:nvPr/>
-        </p:nvSpPr>
-        <p:spPr>
-          <a:xfrm>
-            <a:off x="502920" y="6400800"/>
-            <a:ext cx="1828800" cy="274320"/>
-          </a:xfrm>
-          <a:prstGeom prst="rect">
-            <a:avLst/>
-          </a:prstGeom>
-          <a:noFill/>
-          <a:ln/>
-        </p:spPr>
-        <p:txBody>
-          <a:bodyPr wrap="square" lIns="0" tIns="0" rIns="0" bIns="0" rtlCol="0" anchor="ctr"/>
-          <a:lstStyle/>
-          <a:p>
-            <a:pPr indent="0" marL="0">
-              <a:buNone/>
-            </a:pPr>
-            <a:r>
-              <a:rPr lang="en-US" sz="900" spc="200" kern="0" dirty="0">
-                <a:solidFill>
-                  <a:srgbClr val="8E939A"/>
-                </a:solidFill>
-                <a:latin typeface="Courier New" pitchFamily="34" charset="0"/>
-                <a:ea typeface="Courier New" pitchFamily="34" charset="-122"/>
-                <a:cs typeface="Courier New" pitchFamily="34" charset="-120"/>
-              </a:rPr>
               <a:t>PULSO</a:t>
             </a:r>
             <a:endParaRPr lang="en-US" sz="900" dirty="0"/>
@@ -4260,7 +5102,7 @@
       </p:sp>
       <p:sp>
         <p:nvSpPr>
-          <p:cNvPr id="14" name="Text 12"/>
+          <p:cNvPr id="7" name="Text 5"/>
           <p:cNvSpPr/>
           <p:nvPr/>
         </p:nvSpPr>
@@ -4285,7 +5127,7 @@
             <a:r>
               <a:rPr lang="en-US" sz="900" dirty="0">
                 <a:solidFill>
-                  <a:srgbClr val="8E939A"/>
+                  <a:srgbClr val="9AA0A8"/>
                 </a:solidFill>
                 <a:latin typeface="Courier New" pitchFamily="34" charset="0"/>
                 <a:ea typeface="Courier New" pitchFamily="34" charset="-122"/>
@@ -4369,7 +5211,7 @@
                 <a:ea typeface="Courier New" pitchFamily="34" charset="-122"/>
                 <a:cs typeface="Courier New" pitchFamily="34" charset="-120"/>
               </a:rPr>
-              <a:t>BUSINESS MODEL</a:t>
+              <a:t>HARDWARE</a:t>
             </a:r>
             <a:endParaRPr lang="en-US" sz="1200" dirty="0"/>
           </a:p>
@@ -4384,7 +5226,7 @@
         <p:spPr>
           <a:xfrm>
             <a:off x="868680" y="1188720"/>
-            <a:ext cx="10058400" cy="1371600"/>
+            <a:ext cx="9601200" cy="1463040"/>
           </a:xfrm>
           <a:prstGeom prst="rect">
             <a:avLst/>
@@ -4400,7 +5242,7 @@
               <a:buNone/>
             </a:pPr>
             <a:r>
-              <a:rPr lang="en-US" sz="3300" dirty="0">
+              <a:rPr lang="en-US" sz="3800" dirty="0">
                 <a:solidFill>
                   <a:srgbClr val="141619"/>
                 </a:solidFill>
@@ -4408,16 +5250,16 @@
                 <a:ea typeface="Cambria" pitchFamily="34" charset="-122"/>
                 <a:cs typeface="Cambria" pitchFamily="34" charset="-120"/>
               </a:rPr>
-              <a:t>Sell hardware near cost.</a:t>
-            </a:r>
-            <a:endParaRPr lang="en-US" sz="3300" dirty="0"/>
-          </a:p>
-          <a:p>
-            <a:pPr indent="0" marL="0">
-              <a:buNone/>
-            </a:pPr>
-            <a:r>
-              <a:rPr lang="en-US" sz="3300" dirty="0">
+              <a:t>Under $20 in parts.</a:t>
+            </a:r>
+            <a:endParaRPr lang="en-US" sz="3800" dirty="0"/>
+          </a:p>
+          <a:p>
+            <a:pPr indent="0" marL="0">
+              <a:buNone/>
+            </a:pPr>
+            <a:r>
+              <a:rPr lang="en-US" sz="3800" dirty="0">
                 <a:solidFill>
                   <a:srgbClr val="141619"/>
                 </a:solidFill>
@@ -4425,22 +5267,64 @@
                 <a:ea typeface="Cambria" pitchFamily="34" charset="-122"/>
                 <a:cs typeface="Cambria" pitchFamily="34" charset="-120"/>
               </a:rPr>
-              <a:t>Charge the program, not the worker.</a:t>
-            </a:r>
-            <a:endParaRPr lang="en-US" sz="3300" dirty="0"/>
-          </a:p>
-        </p:txBody>
-      </p:sp>
-      <p:sp>
-        <p:nvSpPr>
-          <p:cNvPr id="4" name="Shape 2"/>
-          <p:cNvSpPr/>
-          <p:nvPr/>
-        </p:nvSpPr>
-        <p:spPr>
-          <a:xfrm>
-            <a:off x="868680" y="2880360"/>
-            <a:ext cx="5120640" cy="1691640"/>
+              <a:t>Same brain as the software.</a:t>
+            </a:r>
+            <a:endParaRPr lang="en-US" sz="3800" dirty="0"/>
+          </a:p>
+        </p:txBody>
+      </p:sp>
+      <p:sp>
+        <p:nvSpPr>
+          <p:cNvPr id="4" name="Text 2"/>
+          <p:cNvSpPr/>
+          <p:nvPr/>
+        </p:nvSpPr>
+        <p:spPr>
+          <a:xfrm>
+            <a:off x="868680" y="2788920"/>
+            <a:ext cx="10058400" cy="914400"/>
+          </a:xfrm>
+          <a:prstGeom prst="rect">
+            <a:avLst/>
+          </a:prstGeom>
+          <a:noFill/>
+          <a:ln/>
+        </p:spPr>
+        <p:txBody>
+          <a:bodyPr wrap="square" lIns="0" tIns="0" rIns="0" bIns="0" rtlCol="0" anchor="ctr"/>
+          <a:lstStyle/>
+          <a:p>
+            <a:pPr indent="0" marL="0">
+              <a:lnSpc>
+                <a:spcPct val="130000"/>
+              </a:lnSpc>
+              <a:buNone/>
+            </a:pPr>
+            <a:r>
+              <a:rPr lang="en-US" sz="1500" dirty="0">
+                <a:solidFill>
+                  <a:srgbClr val="5B6068"/>
+                </a:solidFill>
+                <a:latin typeface="Calibri" pitchFamily="34" charset="0"/>
+                <a:ea typeface="Calibri" pitchFamily="34" charset="-122"/>
+                <a:cs typeface="Calibri" pitchFamily="34" charset="-120"/>
+              </a:rPr>
+              <a:t>A cheap microphone chip picks up the sound. Swap in a phone, a laptop, or a recorded file instead — everything else stays exactly the same.</a:t>
+            </a:r>
+            <a:endParaRPr lang="en-US" sz="1500" dirty="0"/>
+          </a:p>
+        </p:txBody>
+      </p:sp>
+      <p:sp>
+        <p:nvSpPr>
+          <p:cNvPr id="5" name="Shape 3"/>
+          <p:cNvSpPr/>
+          <p:nvPr/>
+        </p:nvSpPr>
+        <p:spPr>
+          <a:xfrm>
+            <a:off x="868680" y="4114800"/>
+            <a:ext cx="2514600" cy="438912"/>
           </a:xfrm>
           <a:prstGeom prst="rect">
             <a:avLst/>
@@ -4458,82 +5342,40 @@
       </p:sp>
       <p:sp>
         <p:nvSpPr>
-          <p:cNvPr id="5" name="Text 3"/>
-          <p:cNvSpPr/>
-          <p:nvPr/>
-        </p:nvSpPr>
-        <p:spPr>
-          <a:xfrm>
-            <a:off x="1078992" y="3081528"/>
-            <a:ext cx="4572000" cy="256032"/>
-          </a:xfrm>
-          <a:prstGeom prst="rect">
-            <a:avLst/>
-          </a:prstGeom>
-          <a:noFill/>
-          <a:ln/>
-        </p:spPr>
-        <p:txBody>
-          <a:bodyPr wrap="square" lIns="0" tIns="0" rIns="0" bIns="0" rtlCol="0" anchor="ctr"/>
-          <a:lstStyle/>
-          <a:p>
-            <a:pPr indent="0" marL="0">
-              <a:buNone/>
-            </a:pPr>
-            <a:r>
-              <a:rPr lang="en-US" sz="1050" b="1" spc="150" kern="0" dirty="0">
-                <a:solidFill>
-                  <a:srgbClr val="8E939A"/>
+          <p:cNvPr id="6" name="Text 4"/>
+          <p:cNvSpPr/>
+          <p:nvPr/>
+        </p:nvSpPr>
+        <p:spPr>
+          <a:xfrm>
+            <a:off x="868680" y="4114800"/>
+            <a:ext cx="2514600" cy="438912"/>
+          </a:xfrm>
+          <a:prstGeom prst="rect">
+            <a:avLst/>
+          </a:prstGeom>
+          <a:noFill/>
+          <a:ln/>
+        </p:spPr>
+        <p:txBody>
+          <a:bodyPr wrap="square" lIns="0" tIns="0" rIns="0" bIns="0" rtlCol="0" anchor="ctr"/>
+          <a:lstStyle/>
+          <a:p>
+            <a:pPr algn="ctr" indent="0" marL="0">
+              <a:buNone/>
+            </a:pPr>
+            <a:r>
+              <a:rPr lang="en-US" sz="1300" b="1" dirty="0">
+                <a:solidFill>
+                  <a:srgbClr val="141619"/>
                 </a:solidFill>
                 <a:latin typeface="Courier New" pitchFamily="34" charset="0"/>
                 <a:ea typeface="Courier New" pitchFamily="34" charset="-122"/>
                 <a:cs typeface="Courier New" pitchFamily="34" charset="-120"/>
               </a:rPr>
-              <a:t>WHO PAYS</a:t>
-            </a:r>
-            <a:endParaRPr lang="en-US" sz="1050" dirty="0"/>
-          </a:p>
-        </p:txBody>
-      </p:sp>
-      <p:sp>
-        <p:nvSpPr>
-          <p:cNvPr id="6" name="Text 4"/>
-          <p:cNvSpPr/>
-          <p:nvPr/>
-        </p:nvSpPr>
-        <p:spPr>
-          <a:xfrm>
-            <a:off x="1078992" y="3410712"/>
-            <a:ext cx="4709160" cy="1051560"/>
-          </a:xfrm>
-          <a:prstGeom prst="rect">
-            <a:avLst/>
-          </a:prstGeom>
-          <a:noFill/>
-          <a:ln/>
-        </p:spPr>
-        <p:txBody>
-          <a:bodyPr wrap="square" lIns="0" tIns="0" rIns="0" bIns="0" rtlCol="0" anchor="t"/>
-          <a:lstStyle/>
-          <a:p>
-            <a:pPr indent="0" marL="0">
-              <a:lnSpc>
-                <a:spcPct val="130000"/>
-              </a:lnSpc>
-              <a:buNone/>
-            </a:pPr>
-            <a:r>
-              <a:rPr lang="en-US" sz="1350" dirty="0">
-                <a:solidFill>
-                  <a:srgbClr val="141619"/>
-                </a:solidFill>
-                <a:latin typeface="Calibri" pitchFamily="34" charset="0"/>
-                <a:ea typeface="Calibri" pitchFamily="34" charset="-122"/>
-                <a:cs typeface="Calibri" pitchFamily="34" charset="-120"/>
-              </a:rPr>
-              <a:t>Not the health worker — they hold no budget. The buyer is the NGO or ministry that already funds and equips them.</a:t>
-            </a:r>
-            <a:endParaRPr lang="en-US" sz="1350" dirty="0"/>
+              <a:t>Recorded file</a:t>
+            </a:r>
+            <a:endParaRPr lang="en-US" sz="1300" dirty="0"/>
           </a:p>
         </p:txBody>
       </p:sp>
@@ -4545,8 +5387,8 @@
         </p:nvSpPr>
         <p:spPr>
           <a:xfrm>
-            <a:off x="6217920" y="2880360"/>
-            <a:ext cx="5120640" cy="1691640"/>
+            <a:off x="3566160" y="4114800"/>
+            <a:ext cx="2514600" cy="438912"/>
           </a:xfrm>
           <a:prstGeom prst="rect">
             <a:avLst/>
@@ -4554,7 +5396,71 @@
           <a:solidFill>
             <a:srgbClr val="FFFFFF"/>
           </a:solidFill>
-          <a:ln w="19050">
+          <a:ln w="12700">
+            <a:solidFill>
+              <a:srgbClr val="C3C2BA"/>
+            </a:solidFill>
+            <a:prstDash val="solid"/>
+          </a:ln>
+        </p:spPr>
+      </p:sp>
+      <p:sp>
+        <p:nvSpPr>
+          <p:cNvPr id="8" name="Text 6"/>
+          <p:cNvSpPr/>
+          <p:nvPr/>
+        </p:nvSpPr>
+        <p:spPr>
+          <a:xfrm>
+            <a:off x="3566160" y="4114800"/>
+            <a:ext cx="2514600" cy="438912"/>
+          </a:xfrm>
+          <a:prstGeom prst="rect">
+            <a:avLst/>
+          </a:prstGeom>
+          <a:noFill/>
+          <a:ln/>
+        </p:spPr>
+        <p:txBody>
+          <a:bodyPr wrap="square" lIns="0" tIns="0" rIns="0" bIns="0" rtlCol="0" anchor="ctr"/>
+          <a:lstStyle/>
+          <a:p>
+            <a:pPr algn="ctr" indent="0" marL="0">
+              <a:buNone/>
+            </a:pPr>
+            <a:r>
+              <a:rPr lang="en-US" sz="1300" b="1" dirty="0">
+                <a:solidFill>
+                  <a:srgbClr val="141619"/>
+                </a:solidFill>
+                <a:latin typeface="Courier New" pitchFamily="34" charset="0"/>
+                <a:ea typeface="Courier New" pitchFamily="34" charset="-122"/>
+                <a:cs typeface="Courier New" pitchFamily="34" charset="-120"/>
+              </a:rPr>
+              <a:t>Laptop mic</a:t>
+            </a:r>
+            <a:endParaRPr lang="en-US" sz="1300" dirty="0"/>
+          </a:p>
+        </p:txBody>
+      </p:sp>
+      <p:sp>
+        <p:nvSpPr>
+          <p:cNvPr id="9" name="Shape 7"/>
+          <p:cNvSpPr/>
+          <p:nvPr/>
+        </p:nvSpPr>
+        <p:spPr>
+          <a:xfrm>
+            <a:off x="6263640" y="4114800"/>
+            <a:ext cx="2514600" cy="438912"/>
+          </a:xfrm>
+          <a:prstGeom prst="rect">
+            <a:avLst/>
+          </a:prstGeom>
+          <a:solidFill>
+            <a:srgbClr val="FFFFFF"/>
+          </a:solidFill>
+          <a:ln w="12700">
             <a:solidFill>
               <a:srgbClr val="D6360F"/>
             </a:solidFill>
@@ -4564,30 +5470,30 @@
       </p:sp>
       <p:sp>
         <p:nvSpPr>
-          <p:cNvPr id="8" name="Text 6"/>
-          <p:cNvSpPr/>
-          <p:nvPr/>
-        </p:nvSpPr>
-        <p:spPr>
-          <a:xfrm>
-            <a:off x="6428232" y="3081528"/>
-            <a:ext cx="4572000" cy="256032"/>
-          </a:xfrm>
-          <a:prstGeom prst="rect">
-            <a:avLst/>
-          </a:prstGeom>
-          <a:noFill/>
-          <a:ln/>
-        </p:spPr>
-        <p:txBody>
-          <a:bodyPr wrap="square" lIns="0" tIns="0" rIns="0" bIns="0" rtlCol="0" anchor="ctr"/>
-          <a:lstStyle/>
-          <a:p>
-            <a:pPr indent="0" marL="0">
-              <a:buNone/>
-            </a:pPr>
-            <a:r>
-              <a:rPr lang="en-US" sz="1050" b="1" spc="150" kern="0" dirty="0">
+          <p:cNvPr id="10" name="Text 8"/>
+          <p:cNvSpPr/>
+          <p:nvPr/>
+        </p:nvSpPr>
+        <p:spPr>
+          <a:xfrm>
+            <a:off x="6263640" y="4114800"/>
+            <a:ext cx="2514600" cy="438912"/>
+          </a:xfrm>
+          <a:prstGeom prst="rect">
+            <a:avLst/>
+          </a:prstGeom>
+          <a:noFill/>
+          <a:ln/>
+        </p:spPr>
+        <p:txBody>
+          <a:bodyPr wrap="square" lIns="0" tIns="0" rIns="0" bIns="0" rtlCol="0" anchor="ctr"/>
+          <a:lstStyle/>
+          <a:p>
+            <a:pPr algn="ctr" indent="0" marL="0">
+              <a:buNone/>
+            </a:pPr>
+            <a:r>
+              <a:rPr lang="en-US" sz="1300" b="1" dirty="0">
                 <a:solidFill>
                   <a:srgbClr val="D6360F"/>
                 </a:solidFill>
@@ -4595,129 +5501,109 @@
                 <a:ea typeface="Courier New" pitchFamily="34" charset="-122"/>
                 <a:cs typeface="Courier New" pitchFamily="34" charset="-120"/>
               </a:rPr>
-              <a:t>HOW WE MAKE MONEY</a:t>
-            </a:r>
-            <a:endParaRPr lang="en-US" sz="1050" dirty="0"/>
-          </a:p>
-        </p:txBody>
-      </p:sp>
-      <p:sp>
-        <p:nvSpPr>
-          <p:cNvPr id="9" name="Text 7"/>
-          <p:cNvSpPr/>
-          <p:nvPr/>
-        </p:nvSpPr>
-        <p:spPr>
-          <a:xfrm>
-            <a:off x="6428232" y="3410712"/>
-            <a:ext cx="4709160" cy="1051560"/>
-          </a:xfrm>
-          <a:prstGeom prst="rect">
-            <a:avLst/>
-          </a:prstGeom>
-          <a:noFill/>
-          <a:ln/>
-        </p:spPr>
-        <p:txBody>
-          <a:bodyPr wrap="square" lIns="0" tIns="0" rIns="0" bIns="0" rtlCol="0" anchor="t"/>
-          <a:lstStyle/>
-          <a:p>
-            <a:pPr indent="0" marL="0">
-              <a:lnSpc>
-                <a:spcPct val="130000"/>
-              </a:lnSpc>
-              <a:buNone/>
-            </a:pPr>
-            <a:r>
-              <a:rPr lang="en-US" sz="1350" dirty="0">
+              <a:t>Custom hardware</a:t>
+            </a:r>
+            <a:endParaRPr lang="en-US" sz="1300" dirty="0"/>
+          </a:p>
+        </p:txBody>
+      </p:sp>
+      <p:sp>
+        <p:nvSpPr>
+          <p:cNvPr id="11" name="Shape 9"/>
+          <p:cNvSpPr/>
+          <p:nvPr/>
+        </p:nvSpPr>
+        <p:spPr>
+          <a:xfrm>
+            <a:off x="8961120" y="4114800"/>
+            <a:ext cx="2514600" cy="438912"/>
+          </a:xfrm>
+          <a:prstGeom prst="rect">
+            <a:avLst/>
+          </a:prstGeom>
+          <a:solidFill>
+            <a:srgbClr val="FFFFFF"/>
+          </a:solidFill>
+          <a:ln w="12700">
+            <a:solidFill>
+              <a:srgbClr val="C3C2BA"/>
+            </a:solidFill>
+            <a:prstDash val="solid"/>
+          </a:ln>
+        </p:spPr>
+      </p:sp>
+      <p:sp>
+        <p:nvSpPr>
+          <p:cNvPr id="12" name="Text 10"/>
+          <p:cNvSpPr/>
+          <p:nvPr/>
+        </p:nvSpPr>
+        <p:spPr>
+          <a:xfrm>
+            <a:off x="8961120" y="4114800"/>
+            <a:ext cx="2514600" cy="438912"/>
+          </a:xfrm>
+          <a:prstGeom prst="rect">
+            <a:avLst/>
+          </a:prstGeom>
+          <a:noFill/>
+          <a:ln/>
+        </p:spPr>
+        <p:txBody>
+          <a:bodyPr wrap="square" lIns="0" tIns="0" rIns="0" bIns="0" rtlCol="0" anchor="ctr"/>
+          <a:lstStyle/>
+          <a:p>
+            <a:pPr algn="ctr" indent="0" marL="0">
+              <a:buNone/>
+            </a:pPr>
+            <a:r>
+              <a:rPr lang="en-US" sz="1300" b="1" dirty="0">
                 <a:solidFill>
                   <a:srgbClr val="141619"/>
-                </a:solidFill>
-                <a:latin typeface="Calibri" pitchFamily="34" charset="0"/>
-                <a:ea typeface="Calibri" pitchFamily="34" charset="-122"/>
-                <a:cs typeface="Calibri" pitchFamily="34" charset="-120"/>
-              </a:rPr>
-              <a:t>Hardware at near-cost, wide reach. A program-level reporting subscription, billed to the NGO or ministry.</a:t>
-            </a:r>
-            <a:endParaRPr lang="en-US" sz="1350" dirty="0"/>
-          </a:p>
-        </p:txBody>
-      </p:sp>
-      <p:sp>
-        <p:nvSpPr>
-          <p:cNvPr id="10" name="Text 8"/>
-          <p:cNvSpPr/>
-          <p:nvPr/>
-        </p:nvSpPr>
-        <p:spPr>
-          <a:xfrm>
-            <a:off x="868680" y="4892040"/>
-            <a:ext cx="10469880" cy="731520"/>
-          </a:xfrm>
-          <a:prstGeom prst="rect">
-            <a:avLst/>
-          </a:prstGeom>
-          <a:noFill/>
-          <a:ln/>
-        </p:spPr>
-        <p:txBody>
-          <a:bodyPr wrap="square" lIns="0" tIns="0" rIns="0" bIns="0" rtlCol="0" anchor="ctr"/>
-          <a:lstStyle/>
-          <a:p>
-            <a:pPr indent="0" marL="0">
-              <a:lnSpc>
-                <a:spcPct val="130000"/>
-              </a:lnSpc>
-              <a:buNone/>
-            </a:pPr>
-            <a:r>
-              <a:rPr lang="en-US" sz="1550" i="1" dirty="0">
-                <a:solidFill>
-                  <a:srgbClr val="141619"/>
-                </a:solidFill>
-                <a:latin typeface="Cambria" pitchFamily="34" charset="0"/>
-                <a:ea typeface="Cambria" pitchFamily="34" charset="-122"/>
-                <a:cs typeface="Cambria" pitchFamily="34" charset="-120"/>
-              </a:rPr>
-              <a:t>3.8M community health workers, 98+ countries (WHO) — staying “not a medical device” is what lets us reach them now, not in three years.</a:t>
-            </a:r>
-            <a:endParaRPr lang="en-US" sz="1550" dirty="0"/>
-          </a:p>
-        </p:txBody>
-      </p:sp>
-      <p:sp>
-        <p:nvSpPr>
-          <p:cNvPr id="11" name="Text 9"/>
-          <p:cNvSpPr/>
-          <p:nvPr/>
-        </p:nvSpPr>
-        <p:spPr>
-          <a:xfrm>
-            <a:off x="502920" y="6400800"/>
-            <a:ext cx="1828800" cy="274320"/>
-          </a:xfrm>
-          <a:prstGeom prst="rect">
-            <a:avLst/>
-          </a:prstGeom>
-          <a:noFill/>
-          <a:ln/>
-        </p:spPr>
-        <p:txBody>
-          <a:bodyPr wrap="square" lIns="0" tIns="0" rIns="0" bIns="0" rtlCol="0" anchor="ctr"/>
-          <a:lstStyle/>
-          <a:p>
-            <a:pPr indent="0" marL="0">
-              <a:buNone/>
-            </a:pPr>
-            <a:r>
-              <a:rPr lang="en-US" sz="900" spc="200" kern="0" dirty="0">
-                <a:solidFill>
-                  <a:srgbClr val="8E939A"/>
                 </a:solidFill>
                 <a:latin typeface="Courier New" pitchFamily="34" charset="0"/>
                 <a:ea typeface="Courier New" pitchFamily="34" charset="-122"/>
                 <a:cs typeface="Courier New" pitchFamily="34" charset="-120"/>
               </a:rPr>
+              <a:t>Phone (WiFi)</a:t>
+            </a:r>
+            <a:endParaRPr lang="en-US" sz="1300" dirty="0"/>
+          </a:p>
+        </p:txBody>
+      </p:sp>
+      <p:sp>
+        <p:nvSpPr>
+          <p:cNvPr id="13" name="Text 11"/>
+          <p:cNvSpPr/>
+          <p:nvPr/>
+        </p:nvSpPr>
+        <p:spPr>
+          <a:xfrm>
+            <a:off x="502920" y="6400800"/>
+            <a:ext cx="1828800" cy="274320"/>
+          </a:xfrm>
+          <a:prstGeom prst="rect">
+            <a:avLst/>
+          </a:prstGeom>
+          <a:noFill/>
+          <a:ln/>
+        </p:spPr>
+        <p:txBody>
+          <a:bodyPr wrap="square" lIns="0" tIns="0" rIns="0" bIns="0" rtlCol="0" anchor="ctr"/>
+          <a:lstStyle/>
+          <a:p>
+            <a:pPr indent="0" marL="0">
+              <a:buNone/>
+            </a:pPr>
+            <a:r>
+              <a:rPr lang="en-US" sz="900" spc="200" kern="0" dirty="0">
+                <a:solidFill>
+                  <a:srgbClr val="8E939A"/>
+                </a:solidFill>
+                <a:latin typeface="Courier New" pitchFamily="34" charset="0"/>
+                <a:ea typeface="Courier New" pitchFamily="34" charset="-122"/>
+                <a:cs typeface="Courier New" pitchFamily="34" charset="-120"/>
+              </a:rPr>
               <a:t>PULSO</a:t>
             </a:r>
             <a:endParaRPr lang="en-US" sz="900" dirty="0"/>
@@ -4726,7 +5612,7 @@
       </p:sp>
       <p:sp>
         <p:nvSpPr>
-          <p:cNvPr id="12" name="Text 10"/>
+          <p:cNvPr id="14" name="Text 12"/>
           <p:cNvSpPr/>
           <p:nvPr/>
         </p:nvSpPr>
@@ -4811,7 +5697,7 @@
         <p:spPr>
           <a:xfrm>
             <a:off x="868680" y="640080"/>
-            <a:ext cx="8229600" cy="292608"/>
+            <a:ext cx="5486400" cy="292608"/>
           </a:xfrm>
           <a:prstGeom prst="rect">
             <a:avLst/>
@@ -4835,7 +5721,7 @@
                 <a:ea typeface="Courier New" pitchFamily="34" charset="-122"/>
                 <a:cs typeface="Courier New" pitchFamily="34" charset="-120"/>
               </a:rPr>
-              <a:t>PRICING — THE PLAN, NOT A LIVE CHECKOUT</a:t>
+              <a:t>BUSINESS MODEL</a:t>
             </a:r>
             <a:endParaRPr lang="en-US" sz="1200" dirty="0"/>
           </a:p>
@@ -4850,7 +5736,7 @@
         <p:spPr>
           <a:xfrm>
             <a:off x="868680" y="1188720"/>
-            <a:ext cx="8229600" cy="1371600"/>
+            <a:ext cx="10058400" cy="1371600"/>
           </a:xfrm>
           <a:prstGeom prst="rect">
             <a:avLst/>
@@ -4874,7 +5760,7 @@
                 <a:ea typeface="Cambria" pitchFamily="34" charset="-122"/>
                 <a:cs typeface="Cambria" pitchFamily="34" charset="-120"/>
               </a:rPr>
-              <a:t>Priced to be adopted,</a:t>
+              <a:t>Sell hardware near cost.</a:t>
             </a:r>
             <a:endParaRPr lang="en-US" sz="3300" dirty="0"/>
           </a:p>
@@ -4891,7 +5777,7 @@
                 <a:ea typeface="Cambria" pitchFamily="34" charset="-122"/>
                 <a:cs typeface="Cambria" pitchFamily="34" charset="-120"/>
               </a:rPr>
-              <a:t>not to maximize margin.</a:t>
+              <a:t>Charge the program, not the worker.</a:t>
             </a:r>
             <a:endParaRPr lang="en-US" sz="3300" dirty="0"/>
           </a:p>
@@ -4906,7 +5792,7 @@
         <p:spPr>
           <a:xfrm>
             <a:off x="868680" y="2880360"/>
-            <a:ext cx="3364992" cy="2743200"/>
+            <a:ext cx="5120640" cy="1691640"/>
           </a:xfrm>
           <a:prstGeom prst="rect">
             <a:avLst/>
@@ -4930,24 +5816,24 @@
         </p:nvSpPr>
         <p:spPr>
           <a:xfrm>
-            <a:off x="1069848" y="3063240"/>
-            <a:ext cx="2962656" cy="256032"/>
-          </a:xfrm>
-          <a:prstGeom prst="rect">
-            <a:avLst/>
-          </a:prstGeom>
-          <a:noFill/>
-          <a:ln/>
-        </p:spPr>
-        <p:txBody>
-          <a:bodyPr wrap="square" lIns="0" tIns="0" rIns="0" bIns="0" rtlCol="0" anchor="ctr"/>
-          <a:lstStyle/>
-          <a:p>
-            <a:pPr indent="0" marL="0">
-              <a:buNone/>
-            </a:pPr>
-            <a:r>
-              <a:rPr lang="en-US" sz="1150" b="1" spc="120" kern="0" dirty="0">
+            <a:off x="1078992" y="3081528"/>
+            <a:ext cx="4572000" cy="256032"/>
+          </a:xfrm>
+          <a:prstGeom prst="rect">
+            <a:avLst/>
+          </a:prstGeom>
+          <a:noFill/>
+          <a:ln/>
+        </p:spPr>
+        <p:txBody>
+          <a:bodyPr wrap="square" lIns="0" tIns="0" rIns="0" bIns="0" rtlCol="0" anchor="ctr"/>
+          <a:lstStyle/>
+          <a:p>
+            <a:pPr indent="0" marL="0">
+              <a:buNone/>
+            </a:pPr>
+            <a:r>
+              <a:rPr lang="en-US" sz="1050" b="1" spc="150" kern="0" dirty="0">
                 <a:solidFill>
                   <a:srgbClr val="8E939A"/>
                 </a:solidFill>
@@ -4955,9 +5841,9 @@
                 <a:ea typeface="Courier New" pitchFamily="34" charset="-122"/>
                 <a:cs typeface="Courier New" pitchFamily="34" charset="-120"/>
               </a:rPr>
-              <a:t>PILOT</a:t>
-            </a:r>
-            <a:endParaRPr lang="en-US" sz="1150" dirty="0"/>
+              <a:t>WHO PAYS</a:t>
+            </a:r>
+            <a:endParaRPr lang="en-US" sz="1050" dirty="0"/>
           </a:p>
         </p:txBody>
       </p:sp>
@@ -4969,156 +5855,50 @@
         </p:nvSpPr>
         <p:spPr>
           <a:xfrm>
-            <a:off x="1069848" y="3374136"/>
-            <a:ext cx="2962656" cy="457200"/>
-          </a:xfrm>
-          <a:prstGeom prst="rect">
-            <a:avLst/>
-          </a:prstGeom>
-          <a:noFill/>
-          <a:ln/>
-        </p:spPr>
-        <p:txBody>
-          <a:bodyPr wrap="square" lIns="0" tIns="0" rIns="0" bIns="0" rtlCol="0" anchor="ctr"/>
-          <a:lstStyle/>
-          <a:p>
-            <a:pPr indent="0" marL="0">
-              <a:buNone/>
-            </a:pPr>
-            <a:r>
-              <a:rPr lang="en-US" sz="2600" dirty="0">
+            <a:off x="1078992" y="3410712"/>
+            <a:ext cx="4709160" cy="1051560"/>
+          </a:xfrm>
+          <a:prstGeom prst="rect">
+            <a:avLst/>
+          </a:prstGeom>
+          <a:noFill/>
+          <a:ln/>
+        </p:spPr>
+        <p:txBody>
+          <a:bodyPr wrap="square" lIns="0" tIns="0" rIns="0" bIns="0" rtlCol="0" anchor="t"/>
+          <a:lstStyle/>
+          <a:p>
+            <a:pPr indent="0" marL="0">
+              <a:lnSpc>
+                <a:spcPct val="130000"/>
+              </a:lnSpc>
+              <a:buNone/>
+            </a:pPr>
+            <a:r>
+              <a:rPr lang="en-US" sz="1350" dirty="0">
                 <a:solidFill>
                   <a:srgbClr val="141619"/>
-                </a:solidFill>
-                <a:latin typeface="Cambria" pitchFamily="34" charset="0"/>
-                <a:ea typeface="Cambria" pitchFamily="34" charset="-122"/>
-                <a:cs typeface="Cambria" pitchFamily="34" charset="-120"/>
-              </a:rPr>
-              <a:t>~$45–60</a:t>
-            </a:r>
-            <a:endParaRPr lang="en-US" sz="2600" dirty="0"/>
-          </a:p>
-        </p:txBody>
-      </p:sp>
-      <p:sp>
-        <p:nvSpPr>
-          <p:cNvPr id="7" name="Text 5"/>
-          <p:cNvSpPr/>
-          <p:nvPr/>
-        </p:nvSpPr>
-        <p:spPr>
-          <a:xfrm>
-            <a:off x="1069848" y="3831336"/>
-            <a:ext cx="2962656" cy="320040"/>
-          </a:xfrm>
-          <a:prstGeom prst="rect">
-            <a:avLst/>
-          </a:prstGeom>
-          <a:noFill/>
-          <a:ln/>
-        </p:spPr>
-        <p:txBody>
-          <a:bodyPr wrap="square" lIns="0" tIns="0" rIns="0" bIns="0" rtlCol="0" anchor="t"/>
-          <a:lstStyle/>
-          <a:p>
-            <a:pPr indent="0" marL="0">
-              <a:buNone/>
-            </a:pPr>
-            <a:r>
-              <a:rPr lang="en-US" sz="1050" i="1" dirty="0">
-                <a:solidFill>
-                  <a:srgbClr val="5B6068"/>
                 </a:solidFill>
                 <a:latin typeface="Calibri" pitchFamily="34" charset="0"/>
                 <a:ea typeface="Calibri" pitchFamily="34" charset="-122"/>
                 <a:cs typeface="Calibri" pitchFamily="34" charset="-120"/>
               </a:rPr>
-              <a:t>per kit, near cost</a:t>
-            </a:r>
-            <a:endParaRPr lang="en-US" sz="1050" dirty="0"/>
-          </a:p>
-        </p:txBody>
-      </p:sp>
-      <p:sp>
-        <p:nvSpPr>
-          <p:cNvPr id="8" name="Text 6"/>
-          <p:cNvSpPr/>
-          <p:nvPr/>
-        </p:nvSpPr>
-        <p:spPr>
-          <a:xfrm>
-            <a:off x="1069848" y="4297680"/>
-            <a:ext cx="2962656" cy="1188720"/>
-          </a:xfrm>
-          <a:prstGeom prst="rect">
-            <a:avLst/>
-          </a:prstGeom>
-          <a:noFill/>
-          <a:ln/>
-        </p:spPr>
-        <p:txBody>
-          <a:bodyPr wrap="square" lIns="0" tIns="0" rIns="0" bIns="0" rtlCol="0" anchor="t"/>
-          <a:lstStyle/>
-          <a:p>
-            <a:pPr marL="342900" indent="-342900">
-              <a:lnSpc>
-                <a:spcPct val="120000"/>
-              </a:lnSpc>
-              <a:spcAft>
-                <a:spcPts val="800"/>
-              </a:spcAft>
-              <a:buSzPct val="100000"/>
-              <a:buChar char="•"/>
-            </a:pPr>
-            <a:r>
-              <a:rPr lang="en-US" sz="1150" dirty="0">
-                <a:solidFill>
-                  <a:srgbClr val="141619"/>
-                </a:solidFill>
-                <a:latin typeface="Calibri" pitchFamily="34" charset="0"/>
-                <a:ea typeface="Calibri" pitchFamily="34" charset="-122"/>
-                <a:cs typeface="Calibri" pitchFamily="34" charset="-120"/>
-              </a:rPr>
-              <a:t>One hardware kit</a:t>
-            </a:r>
-            <a:endParaRPr lang="en-US" sz="1150" dirty="0"/>
-          </a:p>
-          <a:p>
-            <a:pPr marL="342900" indent="-342900">
-              <a:lnSpc>
-                <a:spcPct val="120000"/>
-              </a:lnSpc>
-              <a:spcAft>
-                <a:spcPts val="800"/>
-              </a:spcAft>
-              <a:buSzPct val="100000"/>
-              <a:buChar char="•"/>
-            </a:pPr>
-            <a:r>
-              <a:rPr lang="en-US" sz="1150" dirty="0">
-                <a:solidFill>
-                  <a:srgbClr val="141619"/>
-                </a:solidFill>
-                <a:latin typeface="Calibri" pitchFamily="34" charset="0"/>
-                <a:ea typeface="Calibri" pitchFamily="34" charset="-122"/>
-                <a:cs typeface="Calibri" pitchFamily="34" charset="-120"/>
-              </a:rPr>
-              <a:t>For one health post to try it</a:t>
-            </a:r>
-            <a:endParaRPr lang="en-US" sz="1150" dirty="0"/>
-          </a:p>
-        </p:txBody>
-      </p:sp>
-      <p:sp>
-        <p:nvSpPr>
-          <p:cNvPr id="9" name="Shape 7"/>
-          <p:cNvSpPr/>
-          <p:nvPr/>
-        </p:nvSpPr>
-        <p:spPr>
-          <a:xfrm>
-            <a:off x="4480560" y="2880360"/>
-            <a:ext cx="3364992" cy="2743200"/>
+              <a:t>Not the health worker — they hold no budget. The buyer is the NGO or ministry that already funds and equips them.</a:t>
+            </a:r>
+            <a:endParaRPr lang="en-US" sz="1350" dirty="0"/>
+          </a:p>
+        </p:txBody>
+      </p:sp>
+      <p:sp>
+        <p:nvSpPr>
+          <p:cNvPr id="7" name="Shape 5"/>
+          <p:cNvSpPr/>
+          <p:nvPr/>
+        </p:nvSpPr>
+        <p:spPr>
+          <a:xfrm>
+            <a:off x="6217920" y="2880360"/>
+            <a:ext cx="5120640" cy="1691640"/>
           </a:xfrm>
           <a:prstGeom prst="rect">
             <a:avLst/>
@@ -5136,30 +5916,30 @@
       </p:sp>
       <p:sp>
         <p:nvSpPr>
-          <p:cNvPr id="10" name="Text 8"/>
-          <p:cNvSpPr/>
-          <p:nvPr/>
-        </p:nvSpPr>
-        <p:spPr>
-          <a:xfrm>
-            <a:off x="4681728" y="3063240"/>
-            <a:ext cx="2962656" cy="256032"/>
-          </a:xfrm>
-          <a:prstGeom prst="rect">
-            <a:avLst/>
-          </a:prstGeom>
-          <a:noFill/>
-          <a:ln/>
-        </p:spPr>
-        <p:txBody>
-          <a:bodyPr wrap="square" lIns="0" tIns="0" rIns="0" bIns="0" rtlCol="0" anchor="ctr"/>
-          <a:lstStyle/>
-          <a:p>
-            <a:pPr indent="0" marL="0">
-              <a:buNone/>
-            </a:pPr>
-            <a:r>
-              <a:rPr lang="en-US" sz="1150" b="1" spc="120" kern="0" dirty="0">
+          <p:cNvPr id="8" name="Text 6"/>
+          <p:cNvSpPr/>
+          <p:nvPr/>
+        </p:nvSpPr>
+        <p:spPr>
+          <a:xfrm>
+            <a:off x="6428232" y="3081528"/>
+            <a:ext cx="4572000" cy="256032"/>
+          </a:xfrm>
+          <a:prstGeom prst="rect">
+            <a:avLst/>
+          </a:prstGeom>
+          <a:noFill/>
+          <a:ln/>
+        </p:spPr>
+        <p:txBody>
+          <a:bodyPr wrap="square" lIns="0" tIns="0" rIns="0" bIns="0" rtlCol="0" anchor="ctr"/>
+          <a:lstStyle/>
+          <a:p>
+            <a:pPr indent="0" marL="0">
+              <a:buNone/>
+            </a:pPr>
+            <a:r>
+              <a:rPr lang="en-US" sz="1050" b="1" spc="150" kern="0" dirty="0">
                 <a:solidFill>
                   <a:srgbClr val="D6360F"/>
                 </a:solidFill>
@@ -5167,38 +5947,83 @@
                 <a:ea typeface="Courier New" pitchFamily="34" charset="-122"/>
                 <a:cs typeface="Courier New" pitchFamily="34" charset="-120"/>
               </a:rPr>
-              <a:t>PROGRAM</a:t>
-            </a:r>
-            <a:endParaRPr lang="en-US" sz="1150" dirty="0"/>
-          </a:p>
-        </p:txBody>
-      </p:sp>
-      <p:sp>
-        <p:nvSpPr>
-          <p:cNvPr id="11" name="Text 9"/>
-          <p:cNvSpPr/>
-          <p:nvPr/>
-        </p:nvSpPr>
-        <p:spPr>
-          <a:xfrm>
-            <a:off x="4681728" y="3374136"/>
-            <a:ext cx="2962656" cy="457200"/>
-          </a:xfrm>
-          <a:prstGeom prst="rect">
-            <a:avLst/>
-          </a:prstGeom>
-          <a:noFill/>
-          <a:ln/>
-        </p:spPr>
-        <p:txBody>
-          <a:bodyPr wrap="square" lIns="0" tIns="0" rIns="0" bIns="0" rtlCol="0" anchor="ctr"/>
-          <a:lstStyle/>
-          <a:p>
-            <a:pPr indent="0" marL="0">
-              <a:buNone/>
-            </a:pPr>
-            <a:r>
-              <a:rPr lang="en-US" sz="2600" dirty="0">
+              <a:t>HOW WE MAKE MONEY</a:t>
+            </a:r>
+            <a:endParaRPr lang="en-US" sz="1050" dirty="0"/>
+          </a:p>
+        </p:txBody>
+      </p:sp>
+      <p:sp>
+        <p:nvSpPr>
+          <p:cNvPr id="9" name="Text 7"/>
+          <p:cNvSpPr/>
+          <p:nvPr/>
+        </p:nvSpPr>
+        <p:spPr>
+          <a:xfrm>
+            <a:off x="6428232" y="3410712"/>
+            <a:ext cx="4709160" cy="1051560"/>
+          </a:xfrm>
+          <a:prstGeom prst="rect">
+            <a:avLst/>
+          </a:prstGeom>
+          <a:noFill/>
+          <a:ln/>
+        </p:spPr>
+        <p:txBody>
+          <a:bodyPr wrap="square" lIns="0" tIns="0" rIns="0" bIns="0" rtlCol="0" anchor="t"/>
+          <a:lstStyle/>
+          <a:p>
+            <a:pPr indent="0" marL="0">
+              <a:lnSpc>
+                <a:spcPct val="130000"/>
+              </a:lnSpc>
+              <a:buNone/>
+            </a:pPr>
+            <a:r>
+              <a:rPr lang="en-US" sz="1350" dirty="0">
+                <a:solidFill>
+                  <a:srgbClr val="141619"/>
+                </a:solidFill>
+                <a:latin typeface="Calibri" pitchFamily="34" charset="0"/>
+                <a:ea typeface="Calibri" pitchFamily="34" charset="-122"/>
+                <a:cs typeface="Calibri" pitchFamily="34" charset="-120"/>
+              </a:rPr>
+              <a:t>Hardware at near-cost, wide reach. A program-level reporting subscription, billed to the NGO or ministry.</a:t>
+            </a:r>
+            <a:endParaRPr lang="en-US" sz="1350" dirty="0"/>
+          </a:p>
+        </p:txBody>
+      </p:sp>
+      <p:sp>
+        <p:nvSpPr>
+          <p:cNvPr id="10" name="Text 8"/>
+          <p:cNvSpPr/>
+          <p:nvPr/>
+        </p:nvSpPr>
+        <p:spPr>
+          <a:xfrm>
+            <a:off x="868680" y="4892040"/>
+            <a:ext cx="10469880" cy="731520"/>
+          </a:xfrm>
+          <a:prstGeom prst="rect">
+            <a:avLst/>
+          </a:prstGeom>
+          <a:noFill/>
+          <a:ln/>
+        </p:spPr>
+        <p:txBody>
+          <a:bodyPr wrap="square" lIns="0" tIns="0" rIns="0" bIns="0" rtlCol="0" anchor="ctr"/>
+          <a:lstStyle/>
+          <a:p>
+            <a:pPr indent="0" marL="0">
+              <a:lnSpc>
+                <a:spcPct val="130000"/>
+              </a:lnSpc>
+              <a:buNone/>
+            </a:pPr>
+            <a:r>
+              <a:rPr lang="en-US" sz="1550" i="1" dirty="0">
                 <a:solidFill>
                   <a:srgbClr val="141619"/>
                 </a:solidFill>
@@ -5206,172 +6031,38 @@
                 <a:ea typeface="Cambria" pitchFamily="34" charset="-122"/>
                 <a:cs typeface="Cambria" pitchFamily="34" charset="-120"/>
               </a:rPr>
-              <a:t>Custom / region</a:t>
-            </a:r>
-            <a:endParaRPr lang="en-US" sz="2600" dirty="0"/>
-          </a:p>
-        </p:txBody>
-      </p:sp>
-      <p:sp>
-        <p:nvSpPr>
-          <p:cNvPr id="12" name="Text 10"/>
-          <p:cNvSpPr/>
-          <p:nvPr/>
-        </p:nvSpPr>
-        <p:spPr>
-          <a:xfrm>
-            <a:off x="4681728" y="3831336"/>
-            <a:ext cx="2962656" cy="320040"/>
-          </a:xfrm>
-          <a:prstGeom prst="rect">
-            <a:avLst/>
-          </a:prstGeom>
-          <a:noFill/>
-          <a:ln/>
-        </p:spPr>
-        <p:txBody>
-          <a:bodyPr wrap="square" lIns="0" tIns="0" rIns="0" bIns="0" rtlCol="0" anchor="t"/>
-          <a:lstStyle/>
-          <a:p>
-            <a:pPr indent="0" marL="0">
-              <a:buNone/>
-            </a:pPr>
-            <a:r>
-              <a:rPr lang="en-US" sz="1050" i="1" dirty="0">
-                <a:solidFill>
-                  <a:srgbClr val="5B6068"/>
-                </a:solidFill>
-                <a:latin typeface="Calibri" pitchFamily="34" charset="0"/>
-                <a:ea typeface="Calibri" pitchFamily="34" charset="-122"/>
-                <a:cs typeface="Calibri" pitchFamily="34" charset="-120"/>
-              </a:rPr>
-              <a:t>annual, billed to the NGO</a:t>
-            </a:r>
-            <a:endParaRPr lang="en-US" sz="1050" dirty="0"/>
-          </a:p>
-        </p:txBody>
-      </p:sp>
-      <p:sp>
-        <p:nvSpPr>
-          <p:cNvPr id="13" name="Text 11"/>
-          <p:cNvSpPr/>
-          <p:nvPr/>
-        </p:nvSpPr>
-        <p:spPr>
-          <a:xfrm>
-            <a:off x="4681728" y="4297680"/>
-            <a:ext cx="2962656" cy="1188720"/>
-          </a:xfrm>
-          <a:prstGeom prst="rect">
-            <a:avLst/>
-          </a:prstGeom>
-          <a:noFill/>
-          <a:ln/>
-        </p:spPr>
-        <p:txBody>
-          <a:bodyPr wrap="square" lIns="0" tIns="0" rIns="0" bIns="0" rtlCol="0" anchor="t"/>
-          <a:lstStyle/>
-          <a:p>
-            <a:pPr marL="342900" indent="-342900">
-              <a:lnSpc>
-                <a:spcPct val="120000"/>
-              </a:lnSpc>
-              <a:spcAft>
-                <a:spcPts val="800"/>
-              </a:spcAft>
-              <a:buSzPct val="100000"/>
-              <a:buChar char="•"/>
-            </a:pPr>
-            <a:r>
-              <a:rPr lang="en-US" sz="1150" dirty="0">
-                <a:solidFill>
-                  <a:srgbClr val="141619"/>
-                </a:solidFill>
-                <a:latin typeface="Calibri" pitchFamily="34" charset="0"/>
-                <a:ea typeface="Calibri" pitchFamily="34" charset="-122"/>
-                <a:cs typeface="Calibri" pitchFamily="34" charset="-120"/>
-              </a:rPr>
-              <a:t>Bulk kits + dashboard</a:t>
-            </a:r>
-            <a:endParaRPr lang="en-US" sz="1150" dirty="0"/>
-          </a:p>
-          <a:p>
-            <a:pPr marL="342900" indent="-342900">
-              <a:lnSpc>
-                <a:spcPct val="120000"/>
-              </a:lnSpc>
-              <a:spcAft>
-                <a:spcPts val="800"/>
-              </a:spcAft>
-              <a:buSzPct val="100000"/>
-              <a:buChar char="•"/>
-            </a:pPr>
-            <a:r>
-              <a:rPr lang="en-US" sz="1150" dirty="0">
-                <a:solidFill>
-                  <a:srgbClr val="141619"/>
-                </a:solidFill>
-                <a:latin typeface="Calibri" pitchFamily="34" charset="0"/>
-                <a:ea typeface="Calibri" pitchFamily="34" charset="-122"/>
-                <a:cs typeface="Calibri" pitchFamily="34" charset="-120"/>
-              </a:rPr>
-              <a:t>Coverage reporting</a:t>
-            </a:r>
-            <a:endParaRPr lang="en-US" sz="1150" dirty="0"/>
-          </a:p>
-        </p:txBody>
-      </p:sp>
-      <p:sp>
-        <p:nvSpPr>
-          <p:cNvPr id="14" name="Shape 12"/>
-          <p:cNvSpPr/>
-          <p:nvPr/>
-        </p:nvSpPr>
-        <p:spPr>
-          <a:xfrm>
-            <a:off x="8092440" y="2880360"/>
-            <a:ext cx="3364992" cy="2743200"/>
-          </a:xfrm>
-          <a:prstGeom prst="rect">
-            <a:avLst/>
-          </a:prstGeom>
-          <a:solidFill>
-            <a:srgbClr val="FFFFFF"/>
-          </a:solidFill>
-          <a:ln w="12700">
-            <a:solidFill>
-              <a:srgbClr val="C3C2BA"/>
-            </a:solidFill>
-            <a:prstDash val="solid"/>
-          </a:ln>
-        </p:spPr>
-      </p:sp>
-      <p:sp>
-        <p:nvSpPr>
-          <p:cNvPr id="15" name="Text 13"/>
-          <p:cNvSpPr/>
-          <p:nvPr/>
-        </p:nvSpPr>
-        <p:spPr>
-          <a:xfrm>
-            <a:off x="8293608" y="3063240"/>
-            <a:ext cx="2962656" cy="256032"/>
-          </a:xfrm>
-          <a:prstGeom prst="rect">
-            <a:avLst/>
-          </a:prstGeom>
-          <a:noFill/>
-          <a:ln/>
-        </p:spPr>
-        <p:txBody>
-          <a:bodyPr wrap="square" lIns="0" tIns="0" rIns="0" bIns="0" rtlCol="0" anchor="ctr"/>
-          <a:lstStyle/>
-          <a:p>
-            <a:pPr indent="0" marL="0">
-              <a:buNone/>
-            </a:pPr>
-            <a:r>
-              <a:rPr lang="en-US" sz="1150" b="1" spc="120" kern="0" dirty="0">
+              <a:t>3.8M community health workers, 98+ countries (WHO) — staying “not a medical device” is what lets us reach them now, not in three years.</a:t>
+            </a:r>
+            <a:endParaRPr lang="en-US" sz="1550" dirty="0"/>
+          </a:p>
+        </p:txBody>
+      </p:sp>
+      <p:sp>
+        <p:nvSpPr>
+          <p:cNvPr id="11" name="Text 9"/>
+          <p:cNvSpPr/>
+          <p:nvPr/>
+        </p:nvSpPr>
+        <p:spPr>
+          <a:xfrm>
+            <a:off x="502920" y="6400800"/>
+            <a:ext cx="1828800" cy="274320"/>
+          </a:xfrm>
+          <a:prstGeom prst="rect">
+            <a:avLst/>
+          </a:prstGeom>
+          <a:noFill/>
+          <a:ln/>
+        </p:spPr>
+        <p:txBody>
+          <a:bodyPr wrap="square" lIns="0" tIns="0" rIns="0" bIns="0" rtlCol="0" anchor="ctr"/>
+          <a:lstStyle/>
+          <a:p>
+            <a:pPr indent="0" marL="0">
+              <a:buNone/>
+            </a:pPr>
+            <a:r>
+              <a:rPr lang="en-US" sz="900" spc="200" kern="0" dirty="0">
                 <a:solidFill>
                   <a:srgbClr val="8E939A"/>
                 </a:solidFill>
@@ -5379,232 +6070,6 @@
                 <a:ea typeface="Courier New" pitchFamily="34" charset="-122"/>
                 <a:cs typeface="Courier New" pitchFamily="34" charset="-120"/>
               </a:rPr>
-              <a:t>ENTERPRISE</a:t>
-            </a:r>
-            <a:endParaRPr lang="en-US" sz="1150" dirty="0"/>
-          </a:p>
-        </p:txBody>
-      </p:sp>
-      <p:sp>
-        <p:nvSpPr>
-          <p:cNvPr id="16" name="Text 14"/>
-          <p:cNvSpPr/>
-          <p:nvPr/>
-        </p:nvSpPr>
-        <p:spPr>
-          <a:xfrm>
-            <a:off x="8293608" y="3374136"/>
-            <a:ext cx="2962656" cy="457200"/>
-          </a:xfrm>
-          <a:prstGeom prst="rect">
-            <a:avLst/>
-          </a:prstGeom>
-          <a:noFill/>
-          <a:ln/>
-        </p:spPr>
-        <p:txBody>
-          <a:bodyPr wrap="square" lIns="0" tIns="0" rIns="0" bIns="0" rtlCol="0" anchor="ctr"/>
-          <a:lstStyle/>
-          <a:p>
-            <a:pPr indent="0" marL="0">
-              <a:buNone/>
-            </a:pPr>
-            <a:r>
-              <a:rPr lang="en-US" sz="2600" dirty="0">
-                <a:solidFill>
-                  <a:srgbClr val="141619"/>
-                </a:solidFill>
-                <a:latin typeface="Cambria" pitchFamily="34" charset="0"/>
-                <a:ea typeface="Cambria" pitchFamily="34" charset="-122"/>
-                <a:cs typeface="Cambria" pitchFamily="34" charset="-120"/>
-              </a:rPr>
-              <a:t>Custom</a:t>
-            </a:r>
-            <a:endParaRPr lang="en-US" sz="2600" dirty="0"/>
-          </a:p>
-        </p:txBody>
-      </p:sp>
-      <p:sp>
-        <p:nvSpPr>
-          <p:cNvPr id="17" name="Text 15"/>
-          <p:cNvSpPr/>
-          <p:nvPr/>
-        </p:nvSpPr>
-        <p:spPr>
-          <a:xfrm>
-            <a:off x="8293608" y="3831336"/>
-            <a:ext cx="2962656" cy="320040"/>
-          </a:xfrm>
-          <a:prstGeom prst="rect">
-            <a:avLst/>
-          </a:prstGeom>
-          <a:noFill/>
-          <a:ln/>
-        </p:spPr>
-        <p:txBody>
-          <a:bodyPr wrap="square" lIns="0" tIns="0" rIns="0" bIns="0" rtlCol="0" anchor="t"/>
-          <a:lstStyle/>
-          <a:p>
-            <a:pPr indent="0" marL="0">
-              <a:buNone/>
-            </a:pPr>
-            <a:r>
-              <a:rPr lang="en-US" sz="1050" i="1" dirty="0">
-                <a:solidFill>
-                  <a:srgbClr val="5B6068"/>
-                </a:solidFill>
-                <a:latin typeface="Calibri" pitchFamily="34" charset="0"/>
-                <a:ea typeface="Calibri" pitchFamily="34" charset="-122"/>
-                <a:cs typeface="Calibri" pitchFamily="34" charset="-120"/>
-              </a:rPr>
-              <a:t>deployment + support</a:t>
-            </a:r>
-            <a:endParaRPr lang="en-US" sz="1050" dirty="0"/>
-          </a:p>
-        </p:txBody>
-      </p:sp>
-      <p:sp>
-        <p:nvSpPr>
-          <p:cNvPr id="18" name="Text 16"/>
-          <p:cNvSpPr/>
-          <p:nvPr/>
-        </p:nvSpPr>
-        <p:spPr>
-          <a:xfrm>
-            <a:off x="8293608" y="4297680"/>
-            <a:ext cx="2962656" cy="1188720"/>
-          </a:xfrm>
-          <a:prstGeom prst="rect">
-            <a:avLst/>
-          </a:prstGeom>
-          <a:noFill/>
-          <a:ln/>
-        </p:spPr>
-        <p:txBody>
-          <a:bodyPr wrap="square" lIns="0" tIns="0" rIns="0" bIns="0" rtlCol="0" anchor="t"/>
-          <a:lstStyle/>
-          <a:p>
-            <a:pPr marL="342900" indent="-342900">
-              <a:lnSpc>
-                <a:spcPct val="120000"/>
-              </a:lnSpc>
-              <a:spcAft>
-                <a:spcPts val="800"/>
-              </a:spcAft>
-              <a:buSzPct val="100000"/>
-              <a:buChar char="•"/>
-            </a:pPr>
-            <a:r>
-              <a:rPr lang="en-US" sz="1150" dirty="0">
-                <a:solidFill>
-                  <a:srgbClr val="141619"/>
-                </a:solidFill>
-                <a:latin typeface="Calibri" pitchFamily="34" charset="0"/>
-                <a:ea typeface="Calibri" pitchFamily="34" charset="-122"/>
-                <a:cs typeface="Calibri" pitchFamily="34" charset="-120"/>
-              </a:rPr>
-              <a:t>Rollout &amp; training</a:t>
-            </a:r>
-            <a:endParaRPr lang="en-US" sz="1150" dirty="0"/>
-          </a:p>
-          <a:p>
-            <a:pPr marL="342900" indent="-342900">
-              <a:lnSpc>
-                <a:spcPct val="120000"/>
-              </a:lnSpc>
-              <a:spcAft>
-                <a:spcPts val="800"/>
-              </a:spcAft>
-              <a:buSzPct val="100000"/>
-              <a:buChar char="•"/>
-            </a:pPr>
-            <a:r>
-              <a:rPr lang="en-US" sz="1150" dirty="0">
-                <a:solidFill>
-                  <a:srgbClr val="141619"/>
-                </a:solidFill>
-                <a:latin typeface="Calibri" pitchFamily="34" charset="0"/>
-                <a:ea typeface="Calibri" pitchFamily="34" charset="-122"/>
-                <a:cs typeface="Calibri" pitchFamily="34" charset="-120"/>
-              </a:rPr>
-              <a:t>Health-system integration</a:t>
-            </a:r>
-            <a:endParaRPr lang="en-US" sz="1150" dirty="0"/>
-          </a:p>
-        </p:txBody>
-      </p:sp>
-      <p:sp>
-        <p:nvSpPr>
-          <p:cNvPr id="19" name="Text 17"/>
-          <p:cNvSpPr/>
-          <p:nvPr/>
-        </p:nvSpPr>
-        <p:spPr>
-          <a:xfrm>
-            <a:off x="868680" y="5806440"/>
-            <a:ext cx="10469880" cy="365760"/>
-          </a:xfrm>
-          <a:prstGeom prst="rect">
-            <a:avLst/>
-          </a:prstGeom>
-          <a:noFill/>
-          <a:ln/>
-        </p:spPr>
-        <p:txBody>
-          <a:bodyPr wrap="square" lIns="0" tIns="0" rIns="0" bIns="0" rtlCol="0" anchor="ctr"/>
-          <a:lstStyle/>
-          <a:p>
-            <a:pPr indent="0" marL="0">
-              <a:buNone/>
-            </a:pPr>
-            <a:r>
-              <a:rPr lang="en-US" sz="1200" i="1" dirty="0">
-                <a:solidFill>
-                  <a:srgbClr val="5B6068"/>
-                </a:solidFill>
-                <a:latin typeface="Calibri" pitchFamily="34" charset="0"/>
-                <a:ea typeface="Calibri" pitchFamily="34" charset="-122"/>
-                <a:cs typeface="Calibri" pitchFamily="34" charset="-120"/>
-              </a:rPr>
-              <a:t>For comparison: Eko's CORE 500 is $379 + $119.99/yr — built for clinicians, not this workforce.</a:t>
-            </a:r>
-            <a:endParaRPr lang="en-US" sz="1200" dirty="0"/>
-          </a:p>
-        </p:txBody>
-      </p:sp>
-      <p:sp>
-        <p:nvSpPr>
-          <p:cNvPr id="20" name="Text 18"/>
-          <p:cNvSpPr/>
-          <p:nvPr/>
-        </p:nvSpPr>
-        <p:spPr>
-          <a:xfrm>
-            <a:off x="502920" y="6400800"/>
-            <a:ext cx="1828800" cy="274320"/>
-          </a:xfrm>
-          <a:prstGeom prst="rect">
-            <a:avLst/>
-          </a:prstGeom>
-          <a:noFill/>
-          <a:ln/>
-        </p:spPr>
-        <p:txBody>
-          <a:bodyPr wrap="square" lIns="0" tIns="0" rIns="0" bIns="0" rtlCol="0" anchor="ctr"/>
-          <a:lstStyle/>
-          <a:p>
-            <a:pPr indent="0" marL="0">
-              <a:buNone/>
-            </a:pPr>
-            <a:r>
-              <a:rPr lang="en-US" sz="900" spc="200" kern="0" dirty="0">
-                <a:solidFill>
-                  <a:srgbClr val="8E939A"/>
-                </a:solidFill>
-                <a:latin typeface="Courier New" pitchFamily="34" charset="0"/>
-                <a:ea typeface="Courier New" pitchFamily="34" charset="-122"/>
-                <a:cs typeface="Courier New" pitchFamily="34" charset="-120"/>
-              </a:rPr>
               <a:t>PULSO</a:t>
             </a:r>
             <a:endParaRPr lang="en-US" sz="900" dirty="0"/>
@@ -5613,7 +6078,7 @@
       </p:sp>
       <p:sp>
         <p:nvSpPr>
-          <p:cNvPr id="21" name="Text 19"/>
+          <p:cNvPr id="12" name="Text 10"/>
           <p:cNvSpPr/>
           <p:nvPr/>
         </p:nvSpPr>
@@ -5697,8 +6162,8 @@
         </p:nvSpPr>
         <p:spPr>
           <a:xfrm>
-            <a:off x="868680" y="777240"/>
-            <a:ext cx="7315200" cy="292608"/>
+            <a:off x="868680" y="640080"/>
+            <a:ext cx="8229600" cy="292608"/>
           </a:xfrm>
           <a:prstGeom prst="rect">
             <a:avLst/>
@@ -5716,13 +6181,13 @@
             <a:r>
               <a:rPr lang="en-US" sz="1200" b="1" spc="220" kern="0" dirty="0">
                 <a:solidFill>
-                  <a:srgbClr val="9AA0A8"/>
+                  <a:srgbClr val="8E939A"/>
                 </a:solidFill>
                 <a:latin typeface="Courier New" pitchFamily="34" charset="0"/>
                 <a:ea typeface="Courier New" pitchFamily="34" charset="-122"/>
                 <a:cs typeface="Courier New" pitchFamily="34" charset="-120"/>
               </a:rPr>
-              <a:t>WHERE THIS GOES NEXT</a:t>
+              <a:t>PRICING — THE PLAN, NOT A LIVE CHECKOUT</a:t>
             </a:r>
             <a:endParaRPr lang="en-US" sz="1200" dirty="0"/>
           </a:p>
@@ -5736,8 +6201,8 @@
         </p:nvSpPr>
         <p:spPr>
           <a:xfrm>
-            <a:off x="868680" y="1371600"/>
-            <a:ext cx="9601200" cy="1463040"/>
+            <a:off x="868680" y="1188720"/>
+            <a:ext cx="8229600" cy="1371600"/>
           </a:xfrm>
           <a:prstGeom prst="rect">
             <a:avLst/>
@@ -5753,125 +6218,362 @@
               <a:buNone/>
             </a:pPr>
             <a:r>
-              <a:rPr lang="en-US" sz="3600" dirty="0">
-                <a:solidFill>
-                  <a:srgbClr val="EDEEF0"/>
+              <a:rPr lang="en-US" sz="3300" dirty="0">
+                <a:solidFill>
+                  <a:srgbClr val="141619"/>
                 </a:solidFill>
                 <a:latin typeface="Cambria" pitchFamily="34" charset="0"/>
                 <a:ea typeface="Cambria" pitchFamily="34" charset="-122"/>
                 <a:cs typeface="Cambria" pitchFamily="34" charset="-120"/>
               </a:rPr>
-              <a:t>Two real steps.</a:t>
-            </a:r>
-            <a:endParaRPr lang="en-US" sz="3600" dirty="0"/>
-          </a:p>
-          <a:p>
-            <a:pPr indent="0" marL="0">
-              <a:buNone/>
-            </a:pPr>
-            <a:r>
-              <a:rPr lang="en-US" sz="3600" dirty="0">
-                <a:solidFill>
-                  <a:srgbClr val="EDEEF0"/>
+              <a:t>Priced to be adopted,</a:t>
+            </a:r>
+            <a:endParaRPr lang="en-US" sz="3300" dirty="0"/>
+          </a:p>
+          <a:p>
+            <a:pPr indent="0" marL="0">
+              <a:buNone/>
+            </a:pPr>
+            <a:r>
+              <a:rPr lang="en-US" sz="3300" dirty="0">
+                <a:solidFill>
+                  <a:srgbClr val="141619"/>
                 </a:solidFill>
                 <a:latin typeface="Cambria" pitchFamily="34" charset="0"/>
                 <a:ea typeface="Cambria" pitchFamily="34" charset="-122"/>
                 <a:cs typeface="Cambria" pitchFamily="34" charset="-120"/>
               </a:rPr>
-              <a:t>Not a hundred maybes.</a:t>
-            </a:r>
-            <a:endParaRPr lang="en-US" sz="3600" dirty="0"/>
-          </a:p>
-        </p:txBody>
-      </p:sp>
-      <p:sp>
-        <p:nvSpPr>
-          <p:cNvPr id="4" name="Text 2"/>
-          <p:cNvSpPr/>
-          <p:nvPr/>
-        </p:nvSpPr>
-        <p:spPr>
-          <a:xfrm>
-            <a:off x="868680" y="3246120"/>
-            <a:ext cx="1005840" cy="914400"/>
-          </a:xfrm>
-          <a:prstGeom prst="rect">
-            <a:avLst/>
-          </a:prstGeom>
-          <a:noFill/>
-          <a:ln/>
-        </p:spPr>
-        <p:txBody>
-          <a:bodyPr wrap="square" lIns="0" tIns="0" rIns="0" bIns="0" rtlCol="0" anchor="ctr"/>
-          <a:lstStyle/>
-          <a:p>
-            <a:pPr indent="0" marL="0">
-              <a:buNone/>
-            </a:pPr>
-            <a:r>
-              <a:rPr lang="en-US" sz="4000" dirty="0">
-                <a:solidFill>
-                  <a:srgbClr val="FF5A2C"/>
+              <a:t>not to maximize margin.</a:t>
+            </a:r>
+            <a:endParaRPr lang="en-US" sz="3300" dirty="0"/>
+          </a:p>
+        </p:txBody>
+      </p:sp>
+      <p:sp>
+        <p:nvSpPr>
+          <p:cNvPr id="4" name="Shape 2"/>
+          <p:cNvSpPr/>
+          <p:nvPr/>
+        </p:nvSpPr>
+        <p:spPr>
+          <a:xfrm>
+            <a:off x="868680" y="2880360"/>
+            <a:ext cx="3364992" cy="2743200"/>
+          </a:xfrm>
+          <a:prstGeom prst="rect">
+            <a:avLst/>
+          </a:prstGeom>
+          <a:solidFill>
+            <a:srgbClr val="FFFFFF"/>
+          </a:solidFill>
+          <a:ln w="12700">
+            <a:solidFill>
+              <a:srgbClr val="C3C2BA"/>
+            </a:solidFill>
+            <a:prstDash val="solid"/>
+          </a:ln>
+        </p:spPr>
+      </p:sp>
+      <p:sp>
+        <p:nvSpPr>
+          <p:cNvPr id="5" name="Text 3"/>
+          <p:cNvSpPr/>
+          <p:nvPr/>
+        </p:nvSpPr>
+        <p:spPr>
+          <a:xfrm>
+            <a:off x="1069848" y="3063240"/>
+            <a:ext cx="2962656" cy="256032"/>
+          </a:xfrm>
+          <a:prstGeom prst="rect">
+            <a:avLst/>
+          </a:prstGeom>
+          <a:noFill/>
+          <a:ln/>
+        </p:spPr>
+        <p:txBody>
+          <a:bodyPr wrap="square" lIns="0" tIns="0" rIns="0" bIns="0" rtlCol="0" anchor="ctr"/>
+          <a:lstStyle/>
+          <a:p>
+            <a:pPr indent="0" marL="0">
+              <a:buNone/>
+            </a:pPr>
+            <a:r>
+              <a:rPr lang="en-US" sz="1150" b="1" spc="120" kern="0" dirty="0">
+                <a:solidFill>
+                  <a:srgbClr val="8E939A"/>
+                </a:solidFill>
+                <a:latin typeface="Courier New" pitchFamily="34" charset="0"/>
+                <a:ea typeface="Courier New" pitchFamily="34" charset="-122"/>
+                <a:cs typeface="Courier New" pitchFamily="34" charset="-120"/>
+              </a:rPr>
+              <a:t>PILOT</a:t>
+            </a:r>
+            <a:endParaRPr lang="en-US" sz="1150" dirty="0"/>
+          </a:p>
+        </p:txBody>
+      </p:sp>
+      <p:sp>
+        <p:nvSpPr>
+          <p:cNvPr id="6" name="Text 4"/>
+          <p:cNvSpPr/>
+          <p:nvPr/>
+        </p:nvSpPr>
+        <p:spPr>
+          <a:xfrm>
+            <a:off x="1069848" y="3374136"/>
+            <a:ext cx="2962656" cy="457200"/>
+          </a:xfrm>
+          <a:prstGeom prst="rect">
+            <a:avLst/>
+          </a:prstGeom>
+          <a:noFill/>
+          <a:ln/>
+        </p:spPr>
+        <p:txBody>
+          <a:bodyPr wrap="square" lIns="0" tIns="0" rIns="0" bIns="0" rtlCol="0" anchor="ctr"/>
+          <a:lstStyle/>
+          <a:p>
+            <a:pPr indent="0" marL="0">
+              <a:buNone/>
+            </a:pPr>
+            <a:r>
+              <a:rPr lang="en-US" sz="2600" dirty="0">
+                <a:solidFill>
+                  <a:srgbClr val="141619"/>
                 </a:solidFill>
                 <a:latin typeface="Cambria" pitchFamily="34" charset="0"/>
                 <a:ea typeface="Cambria" pitchFamily="34" charset="-122"/>
                 <a:cs typeface="Cambria" pitchFamily="34" charset="-120"/>
               </a:rPr>
-              <a:t>01</a:t>
-            </a:r>
-            <a:endParaRPr lang="en-US" sz="4000" dirty="0"/>
-          </a:p>
-        </p:txBody>
-      </p:sp>
-      <p:sp>
-        <p:nvSpPr>
-          <p:cNvPr id="5" name="Text 3"/>
-          <p:cNvSpPr/>
-          <p:nvPr/>
-        </p:nvSpPr>
-        <p:spPr>
-          <a:xfrm>
-            <a:off x="1920240" y="3246120"/>
-            <a:ext cx="9326880" cy="411480"/>
-          </a:xfrm>
-          <a:prstGeom prst="rect">
-            <a:avLst/>
-          </a:prstGeom>
-          <a:noFill/>
-          <a:ln/>
-        </p:spPr>
-        <p:txBody>
-          <a:bodyPr wrap="square" lIns="0" tIns="0" rIns="0" bIns="0" rtlCol="0" anchor="ctr"/>
-          <a:lstStyle/>
-          <a:p>
-            <a:pPr indent="0" marL="0">
-              <a:buNone/>
-            </a:pPr>
-            <a:r>
-              <a:rPr lang="en-US" sz="1500" b="1" dirty="0">
-                <a:solidFill>
-                  <a:srgbClr val="EDEEF0"/>
+              <a:t>~$45–60</a:t>
+            </a:r>
+            <a:endParaRPr lang="en-US" sz="2600" dirty="0"/>
+          </a:p>
+        </p:txBody>
+      </p:sp>
+      <p:sp>
+        <p:nvSpPr>
+          <p:cNvPr id="7" name="Text 5"/>
+          <p:cNvSpPr/>
+          <p:nvPr/>
+        </p:nvSpPr>
+        <p:spPr>
+          <a:xfrm>
+            <a:off x="1069848" y="3831336"/>
+            <a:ext cx="2962656" cy="320040"/>
+          </a:xfrm>
+          <a:prstGeom prst="rect">
+            <a:avLst/>
+          </a:prstGeom>
+          <a:noFill/>
+          <a:ln/>
+        </p:spPr>
+        <p:txBody>
+          <a:bodyPr wrap="square" lIns="0" tIns="0" rIns="0" bIns="0" rtlCol="0" anchor="t"/>
+          <a:lstStyle/>
+          <a:p>
+            <a:pPr indent="0" marL="0">
+              <a:buNone/>
+            </a:pPr>
+            <a:r>
+              <a:rPr lang="en-US" sz="1050" i="1" dirty="0">
+                <a:solidFill>
+                  <a:srgbClr val="5B6068"/>
+                </a:solidFill>
+                <a:latin typeface="Calibri" pitchFamily="34" charset="0"/>
+                <a:ea typeface="Calibri" pitchFamily="34" charset="-122"/>
+                <a:cs typeface="Calibri" pitchFamily="34" charset="-120"/>
+              </a:rPr>
+              <a:t>per kit, near cost</a:t>
+            </a:r>
+            <a:endParaRPr lang="en-US" sz="1050" dirty="0"/>
+          </a:p>
+        </p:txBody>
+      </p:sp>
+      <p:sp>
+        <p:nvSpPr>
+          <p:cNvPr id="8" name="Text 6"/>
+          <p:cNvSpPr/>
+          <p:nvPr/>
+        </p:nvSpPr>
+        <p:spPr>
+          <a:xfrm>
+            <a:off x="1069848" y="4297680"/>
+            <a:ext cx="2962656" cy="1188720"/>
+          </a:xfrm>
+          <a:prstGeom prst="rect">
+            <a:avLst/>
+          </a:prstGeom>
+          <a:noFill/>
+          <a:ln/>
+        </p:spPr>
+        <p:txBody>
+          <a:bodyPr wrap="square" lIns="0" tIns="0" rIns="0" bIns="0" rtlCol="0" anchor="t"/>
+          <a:lstStyle/>
+          <a:p>
+            <a:pPr marL="342900" indent="-342900">
+              <a:lnSpc>
+                <a:spcPct val="120000"/>
+              </a:lnSpc>
+              <a:spcAft>
+                <a:spcPts val="800"/>
+              </a:spcAft>
+              <a:buSzPct val="100000"/>
+              <a:buChar char="•"/>
+            </a:pPr>
+            <a:r>
+              <a:rPr lang="en-US" sz="1150" dirty="0">
+                <a:solidFill>
+                  <a:srgbClr val="141619"/>
+                </a:solidFill>
+                <a:latin typeface="Calibri" pitchFamily="34" charset="0"/>
+                <a:ea typeface="Calibri" pitchFamily="34" charset="-122"/>
+                <a:cs typeface="Calibri" pitchFamily="34" charset="-120"/>
+              </a:rPr>
+              <a:t>One hardware kit</a:t>
+            </a:r>
+            <a:endParaRPr lang="en-US" sz="1150" dirty="0"/>
+          </a:p>
+          <a:p>
+            <a:pPr marL="342900" indent="-342900">
+              <a:lnSpc>
+                <a:spcPct val="120000"/>
+              </a:lnSpc>
+              <a:spcAft>
+                <a:spcPts val="800"/>
+              </a:spcAft>
+              <a:buSzPct val="100000"/>
+              <a:buChar char="•"/>
+            </a:pPr>
+            <a:r>
+              <a:rPr lang="en-US" sz="1150" dirty="0">
+                <a:solidFill>
+                  <a:srgbClr val="141619"/>
+                </a:solidFill>
+                <a:latin typeface="Calibri" pitchFamily="34" charset="0"/>
+                <a:ea typeface="Calibri" pitchFamily="34" charset="-122"/>
+                <a:cs typeface="Calibri" pitchFamily="34" charset="-120"/>
+              </a:rPr>
+              <a:t>For one health post to try it</a:t>
+            </a:r>
+            <a:endParaRPr lang="en-US" sz="1150" dirty="0"/>
+          </a:p>
+        </p:txBody>
+      </p:sp>
+      <p:sp>
+        <p:nvSpPr>
+          <p:cNvPr id="9" name="Shape 7"/>
+          <p:cNvSpPr/>
+          <p:nvPr/>
+        </p:nvSpPr>
+        <p:spPr>
+          <a:xfrm>
+            <a:off x="4480560" y="2880360"/>
+            <a:ext cx="3364992" cy="2743200"/>
+          </a:xfrm>
+          <a:prstGeom prst="rect">
+            <a:avLst/>
+          </a:prstGeom>
+          <a:solidFill>
+            <a:srgbClr val="FFFFFF"/>
+          </a:solidFill>
+          <a:ln w="19050">
+            <a:solidFill>
+              <a:srgbClr val="D6360F"/>
+            </a:solidFill>
+            <a:prstDash val="solid"/>
+          </a:ln>
+        </p:spPr>
+      </p:sp>
+      <p:sp>
+        <p:nvSpPr>
+          <p:cNvPr id="10" name="Text 8"/>
+          <p:cNvSpPr/>
+          <p:nvPr/>
+        </p:nvSpPr>
+        <p:spPr>
+          <a:xfrm>
+            <a:off x="4681728" y="3063240"/>
+            <a:ext cx="2962656" cy="256032"/>
+          </a:xfrm>
+          <a:prstGeom prst="rect">
+            <a:avLst/>
+          </a:prstGeom>
+          <a:noFill/>
+          <a:ln/>
+        </p:spPr>
+        <p:txBody>
+          <a:bodyPr wrap="square" lIns="0" tIns="0" rIns="0" bIns="0" rtlCol="0" anchor="ctr"/>
+          <a:lstStyle/>
+          <a:p>
+            <a:pPr indent="0" marL="0">
+              <a:buNone/>
+            </a:pPr>
+            <a:r>
+              <a:rPr lang="en-US" sz="1150" b="1" spc="120" kern="0" dirty="0">
+                <a:solidFill>
+                  <a:srgbClr val="D6360F"/>
                 </a:solidFill>
                 <a:latin typeface="Courier New" pitchFamily="34" charset="0"/>
                 <a:ea typeface="Courier New" pitchFamily="34" charset="-122"/>
                 <a:cs typeface="Courier New" pitchFamily="34" charset="-120"/>
               </a:rPr>
-              <a:t>Test it against real, labeled medical recordings</a:t>
-            </a:r>
-            <a:endParaRPr lang="en-US" sz="1500" dirty="0"/>
-          </a:p>
-        </p:txBody>
-      </p:sp>
-      <p:sp>
-        <p:nvSpPr>
-          <p:cNvPr id="6" name="Text 4"/>
-          <p:cNvSpPr/>
-          <p:nvPr/>
-        </p:nvSpPr>
-        <p:spPr>
-          <a:xfrm>
-            <a:off x="1920240" y="3666744"/>
-            <a:ext cx="9326880" cy="457200"/>
+              <a:t>PROGRAM</a:t>
+            </a:r>
+            <a:endParaRPr lang="en-US" sz="1150" dirty="0"/>
+          </a:p>
+        </p:txBody>
+      </p:sp>
+      <p:sp>
+        <p:nvSpPr>
+          <p:cNvPr id="11" name="Text 9"/>
+          <p:cNvSpPr/>
+          <p:nvPr/>
+        </p:nvSpPr>
+        <p:spPr>
+          <a:xfrm>
+            <a:off x="4681728" y="3374136"/>
+            <a:ext cx="2962656" cy="457200"/>
+          </a:xfrm>
+          <a:prstGeom prst="rect">
+            <a:avLst/>
+          </a:prstGeom>
+          <a:noFill/>
+          <a:ln/>
+        </p:spPr>
+        <p:txBody>
+          <a:bodyPr wrap="square" lIns="0" tIns="0" rIns="0" bIns="0" rtlCol="0" anchor="ctr"/>
+          <a:lstStyle/>
+          <a:p>
+            <a:pPr indent="0" marL="0">
+              <a:buNone/>
+            </a:pPr>
+            <a:r>
+              <a:rPr lang="en-US" sz="2600" dirty="0">
+                <a:solidFill>
+                  <a:srgbClr val="141619"/>
+                </a:solidFill>
+                <a:latin typeface="Cambria" pitchFamily="34" charset="0"/>
+                <a:ea typeface="Cambria" pitchFamily="34" charset="-122"/>
+                <a:cs typeface="Cambria" pitchFamily="34" charset="-120"/>
+              </a:rPr>
+              <a:t>Custom / region</a:t>
+            </a:r>
+            <a:endParaRPr lang="en-US" sz="2600" dirty="0"/>
+          </a:p>
+        </p:txBody>
+      </p:sp>
+      <p:sp>
+        <p:nvSpPr>
+          <p:cNvPr id="12" name="Text 10"/>
+          <p:cNvSpPr/>
+          <p:nvPr/>
+        </p:nvSpPr>
+        <p:spPr>
+          <a:xfrm>
+            <a:off x="4681728" y="3831336"/>
+            <a:ext cx="2962656" cy="320040"/>
           </a:xfrm>
           <a:prstGeom prst="rect">
             <a:avLst/>
@@ -5887,170 +6589,374 @@
               <a:buNone/>
             </a:pPr>
             <a:r>
-              <a:rPr lang="en-US" sz="1300" dirty="0">
-                <a:solidFill>
-                  <a:srgbClr val="9AA0A8"/>
+              <a:rPr lang="en-US" sz="1050" i="1" dirty="0">
+                <a:solidFill>
+                  <a:srgbClr val="5B6068"/>
                 </a:solidFill>
                 <a:latin typeface="Calibri" pitchFamily="34" charset="0"/>
                 <a:ea typeface="Calibri" pitchFamily="34" charset="-122"/>
                 <a:cs typeface="Calibri" pitchFamily="34" charset="-120"/>
               </a:rPr>
-              <a:t>We're ready for this — we just couldn't reach the data this weekend.</a:t>
-            </a:r>
-            <a:endParaRPr lang="en-US" sz="1300" dirty="0"/>
-          </a:p>
-        </p:txBody>
-      </p:sp>
-      <p:sp>
-        <p:nvSpPr>
-          <p:cNvPr id="7" name="Text 5"/>
-          <p:cNvSpPr/>
-          <p:nvPr/>
-        </p:nvSpPr>
-        <p:spPr>
-          <a:xfrm>
-            <a:off x="868680" y="4617720"/>
-            <a:ext cx="1005840" cy="914400"/>
-          </a:xfrm>
-          <a:prstGeom prst="rect">
-            <a:avLst/>
-          </a:prstGeom>
-          <a:noFill/>
-          <a:ln/>
-        </p:spPr>
-        <p:txBody>
-          <a:bodyPr wrap="square" lIns="0" tIns="0" rIns="0" bIns="0" rtlCol="0" anchor="ctr"/>
-          <a:lstStyle/>
-          <a:p>
-            <a:pPr indent="0" marL="0">
-              <a:buNone/>
-            </a:pPr>
-            <a:r>
-              <a:rPr lang="en-US" sz="4000" dirty="0">
-                <a:solidFill>
-                  <a:srgbClr val="FF5A2C"/>
+              <a:t>annual, billed to the NGO</a:t>
+            </a:r>
+            <a:endParaRPr lang="en-US" sz="1050" dirty="0"/>
+          </a:p>
+        </p:txBody>
+      </p:sp>
+      <p:sp>
+        <p:nvSpPr>
+          <p:cNvPr id="13" name="Text 11"/>
+          <p:cNvSpPr/>
+          <p:nvPr/>
+        </p:nvSpPr>
+        <p:spPr>
+          <a:xfrm>
+            <a:off x="4681728" y="4297680"/>
+            <a:ext cx="2962656" cy="1188720"/>
+          </a:xfrm>
+          <a:prstGeom prst="rect">
+            <a:avLst/>
+          </a:prstGeom>
+          <a:noFill/>
+          <a:ln/>
+        </p:spPr>
+        <p:txBody>
+          <a:bodyPr wrap="square" lIns="0" tIns="0" rIns="0" bIns="0" rtlCol="0" anchor="t"/>
+          <a:lstStyle/>
+          <a:p>
+            <a:pPr marL="342900" indent="-342900">
+              <a:lnSpc>
+                <a:spcPct val="120000"/>
+              </a:lnSpc>
+              <a:spcAft>
+                <a:spcPts val="800"/>
+              </a:spcAft>
+              <a:buSzPct val="100000"/>
+              <a:buChar char="•"/>
+            </a:pPr>
+            <a:r>
+              <a:rPr lang="en-US" sz="1150" dirty="0">
+                <a:solidFill>
+                  <a:srgbClr val="141619"/>
+                </a:solidFill>
+                <a:latin typeface="Calibri" pitchFamily="34" charset="0"/>
+                <a:ea typeface="Calibri" pitchFamily="34" charset="-122"/>
+                <a:cs typeface="Calibri" pitchFamily="34" charset="-120"/>
+              </a:rPr>
+              <a:t>Bulk kits + dashboard</a:t>
+            </a:r>
+            <a:endParaRPr lang="en-US" sz="1150" dirty="0"/>
+          </a:p>
+          <a:p>
+            <a:pPr marL="342900" indent="-342900">
+              <a:lnSpc>
+                <a:spcPct val="120000"/>
+              </a:lnSpc>
+              <a:spcAft>
+                <a:spcPts val="800"/>
+              </a:spcAft>
+              <a:buSzPct val="100000"/>
+              <a:buChar char="•"/>
+            </a:pPr>
+            <a:r>
+              <a:rPr lang="en-US" sz="1150" dirty="0">
+                <a:solidFill>
+                  <a:srgbClr val="141619"/>
+                </a:solidFill>
+                <a:latin typeface="Calibri" pitchFamily="34" charset="0"/>
+                <a:ea typeface="Calibri" pitchFamily="34" charset="-122"/>
+                <a:cs typeface="Calibri" pitchFamily="34" charset="-120"/>
+              </a:rPr>
+              <a:t>Coverage reporting</a:t>
+            </a:r>
+            <a:endParaRPr lang="en-US" sz="1150" dirty="0"/>
+          </a:p>
+        </p:txBody>
+      </p:sp>
+      <p:sp>
+        <p:nvSpPr>
+          <p:cNvPr id="14" name="Shape 12"/>
+          <p:cNvSpPr/>
+          <p:nvPr/>
+        </p:nvSpPr>
+        <p:spPr>
+          <a:xfrm>
+            <a:off x="8092440" y="2880360"/>
+            <a:ext cx="3364992" cy="2743200"/>
+          </a:xfrm>
+          <a:prstGeom prst="rect">
+            <a:avLst/>
+          </a:prstGeom>
+          <a:solidFill>
+            <a:srgbClr val="FFFFFF"/>
+          </a:solidFill>
+          <a:ln w="12700">
+            <a:solidFill>
+              <a:srgbClr val="C3C2BA"/>
+            </a:solidFill>
+            <a:prstDash val="solid"/>
+          </a:ln>
+        </p:spPr>
+      </p:sp>
+      <p:sp>
+        <p:nvSpPr>
+          <p:cNvPr id="15" name="Text 13"/>
+          <p:cNvSpPr/>
+          <p:nvPr/>
+        </p:nvSpPr>
+        <p:spPr>
+          <a:xfrm>
+            <a:off x="8293608" y="3063240"/>
+            <a:ext cx="2962656" cy="256032"/>
+          </a:xfrm>
+          <a:prstGeom prst="rect">
+            <a:avLst/>
+          </a:prstGeom>
+          <a:noFill/>
+          <a:ln/>
+        </p:spPr>
+        <p:txBody>
+          <a:bodyPr wrap="square" lIns="0" tIns="0" rIns="0" bIns="0" rtlCol="0" anchor="ctr"/>
+          <a:lstStyle/>
+          <a:p>
+            <a:pPr indent="0" marL="0">
+              <a:buNone/>
+            </a:pPr>
+            <a:r>
+              <a:rPr lang="en-US" sz="1150" b="1" spc="120" kern="0" dirty="0">
+                <a:solidFill>
+                  <a:srgbClr val="8E939A"/>
+                </a:solidFill>
+                <a:latin typeface="Courier New" pitchFamily="34" charset="0"/>
+                <a:ea typeface="Courier New" pitchFamily="34" charset="-122"/>
+                <a:cs typeface="Courier New" pitchFamily="34" charset="-120"/>
+              </a:rPr>
+              <a:t>ENTERPRISE</a:t>
+            </a:r>
+            <a:endParaRPr lang="en-US" sz="1150" dirty="0"/>
+          </a:p>
+        </p:txBody>
+      </p:sp>
+      <p:sp>
+        <p:nvSpPr>
+          <p:cNvPr id="16" name="Text 14"/>
+          <p:cNvSpPr/>
+          <p:nvPr/>
+        </p:nvSpPr>
+        <p:spPr>
+          <a:xfrm>
+            <a:off x="8293608" y="3374136"/>
+            <a:ext cx="2962656" cy="457200"/>
+          </a:xfrm>
+          <a:prstGeom prst="rect">
+            <a:avLst/>
+          </a:prstGeom>
+          <a:noFill/>
+          <a:ln/>
+        </p:spPr>
+        <p:txBody>
+          <a:bodyPr wrap="square" lIns="0" tIns="0" rIns="0" bIns="0" rtlCol="0" anchor="ctr"/>
+          <a:lstStyle/>
+          <a:p>
+            <a:pPr indent="0" marL="0">
+              <a:buNone/>
+            </a:pPr>
+            <a:r>
+              <a:rPr lang="en-US" sz="2600" dirty="0">
+                <a:solidFill>
+                  <a:srgbClr val="141619"/>
                 </a:solidFill>
                 <a:latin typeface="Cambria" pitchFamily="34" charset="0"/>
                 <a:ea typeface="Cambria" pitchFamily="34" charset="-122"/>
                 <a:cs typeface="Cambria" pitchFamily="34" charset="-120"/>
               </a:rPr>
-              <a:t>02</a:t>
-            </a:r>
-            <a:endParaRPr lang="en-US" sz="4000" dirty="0"/>
-          </a:p>
-        </p:txBody>
-      </p:sp>
-      <p:sp>
-        <p:nvSpPr>
-          <p:cNvPr id="8" name="Text 6"/>
-          <p:cNvSpPr/>
-          <p:nvPr/>
-        </p:nvSpPr>
-        <p:spPr>
-          <a:xfrm>
-            <a:off x="1920240" y="4617720"/>
-            <a:ext cx="9326880" cy="411480"/>
-          </a:xfrm>
-          <a:prstGeom prst="rect">
-            <a:avLst/>
-          </a:prstGeom>
-          <a:noFill/>
-          <a:ln/>
-        </p:spPr>
-        <p:txBody>
-          <a:bodyPr wrap="square" lIns="0" tIns="0" rIns="0" bIns="0" rtlCol="0" anchor="ctr"/>
-          <a:lstStyle/>
-          <a:p>
-            <a:pPr indent="0" marL="0">
-              <a:buNone/>
-            </a:pPr>
-            <a:r>
-              <a:rPr lang="en-US" sz="1500" b="1" dirty="0">
-                <a:solidFill>
-                  <a:srgbClr val="EDEEF0"/>
+              <a:t>Custom</a:t>
+            </a:r>
+            <a:endParaRPr lang="en-US" sz="2600" dirty="0"/>
+          </a:p>
+        </p:txBody>
+      </p:sp>
+      <p:sp>
+        <p:nvSpPr>
+          <p:cNvPr id="17" name="Text 15"/>
+          <p:cNvSpPr/>
+          <p:nvPr/>
+        </p:nvSpPr>
+        <p:spPr>
+          <a:xfrm>
+            <a:off x="8293608" y="3831336"/>
+            <a:ext cx="2962656" cy="320040"/>
+          </a:xfrm>
+          <a:prstGeom prst="rect">
+            <a:avLst/>
+          </a:prstGeom>
+          <a:noFill/>
+          <a:ln/>
+        </p:spPr>
+        <p:txBody>
+          <a:bodyPr wrap="square" lIns="0" tIns="0" rIns="0" bIns="0" rtlCol="0" anchor="t"/>
+          <a:lstStyle/>
+          <a:p>
+            <a:pPr indent="0" marL="0">
+              <a:buNone/>
+            </a:pPr>
+            <a:r>
+              <a:rPr lang="en-US" sz="1050" i="1" dirty="0">
+                <a:solidFill>
+                  <a:srgbClr val="5B6068"/>
+                </a:solidFill>
+                <a:latin typeface="Calibri" pitchFamily="34" charset="0"/>
+                <a:ea typeface="Calibri" pitchFamily="34" charset="-122"/>
+                <a:cs typeface="Calibri" pitchFamily="34" charset="-120"/>
+              </a:rPr>
+              <a:t>deployment + support</a:t>
+            </a:r>
+            <a:endParaRPr lang="en-US" sz="1050" dirty="0"/>
+          </a:p>
+        </p:txBody>
+      </p:sp>
+      <p:sp>
+        <p:nvSpPr>
+          <p:cNvPr id="18" name="Text 16"/>
+          <p:cNvSpPr/>
+          <p:nvPr/>
+        </p:nvSpPr>
+        <p:spPr>
+          <a:xfrm>
+            <a:off x="8293608" y="4297680"/>
+            <a:ext cx="2962656" cy="1188720"/>
+          </a:xfrm>
+          <a:prstGeom prst="rect">
+            <a:avLst/>
+          </a:prstGeom>
+          <a:noFill/>
+          <a:ln/>
+        </p:spPr>
+        <p:txBody>
+          <a:bodyPr wrap="square" lIns="0" tIns="0" rIns="0" bIns="0" rtlCol="0" anchor="t"/>
+          <a:lstStyle/>
+          <a:p>
+            <a:pPr marL="342900" indent="-342900">
+              <a:lnSpc>
+                <a:spcPct val="120000"/>
+              </a:lnSpc>
+              <a:spcAft>
+                <a:spcPts val="800"/>
+              </a:spcAft>
+              <a:buSzPct val="100000"/>
+              <a:buChar char="•"/>
+            </a:pPr>
+            <a:r>
+              <a:rPr lang="en-US" sz="1150" dirty="0">
+                <a:solidFill>
+                  <a:srgbClr val="141619"/>
+                </a:solidFill>
+                <a:latin typeface="Calibri" pitchFamily="34" charset="0"/>
+                <a:ea typeface="Calibri" pitchFamily="34" charset="-122"/>
+                <a:cs typeface="Calibri" pitchFamily="34" charset="-120"/>
+              </a:rPr>
+              <a:t>Rollout &amp; training</a:t>
+            </a:r>
+            <a:endParaRPr lang="en-US" sz="1150" dirty="0"/>
+          </a:p>
+          <a:p>
+            <a:pPr marL="342900" indent="-342900">
+              <a:lnSpc>
+                <a:spcPct val="120000"/>
+              </a:lnSpc>
+              <a:spcAft>
+                <a:spcPts val="800"/>
+              </a:spcAft>
+              <a:buSzPct val="100000"/>
+              <a:buChar char="•"/>
+            </a:pPr>
+            <a:r>
+              <a:rPr lang="en-US" sz="1150" dirty="0">
+                <a:solidFill>
+                  <a:srgbClr val="141619"/>
+                </a:solidFill>
+                <a:latin typeface="Calibri" pitchFamily="34" charset="0"/>
+                <a:ea typeface="Calibri" pitchFamily="34" charset="-122"/>
+                <a:cs typeface="Calibri" pitchFamily="34" charset="-120"/>
+              </a:rPr>
+              <a:t>Health-system integration</a:t>
+            </a:r>
+            <a:endParaRPr lang="en-US" sz="1150" dirty="0"/>
+          </a:p>
+        </p:txBody>
+      </p:sp>
+      <p:sp>
+        <p:nvSpPr>
+          <p:cNvPr id="19" name="Text 17"/>
+          <p:cNvSpPr/>
+          <p:nvPr/>
+        </p:nvSpPr>
+        <p:spPr>
+          <a:xfrm>
+            <a:off x="868680" y="5806440"/>
+            <a:ext cx="10469880" cy="365760"/>
+          </a:xfrm>
+          <a:prstGeom prst="rect">
+            <a:avLst/>
+          </a:prstGeom>
+          <a:noFill/>
+          <a:ln/>
+        </p:spPr>
+        <p:txBody>
+          <a:bodyPr wrap="square" lIns="0" tIns="0" rIns="0" bIns="0" rtlCol="0" anchor="ctr"/>
+          <a:lstStyle/>
+          <a:p>
+            <a:pPr indent="0" marL="0">
+              <a:buNone/>
+            </a:pPr>
+            <a:r>
+              <a:rPr lang="en-US" sz="1200" i="1" dirty="0">
+                <a:solidFill>
+                  <a:srgbClr val="5B6068"/>
+                </a:solidFill>
+                <a:latin typeface="Calibri" pitchFamily="34" charset="0"/>
+                <a:ea typeface="Calibri" pitchFamily="34" charset="-122"/>
+                <a:cs typeface="Calibri" pitchFamily="34" charset="-120"/>
+              </a:rPr>
+              <a:t>For comparison: Eko's CORE 500 is $379 + $119.99/yr — built for clinicians, not this workforce.</a:t>
+            </a:r>
+            <a:endParaRPr lang="en-US" sz="1200" dirty="0"/>
+          </a:p>
+        </p:txBody>
+      </p:sp>
+      <p:sp>
+        <p:nvSpPr>
+          <p:cNvPr id="20" name="Text 18"/>
+          <p:cNvSpPr/>
+          <p:nvPr/>
+        </p:nvSpPr>
+        <p:spPr>
+          <a:xfrm>
+            <a:off x="502920" y="6400800"/>
+            <a:ext cx="1828800" cy="274320"/>
+          </a:xfrm>
+          <a:prstGeom prst="rect">
+            <a:avLst/>
+          </a:prstGeom>
+          <a:noFill/>
+          <a:ln/>
+        </p:spPr>
+        <p:txBody>
+          <a:bodyPr wrap="square" lIns="0" tIns="0" rIns="0" bIns="0" rtlCol="0" anchor="ctr"/>
+          <a:lstStyle/>
+          <a:p>
+            <a:pPr indent="0" marL="0">
+              <a:buNone/>
+            </a:pPr>
+            <a:r>
+              <a:rPr lang="en-US" sz="900" spc="200" kern="0" dirty="0">
+                <a:solidFill>
+                  <a:srgbClr val="8E939A"/>
                 </a:solidFill>
                 <a:latin typeface="Courier New" pitchFamily="34" charset="0"/>
                 <a:ea typeface="Courier New" pitchFamily="34" charset="-122"/>
                 <a:cs typeface="Courier New" pitchFamily="34" charset="-120"/>
               </a:rPr>
-              <a:t>Test the microphone against real skin contact</a:t>
-            </a:r>
-            <a:endParaRPr lang="en-US" sz="1500" dirty="0"/>
-          </a:p>
-        </p:txBody>
-      </p:sp>
-      <p:sp>
-        <p:nvSpPr>
-          <p:cNvPr id="9" name="Text 7"/>
-          <p:cNvSpPr/>
-          <p:nvPr/>
-        </p:nvSpPr>
-        <p:spPr>
-          <a:xfrm>
-            <a:off x="1920240" y="5038344"/>
-            <a:ext cx="9326880" cy="457200"/>
-          </a:xfrm>
-          <a:prstGeom prst="rect">
-            <a:avLst/>
-          </a:prstGeom>
-          <a:noFill/>
-          <a:ln/>
-        </p:spPr>
-        <p:txBody>
-          <a:bodyPr wrap="square" lIns="0" tIns="0" rIns="0" bIns="0" rtlCol="0" anchor="t"/>
-          <a:lstStyle/>
-          <a:p>
-            <a:pPr indent="0" marL="0">
-              <a:buNone/>
-            </a:pPr>
-            <a:r>
-              <a:rPr lang="en-US" sz="1300" dirty="0">
-                <a:solidFill>
-                  <a:srgbClr val="9AA0A8"/>
-                </a:solidFill>
-                <a:latin typeface="Calibri" pitchFamily="34" charset="0"/>
-                <a:ea typeface="Calibri" pitchFamily="34" charset="-122"/>
-                <a:cs typeface="Calibri" pitchFamily="34" charset="-120"/>
-              </a:rPr>
-              <a:t>The one honest unknown left. Flagged, not hidden.</a:t>
-            </a:r>
-            <a:endParaRPr lang="en-US" sz="1300" dirty="0"/>
-          </a:p>
-        </p:txBody>
-      </p:sp>
-      <p:sp>
-        <p:nvSpPr>
-          <p:cNvPr id="10" name="Text 8"/>
-          <p:cNvSpPr/>
-          <p:nvPr/>
-        </p:nvSpPr>
-        <p:spPr>
-          <a:xfrm>
-            <a:off x="502920" y="6400800"/>
-            <a:ext cx="1828800" cy="274320"/>
-          </a:xfrm>
-          <a:prstGeom prst="rect">
-            <a:avLst/>
-          </a:prstGeom>
-          <a:noFill/>
-          <a:ln/>
-        </p:spPr>
-        <p:txBody>
-          <a:bodyPr wrap="square" lIns="0" tIns="0" rIns="0" bIns="0" rtlCol="0" anchor="ctr"/>
-          <a:lstStyle/>
-          <a:p>
-            <a:pPr indent="0" marL="0">
-              <a:buNone/>
-            </a:pPr>
-            <a:r>
-              <a:rPr lang="en-US" sz="900" spc="200" kern="0" dirty="0">
-                <a:solidFill>
-                  <a:srgbClr val="9AA0A8"/>
-                </a:solidFill>
-                <a:latin typeface="Courier New" pitchFamily="34" charset="0"/>
-                <a:ea typeface="Courier New" pitchFamily="34" charset="-122"/>
-                <a:cs typeface="Courier New" pitchFamily="34" charset="-120"/>
-              </a:rPr>
               <a:t>PULSO</a:t>
             </a:r>
             <a:endParaRPr lang="en-US" sz="900" dirty="0"/>
@@ -6059,7 +6965,7 @@
       </p:sp>
       <p:sp>
         <p:nvSpPr>
-          <p:cNvPr id="11" name="Text 9"/>
+          <p:cNvPr id="21" name="Text 19"/>
           <p:cNvSpPr/>
           <p:nvPr/>
         </p:nvSpPr>
@@ -6084,7 +6990,7 @@
             <a:r>
               <a:rPr lang="en-US" sz="900" dirty="0">
                 <a:solidFill>
-                  <a:srgbClr val="9AA0A8"/>
+                  <a:srgbClr val="8E939A"/>
                 </a:solidFill>
                 <a:latin typeface="Courier New" pitchFamily="34" charset="0"/>
                 <a:ea typeface="Courier New" pitchFamily="34" charset="-122"/>

--- a/presentation/Pulso_Pitch_Deck.pptx
+++ b/presentation/Pulso_Pitch_Deck.pptx
@@ -1304,7 +1304,7 @@
           <a:p>
             <a:r>
               <a:rPr lang="en-US" dirty="0"/>
-              <a:t>The regulatory line at the bottom is the one most teams won't have -- say it plainly, don't rush it.</a:t>
+              <a:t>Two channels, one product -- institutional gets us scale, direct gets us revenue while that closes.</a:t>
             </a:r>
             <a:endParaRPr lang="en-US" dirty="0"/>
           </a:p>
@@ -4411,7 +4411,7 @@
                 <a:ea typeface="Courier New" pitchFamily="34" charset="-122"/>
                 <a:cs typeface="Courier New" pitchFamily="34" charset="-120"/>
               </a:rPr>
-              <a:t>HEART RATE</a:t>
+              <a:t>RATE</a:t>
             </a:r>
             <a:endParaRPr lang="en-US" sz="1000" dirty="0"/>
           </a:p>
@@ -5760,7 +5760,7 @@
                 <a:ea typeface="Cambria" pitchFamily="34" charset="-122"/>
                 <a:cs typeface="Cambria" pitchFamily="34" charset="-120"/>
               </a:rPr>
-              <a:t>Sell hardware near cost.</a:t>
+              <a:t>Two buyers, two clocks.</a:t>
             </a:r>
             <a:endParaRPr lang="en-US" sz="3300" dirty="0"/>
           </a:p>
@@ -5777,7 +5777,7 @@
                 <a:ea typeface="Cambria" pitchFamily="34" charset="-122"/>
                 <a:cs typeface="Cambria" pitchFamily="34" charset="-120"/>
               </a:rPr>
-              <a:t>Charge the program, not the worker.</a:t>
+              <a:t>Hardware near cost either way.</a:t>
             </a:r>
             <a:endParaRPr lang="en-US" sz="3300" dirty="0"/>
           </a:p>
@@ -5841,7 +5841,7 @@
                 <a:ea typeface="Courier New" pitchFamily="34" charset="-122"/>
                 <a:cs typeface="Courier New" pitchFamily="34" charset="-120"/>
               </a:rPr>
-              <a:t>WHO PAYS</a:t>
+              <a:t>INSTITUTIONAL — B2B2G</a:t>
             </a:r>
             <a:endParaRPr lang="en-US" sz="1050" dirty="0"/>
           </a:p>
@@ -5883,7 +5883,7 @@
                 <a:ea typeface="Calibri" pitchFamily="34" charset="-122"/>
                 <a:cs typeface="Calibri" pitchFamily="34" charset="-120"/>
               </a:rPr>
-              <a:t>Not the health worker — they hold no budget. The buyer is the NGO or ministry that already funds and equips them.</a:t>
+              <a:t>NGOs and ministries that already fund community health workers. Scale channel — 3.8M workers, 98+ countries. Slow to close.</a:t>
             </a:r>
             <a:endParaRPr lang="en-US" sz="1350" dirty="0"/>
           </a:p>
@@ -5947,7 +5947,7 @@
                 <a:ea typeface="Courier New" pitchFamily="34" charset="-122"/>
                 <a:cs typeface="Courier New" pitchFamily="34" charset="-120"/>
               </a:rPr>
-              <a:t>HOW WE MAKE MONEY</a:t>
+              <a:t>DIRECT — B2B</a:t>
             </a:r>
             <a:endParaRPr lang="en-US" sz="1050" dirty="0"/>
           </a:p>
@@ -5989,7 +5989,7 @@
                 <a:ea typeface="Calibri" pitchFamily="34" charset="-122"/>
                 <a:cs typeface="Calibri" pitchFamily="34" charset="-120"/>
               </a:rPr>
-              <a:t>Hardware at near-cost, wide reach. A program-level reporting subscription, billed to the NGO or ministry.</a:t>
+              <a:t>Clinics and pharmacies with their own budget, no institution in between. Slower to scale, but closes today.</a:t>
             </a:r>
             <a:endParaRPr lang="en-US" sz="1350" dirty="0"/>
           </a:p>
@@ -6031,7 +6031,7 @@
                 <a:ea typeface="Cambria" pitchFamily="34" charset="-122"/>
                 <a:cs typeface="Cambria" pitchFamily="34" charset="-120"/>
               </a:rPr>
-              <a:t>3.8M community health workers, 98+ countries (WHO) — staying “not a medical device” is what lets us reach them now, not in three years.</a:t>
+              <a:t>Hardware near cost on both channels. A reporting subscription — billed per-program for institutions, per-clinic for direct buyers — is where margin comes from.</a:t>
             </a:r>
             <a:endParaRPr lang="en-US" sz="1550" dirty="0"/>
           </a:p>
@@ -6307,7 +6307,7 @@
                 <a:ea typeface="Courier New" pitchFamily="34" charset="-122"/>
                 <a:cs typeface="Courier New" pitchFamily="34" charset="-120"/>
               </a:rPr>
-              <a:t>PILOT</a:t>
+              <a:t>CLINIC DIRECT</a:t>
             </a:r>
             <a:endParaRPr lang="en-US" sz="1150" dirty="0"/>
           </a:p>
@@ -6346,7 +6346,7 @@
                 <a:ea typeface="Cambria" pitchFamily="34" charset="-122"/>
                 <a:cs typeface="Cambria" pitchFamily="34" charset="-120"/>
               </a:rPr>
-              <a:t>~$45–60</a:t>
+              <a:t>$149–199</a:t>
             </a:r>
             <a:endParaRPr lang="en-US" sz="2600" dirty="0"/>
           </a:p>
@@ -6385,7 +6385,7 @@
                 <a:ea typeface="Calibri" pitchFamily="34" charset="-122"/>
                 <a:cs typeface="Calibri" pitchFamily="34" charset="-120"/>
               </a:rPr>
-              <a:t>per kit, near cost</a:t>
+              <a:t>per kit + $15/mo software</a:t>
             </a:r>
             <a:endParaRPr lang="en-US" sz="1050" dirty="0"/>
           </a:p>
@@ -6431,7 +6431,7 @@
                 <a:ea typeface="Calibri" pitchFamily="34" charset="-122"/>
                 <a:cs typeface="Calibri" pitchFamily="34" charset="-120"/>
               </a:rPr>
-              <a:t>One hardware kit</a:t>
+              <a:t>Buy today, no institution needed</a:t>
             </a:r>
             <a:endParaRPr lang="en-US" sz="1150" dirty="0"/>
           </a:p>
@@ -6455,7 +6455,7 @@
                 <a:ea typeface="Calibri" pitchFamily="34" charset="-122"/>
                 <a:cs typeface="Calibri" pitchFamily="34" charset="-120"/>
               </a:rPr>
-              <a:t>For one health post to try it</a:t>
+              <a:t>One kit + clinic-facing app</a:t>
             </a:r>
             <a:endParaRPr lang="en-US" sz="1150" dirty="0"/>
           </a:p>
